--- a/assets/figures-editable/c1-c2/c1-e30.pptx
+++ b/assets/figures-editable/c1-c2/c1-e30.pptx
@@ -7,7 +7,7 @@
   <p:sldIdLst>
     <p:sldId id="256" r:id="rId7"/>
   </p:sldIdLst>
-  <p:sldSz cx="11948160" cy="7924799" type="screen4x3"/>
+  <p:sldSz cx="12191695" cy="6858000" type="screen4x3"/>
   <p:notesSz cx="6858000" cy="9144000"/>
   <p:defaultTextStyle>
     <a:defPPr>
@@ -3098,14 +3098,14 @@
       <p:grpSpPr/>
       <p:sp>
         <p:nvSpPr>
-          <p:cNvPr id="2" name="text1" descr="sci-ppt:C1-E30-001"/>
+          <p:cNvPr id="2" name="C1-E30 text 0" descr="sci-ppt:o000"/>
           <p:cNvSpPr txBox="1"/>
           <p:nvPr/>
         </p:nvSpPr>
         <p:spPr>
           <a:xfrm>
-            <a:off x="316992" y="268224"/>
-            <a:ext cx="11277600" cy="359054"/>
+            <a:off x="274320" y="118872"/>
+            <a:ext cx="11612880" cy="340105"/>
           </a:xfrm>
           <a:prstGeom prst="rect">
             <a:avLst/>
@@ -3114,7 +3114,7 @@
           <a:effectLst/>
         </p:spPr>
         <p:txBody>
-          <a:bodyPr wrap="none" lIns="27432" rIns="27432" tIns="18288" bIns="18288" anchor="ctr">
+          <a:bodyPr wrap="none" lIns="18288" rIns="18288" tIns="18288" bIns="18288" anchor="t">
             <a:spAutoFit/>
           </a:bodyPr>
           <a:lstStyle/>
@@ -3125,37 +3125,1858 @@
               </a:spcAft>
             </a:pPr>
             <a:r>
-              <a:rPr sz="1823" b="0" i="0">
+              <a:rPr sz="1900" b="1" i="0">
                 <a:solidFill>
                   <a:srgbClr val="8EDBD4"/>
                 </a:solidFill>
                 <a:latin typeface="Arial"/>
               </a:rPr>
-              <a:t>C1-E30 | Physical-variable diagram</a:t>
-            </a:r>
-          </a:p>
-        </p:txBody>
-      </p:sp>
-      <p:sp>
-        <p:nvSpPr>
-          <p:cNvPr id="3" name="ellipse2" descr="sci-ppt:C1-E30-002"/>
+              <a:t>C1-E30 · Exact spherical recovery of the potential closure</a:t>
+            </a:r>
+          </a:p>
+        </p:txBody>
+      </p:sp>
+      <p:cxnSp>
+        <p:nvCxnSpPr>
+          <p:cNvPr id="3" name="C1-E30 line 1" descr="sci-ppt:o001"/>
+          <p:cNvCxnSpPr/>
+          <p:nvPr/>
+        </p:nvCxnSpPr>
+        <p:spPr>
+          <a:xfrm>
+            <a:off x="6858000" y="4937760"/>
+            <a:ext cx="4937760" cy="0"/>
+          </a:xfrm>
+          <a:prstGeom prst="line">
+            <a:avLst/>
+          </a:prstGeom>
+          <a:ln w="19050">
+            <a:solidFill>
+              <a:srgbClr val="B4C7D2"/>
+            </a:solidFill>
+          </a:ln>
+          <a:effectLst/>
+        </p:spPr>
+      </p:cxnSp>
+      <p:cxnSp>
+        <p:nvCxnSpPr>
+          <p:cNvPr id="4" name="C1-E30 line 2" descr="sci-ppt:o002"/>
+          <p:cNvCxnSpPr/>
+          <p:nvPr/>
+        </p:nvCxnSpPr>
+        <p:spPr>
+          <a:xfrm>
+            <a:off x="6858000" y="1371600"/>
+            <a:ext cx="0" cy="3566160"/>
+          </a:xfrm>
+          <a:prstGeom prst="line">
+            <a:avLst/>
+          </a:prstGeom>
+          <a:ln w="19050">
+            <a:solidFill>
+              <a:srgbClr val="B4C7D2"/>
+            </a:solidFill>
+          </a:ln>
+          <a:effectLst/>
+        </p:spPr>
+      </p:cxnSp>
+      <p:cxnSp>
+        <p:nvCxnSpPr>
+          <p:cNvPr id="5" name="C1-E30 line 3" descr="sci-ppt:o003"/>
+          <p:cNvCxnSpPr/>
+          <p:nvPr/>
+        </p:nvCxnSpPr>
+        <p:spPr>
+          <a:xfrm>
+            <a:off x="6858000" y="4937760"/>
+            <a:ext cx="0" cy="64008"/>
+          </a:xfrm>
+          <a:prstGeom prst="line">
+            <a:avLst/>
+          </a:prstGeom>
+          <a:ln w="12700">
+            <a:solidFill>
+              <a:srgbClr val="B4C7D2"/>
+            </a:solidFill>
+          </a:ln>
+          <a:effectLst/>
+        </p:spPr>
+      </p:cxnSp>
+      <p:cxnSp>
+        <p:nvCxnSpPr>
+          <p:cNvPr id="6" name="C1-E30 line 4" descr="sci-ppt:o004"/>
+          <p:cNvCxnSpPr/>
+          <p:nvPr/>
+        </p:nvCxnSpPr>
+        <p:spPr>
+          <a:xfrm>
+            <a:off x="6858000" y="1371600"/>
+            <a:ext cx="0" cy="3566160"/>
+          </a:xfrm>
+          <a:prstGeom prst="line">
+            <a:avLst/>
+          </a:prstGeom>
+          <a:ln w="7620">
+            <a:solidFill>
+              <a:srgbClr val="2E4756"/>
+            </a:solidFill>
+          </a:ln>
+          <a:effectLst/>
+        </p:spPr>
+      </p:cxnSp>
+      <p:sp>
+        <p:nvSpPr>
+          <p:cNvPr id="7" name="C1-E30 text 5" descr="sci-ppt:o005"/>
+          <p:cNvSpPr txBox="1"/>
+          <p:nvPr/>
+        </p:nvSpPr>
+        <p:spPr>
+          <a:xfrm>
+            <a:off x="6400800" y="5020056"/>
+            <a:ext cx="914400" cy="208407"/>
+          </a:xfrm>
+          <a:prstGeom prst="rect">
+            <a:avLst/>
+          </a:prstGeom>
+          <a:noFill/>
+          <a:effectLst/>
+        </p:spPr>
+        <p:txBody>
+          <a:bodyPr wrap="none" lIns="18288" rIns="18288" tIns="18288" bIns="18288" anchor="t">
+            <a:spAutoFit/>
+          </a:bodyPr>
+          <a:lstStyle/>
+          <a:p>
+            <a:pPr algn="ctr">
+              <a:spcAft>
+                <a:spcPts val="0"/>
+              </a:spcAft>
+            </a:pPr>
+            <a:r>
+              <a:rPr sz="1050" b="0" i="0">
+                <a:solidFill>
+                  <a:srgbClr val="B4C7D2"/>
+                </a:solidFill>
+                <a:latin typeface="Arial"/>
+              </a:rPr>
+              <a:t>0.0</a:t>
+            </a:r>
+          </a:p>
+        </p:txBody>
+      </p:sp>
+      <p:cxnSp>
+        <p:nvCxnSpPr>
+          <p:cNvPr id="8" name="C1-E30 line 6" descr="sci-ppt:o006"/>
+          <p:cNvCxnSpPr/>
+          <p:nvPr/>
+        </p:nvCxnSpPr>
+        <p:spPr>
+          <a:xfrm>
+            <a:off x="8503920" y="4937760"/>
+            <a:ext cx="0" cy="64008"/>
+          </a:xfrm>
+          <a:prstGeom prst="line">
+            <a:avLst/>
+          </a:prstGeom>
+          <a:ln w="12700">
+            <a:solidFill>
+              <a:srgbClr val="B4C7D2"/>
+            </a:solidFill>
+          </a:ln>
+          <a:effectLst/>
+        </p:spPr>
+      </p:cxnSp>
+      <p:cxnSp>
+        <p:nvCxnSpPr>
+          <p:cNvPr id="9" name="C1-E30 line 7" descr="sci-ppt:o007"/>
+          <p:cNvCxnSpPr/>
+          <p:nvPr/>
+        </p:nvCxnSpPr>
+        <p:spPr>
+          <a:xfrm>
+            <a:off x="8503920" y="1371600"/>
+            <a:ext cx="0" cy="3566160"/>
+          </a:xfrm>
+          <a:prstGeom prst="line">
+            <a:avLst/>
+          </a:prstGeom>
+          <a:ln w="7620">
+            <a:solidFill>
+              <a:srgbClr val="2E4756"/>
+            </a:solidFill>
+          </a:ln>
+          <a:effectLst/>
+        </p:spPr>
+      </p:cxnSp>
+      <p:sp>
+        <p:nvSpPr>
+          <p:cNvPr id="10" name="C1-E30 text 8" descr="sci-ppt:o008"/>
+          <p:cNvSpPr txBox="1"/>
+          <p:nvPr/>
+        </p:nvSpPr>
+        <p:spPr>
+          <a:xfrm>
+            <a:off x="8046720" y="5020056"/>
+            <a:ext cx="914400" cy="208407"/>
+          </a:xfrm>
+          <a:prstGeom prst="rect">
+            <a:avLst/>
+          </a:prstGeom>
+          <a:noFill/>
+          <a:effectLst/>
+        </p:spPr>
+        <p:txBody>
+          <a:bodyPr wrap="none" lIns="18288" rIns="18288" tIns="18288" bIns="18288" anchor="t">
+            <a:spAutoFit/>
+          </a:bodyPr>
+          <a:lstStyle/>
+          <a:p>
+            <a:pPr algn="ctr">
+              <a:spcAft>
+                <a:spcPts val="0"/>
+              </a:spcAft>
+            </a:pPr>
+            <a:r>
+              <a:rPr sz="1050" b="0" i="0">
+                <a:solidFill>
+                  <a:srgbClr val="B4C7D2"/>
+                </a:solidFill>
+                <a:latin typeface="Arial"/>
+              </a:rPr>
+              <a:t>0.5</a:t>
+            </a:r>
+          </a:p>
+        </p:txBody>
+      </p:sp>
+      <p:cxnSp>
+        <p:nvCxnSpPr>
+          <p:cNvPr id="11" name="C1-E30 line 9" descr="sci-ppt:o009"/>
+          <p:cNvCxnSpPr/>
+          <p:nvPr/>
+        </p:nvCxnSpPr>
+        <p:spPr>
+          <a:xfrm>
+            <a:off x="10149840" y="4937760"/>
+            <a:ext cx="0" cy="64008"/>
+          </a:xfrm>
+          <a:prstGeom prst="line">
+            <a:avLst/>
+          </a:prstGeom>
+          <a:ln w="12700">
+            <a:solidFill>
+              <a:srgbClr val="B4C7D2"/>
+            </a:solidFill>
+          </a:ln>
+          <a:effectLst/>
+        </p:spPr>
+      </p:cxnSp>
+      <p:cxnSp>
+        <p:nvCxnSpPr>
+          <p:cNvPr id="12" name="C1-E30 line 10" descr="sci-ppt:o010"/>
+          <p:cNvCxnSpPr/>
+          <p:nvPr/>
+        </p:nvCxnSpPr>
+        <p:spPr>
+          <a:xfrm>
+            <a:off x="10149840" y="1371600"/>
+            <a:ext cx="0" cy="3566160"/>
+          </a:xfrm>
+          <a:prstGeom prst="line">
+            <a:avLst/>
+          </a:prstGeom>
+          <a:ln w="7620">
+            <a:solidFill>
+              <a:srgbClr val="2E4756"/>
+            </a:solidFill>
+          </a:ln>
+          <a:effectLst/>
+        </p:spPr>
+      </p:cxnSp>
+      <p:sp>
+        <p:nvSpPr>
+          <p:cNvPr id="13" name="C1-E30 text 11" descr="sci-ppt:o011"/>
+          <p:cNvSpPr txBox="1"/>
+          <p:nvPr/>
+        </p:nvSpPr>
+        <p:spPr>
+          <a:xfrm>
+            <a:off x="9692640" y="5020056"/>
+            <a:ext cx="914400" cy="208407"/>
+          </a:xfrm>
+          <a:prstGeom prst="rect">
+            <a:avLst/>
+          </a:prstGeom>
+          <a:noFill/>
+          <a:effectLst/>
+        </p:spPr>
+        <p:txBody>
+          <a:bodyPr wrap="none" lIns="18288" rIns="18288" tIns="18288" bIns="18288" anchor="t">
+            <a:spAutoFit/>
+          </a:bodyPr>
+          <a:lstStyle/>
+          <a:p>
+            <a:pPr algn="ctr">
+              <a:spcAft>
+                <a:spcPts val="0"/>
+              </a:spcAft>
+            </a:pPr>
+            <a:r>
+              <a:rPr sz="1050" b="0" i="0">
+                <a:solidFill>
+                  <a:srgbClr val="B4C7D2"/>
+                </a:solidFill>
+                <a:latin typeface="Arial"/>
+              </a:rPr>
+              <a:t>1.0</a:t>
+            </a:r>
+          </a:p>
+        </p:txBody>
+      </p:sp>
+      <p:cxnSp>
+        <p:nvCxnSpPr>
+          <p:cNvPr id="14" name="C1-E30 line 12" descr="sci-ppt:o012"/>
+          <p:cNvCxnSpPr/>
+          <p:nvPr/>
+        </p:nvCxnSpPr>
+        <p:spPr>
+          <a:xfrm>
+            <a:off x="11795760" y="4937760"/>
+            <a:ext cx="0" cy="64008"/>
+          </a:xfrm>
+          <a:prstGeom prst="line">
+            <a:avLst/>
+          </a:prstGeom>
+          <a:ln w="12700">
+            <a:solidFill>
+              <a:srgbClr val="B4C7D2"/>
+            </a:solidFill>
+          </a:ln>
+          <a:effectLst/>
+        </p:spPr>
+      </p:cxnSp>
+      <p:cxnSp>
+        <p:nvCxnSpPr>
+          <p:cNvPr id="15" name="C1-E30 line 13" descr="sci-ppt:o013"/>
+          <p:cNvCxnSpPr/>
+          <p:nvPr/>
+        </p:nvCxnSpPr>
+        <p:spPr>
+          <a:xfrm>
+            <a:off x="11795760" y="1371600"/>
+            <a:ext cx="0" cy="3566160"/>
+          </a:xfrm>
+          <a:prstGeom prst="line">
+            <a:avLst/>
+          </a:prstGeom>
+          <a:ln w="7620">
+            <a:solidFill>
+              <a:srgbClr val="2E4756"/>
+            </a:solidFill>
+          </a:ln>
+          <a:effectLst/>
+        </p:spPr>
+      </p:cxnSp>
+      <p:sp>
+        <p:nvSpPr>
+          <p:cNvPr id="16" name="C1-E30 text 14" descr="sci-ppt:o014"/>
+          <p:cNvSpPr txBox="1"/>
+          <p:nvPr/>
+        </p:nvSpPr>
+        <p:spPr>
+          <a:xfrm>
+            <a:off x="11338560" y="5020056"/>
+            <a:ext cx="914400" cy="208407"/>
+          </a:xfrm>
+          <a:prstGeom prst="rect">
+            <a:avLst/>
+          </a:prstGeom>
+          <a:noFill/>
+          <a:effectLst/>
+        </p:spPr>
+        <p:txBody>
+          <a:bodyPr wrap="none" lIns="18288" rIns="18288" tIns="18288" bIns="18288" anchor="t">
+            <a:spAutoFit/>
+          </a:bodyPr>
+          <a:lstStyle/>
+          <a:p>
+            <a:pPr algn="ctr">
+              <a:spcAft>
+                <a:spcPts val="0"/>
+              </a:spcAft>
+            </a:pPr>
+            <a:r>
+              <a:rPr sz="1050" b="0" i="0">
+                <a:solidFill>
+                  <a:srgbClr val="B4C7D2"/>
+                </a:solidFill>
+                <a:latin typeface="Arial"/>
+              </a:rPr>
+              <a:t>1.5</a:t>
+            </a:r>
+          </a:p>
+        </p:txBody>
+      </p:sp>
+      <p:cxnSp>
+        <p:nvCxnSpPr>
+          <p:cNvPr id="17" name="C1-E30 line 15" descr="sci-ppt:o015"/>
+          <p:cNvCxnSpPr/>
+          <p:nvPr/>
+        </p:nvCxnSpPr>
+        <p:spPr>
+          <a:xfrm>
+            <a:off x="6793992" y="4937760"/>
+            <a:ext cx="64008" cy="0"/>
+          </a:xfrm>
+          <a:prstGeom prst="line">
+            <a:avLst/>
+          </a:prstGeom>
+          <a:ln w="12700">
+            <a:solidFill>
+              <a:srgbClr val="B4C7D2"/>
+            </a:solidFill>
+          </a:ln>
+          <a:effectLst/>
+        </p:spPr>
+      </p:cxnSp>
+      <p:cxnSp>
+        <p:nvCxnSpPr>
+          <p:cNvPr id="18" name="C1-E30 line 16" descr="sci-ppt:o016"/>
+          <p:cNvCxnSpPr/>
+          <p:nvPr/>
+        </p:nvCxnSpPr>
+        <p:spPr>
+          <a:xfrm>
+            <a:off x="6793992" y="4046220"/>
+            <a:ext cx="64008" cy="0"/>
+          </a:xfrm>
+          <a:prstGeom prst="line">
+            <a:avLst/>
+          </a:prstGeom>
+          <a:ln w="12700">
+            <a:solidFill>
+              <a:srgbClr val="B4C7D2"/>
+            </a:solidFill>
+          </a:ln>
+          <a:effectLst/>
+        </p:spPr>
+      </p:cxnSp>
+      <p:cxnSp>
+        <p:nvCxnSpPr>
+          <p:cNvPr id="19" name="C1-E30 line 17" descr="sci-ppt:o017"/>
+          <p:cNvCxnSpPr/>
+          <p:nvPr/>
+        </p:nvCxnSpPr>
+        <p:spPr>
+          <a:xfrm>
+            <a:off x="6858000" y="4046220"/>
+            <a:ext cx="4937760" cy="0"/>
+          </a:xfrm>
+          <a:prstGeom prst="line">
+            <a:avLst/>
+          </a:prstGeom>
+          <a:ln w="7620">
+            <a:solidFill>
+              <a:srgbClr val="2E4756"/>
+            </a:solidFill>
+          </a:ln>
+          <a:effectLst/>
+        </p:spPr>
+      </p:cxnSp>
+      <p:sp>
+        <p:nvSpPr>
+          <p:cNvPr id="20" name="C1-E30 text 18" descr="sci-ppt:o018"/>
+          <p:cNvSpPr txBox="1"/>
+          <p:nvPr/>
+        </p:nvSpPr>
+        <p:spPr>
+          <a:xfrm>
+            <a:off x="5989320" y="3963924"/>
+            <a:ext cx="777240" cy="208407"/>
+          </a:xfrm>
+          <a:prstGeom prst="rect">
+            <a:avLst/>
+          </a:prstGeom>
+          <a:noFill/>
+          <a:effectLst/>
+        </p:spPr>
+        <p:txBody>
+          <a:bodyPr wrap="none" lIns="18288" rIns="18288" tIns="18288" bIns="18288" anchor="t">
+            <a:spAutoFit/>
+          </a:bodyPr>
+          <a:lstStyle/>
+          <a:p>
+            <a:pPr algn="r">
+              <a:spcAft>
+                <a:spcPts val="0"/>
+              </a:spcAft>
+            </a:pPr>
+            <a:r>
+              <a:rPr sz="1050" b="0" i="0">
+                <a:solidFill>
+                  <a:srgbClr val="B4C7D2"/>
+                </a:solidFill>
+                <a:latin typeface="Arial"/>
+              </a:rPr>
+              <a:t>-500</a:t>
+            </a:r>
+          </a:p>
+        </p:txBody>
+      </p:sp>
+      <p:cxnSp>
+        <p:nvCxnSpPr>
+          <p:cNvPr id="21" name="C1-E30 line 19" descr="sci-ppt:o019"/>
+          <p:cNvCxnSpPr/>
+          <p:nvPr/>
+        </p:nvCxnSpPr>
+        <p:spPr>
+          <a:xfrm>
+            <a:off x="6793992" y="3154680"/>
+            <a:ext cx="64008" cy="0"/>
+          </a:xfrm>
+          <a:prstGeom prst="line">
+            <a:avLst/>
+          </a:prstGeom>
+          <a:ln w="12700">
+            <a:solidFill>
+              <a:srgbClr val="B4C7D2"/>
+            </a:solidFill>
+          </a:ln>
+          <a:effectLst/>
+        </p:spPr>
+      </p:cxnSp>
+      <p:cxnSp>
+        <p:nvCxnSpPr>
+          <p:cNvPr id="22" name="C1-E30 line 20" descr="sci-ppt:o020"/>
+          <p:cNvCxnSpPr/>
+          <p:nvPr/>
+        </p:nvCxnSpPr>
+        <p:spPr>
+          <a:xfrm>
+            <a:off x="6858000" y="3154680"/>
+            <a:ext cx="4937760" cy="0"/>
+          </a:xfrm>
+          <a:prstGeom prst="line">
+            <a:avLst/>
+          </a:prstGeom>
+          <a:ln w="7620">
+            <a:solidFill>
+              <a:srgbClr val="2E4756"/>
+            </a:solidFill>
+          </a:ln>
+          <a:effectLst/>
+        </p:spPr>
+      </p:cxnSp>
+      <p:sp>
+        <p:nvSpPr>
+          <p:cNvPr id="23" name="C1-E30 text 21" descr="sci-ppt:o021"/>
+          <p:cNvSpPr txBox="1"/>
+          <p:nvPr/>
+        </p:nvSpPr>
+        <p:spPr>
+          <a:xfrm>
+            <a:off x="5989320" y="3072384"/>
+            <a:ext cx="777240" cy="208407"/>
+          </a:xfrm>
+          <a:prstGeom prst="rect">
+            <a:avLst/>
+          </a:prstGeom>
+          <a:noFill/>
+          <a:effectLst/>
+        </p:spPr>
+        <p:txBody>
+          <a:bodyPr wrap="none" lIns="18288" rIns="18288" tIns="18288" bIns="18288" anchor="t">
+            <a:spAutoFit/>
+          </a:bodyPr>
+          <a:lstStyle/>
+          <a:p>
+            <a:pPr algn="r">
+              <a:spcAft>
+                <a:spcPts val="0"/>
+              </a:spcAft>
+            </a:pPr>
+            <a:r>
+              <a:rPr sz="1050" b="0" i="0">
+                <a:solidFill>
+                  <a:srgbClr val="B4C7D2"/>
+                </a:solidFill>
+                <a:latin typeface="Arial"/>
+              </a:rPr>
+              <a:t>0</a:t>
+            </a:r>
+          </a:p>
+        </p:txBody>
+      </p:sp>
+      <p:cxnSp>
+        <p:nvCxnSpPr>
+          <p:cNvPr id="24" name="C1-E30 line 22" descr="sci-ppt:o022"/>
+          <p:cNvCxnSpPr/>
+          <p:nvPr/>
+        </p:nvCxnSpPr>
+        <p:spPr>
+          <a:xfrm>
+            <a:off x="6793992" y="2263140"/>
+            <a:ext cx="64008" cy="0"/>
+          </a:xfrm>
+          <a:prstGeom prst="line">
+            <a:avLst/>
+          </a:prstGeom>
+          <a:ln w="12700">
+            <a:solidFill>
+              <a:srgbClr val="B4C7D2"/>
+            </a:solidFill>
+          </a:ln>
+          <a:effectLst/>
+        </p:spPr>
+      </p:cxnSp>
+      <p:cxnSp>
+        <p:nvCxnSpPr>
+          <p:cNvPr id="25" name="C1-E30 line 23" descr="sci-ppt:o023"/>
+          <p:cNvCxnSpPr/>
+          <p:nvPr/>
+        </p:nvCxnSpPr>
+        <p:spPr>
+          <a:xfrm>
+            <a:off x="6858000" y="2263140"/>
+            <a:ext cx="4937760" cy="0"/>
+          </a:xfrm>
+          <a:prstGeom prst="line">
+            <a:avLst/>
+          </a:prstGeom>
+          <a:ln w="7620">
+            <a:solidFill>
+              <a:srgbClr val="2E4756"/>
+            </a:solidFill>
+          </a:ln>
+          <a:effectLst/>
+        </p:spPr>
+      </p:cxnSp>
+      <p:sp>
+        <p:nvSpPr>
+          <p:cNvPr id="26" name="C1-E30 text 24" descr="sci-ppt:o024"/>
+          <p:cNvSpPr txBox="1"/>
+          <p:nvPr/>
+        </p:nvSpPr>
+        <p:spPr>
+          <a:xfrm>
+            <a:off x="5989320" y="2180844"/>
+            <a:ext cx="777240" cy="208407"/>
+          </a:xfrm>
+          <a:prstGeom prst="rect">
+            <a:avLst/>
+          </a:prstGeom>
+          <a:noFill/>
+          <a:effectLst/>
+        </p:spPr>
+        <p:txBody>
+          <a:bodyPr wrap="none" lIns="18288" rIns="18288" tIns="18288" bIns="18288" anchor="t">
+            <a:spAutoFit/>
+          </a:bodyPr>
+          <a:lstStyle/>
+          <a:p>
+            <a:pPr algn="r">
+              <a:spcAft>
+                <a:spcPts val="0"/>
+              </a:spcAft>
+            </a:pPr>
+            <a:r>
+              <a:rPr sz="1050" b="0" i="0">
+                <a:solidFill>
+                  <a:srgbClr val="B4C7D2"/>
+                </a:solidFill>
+                <a:latin typeface="Arial"/>
+              </a:rPr>
+              <a:t>500</a:t>
+            </a:r>
+          </a:p>
+        </p:txBody>
+      </p:sp>
+      <p:cxnSp>
+        <p:nvCxnSpPr>
+          <p:cNvPr id="27" name="C1-E30 line 25" descr="sci-ppt:o025"/>
+          <p:cNvCxnSpPr/>
+          <p:nvPr/>
+        </p:nvCxnSpPr>
+        <p:spPr>
+          <a:xfrm>
+            <a:off x="6793992" y="1371600"/>
+            <a:ext cx="64008" cy="0"/>
+          </a:xfrm>
+          <a:prstGeom prst="line">
+            <a:avLst/>
+          </a:prstGeom>
+          <a:ln w="12700">
+            <a:solidFill>
+              <a:srgbClr val="B4C7D2"/>
+            </a:solidFill>
+          </a:ln>
+          <a:effectLst/>
+        </p:spPr>
+      </p:cxnSp>
+      <p:cxnSp>
+        <p:nvCxnSpPr>
+          <p:cNvPr id="28" name="C1-E30 line 26" descr="sci-ppt:o026"/>
+          <p:cNvCxnSpPr/>
+          <p:nvPr/>
+        </p:nvCxnSpPr>
+        <p:spPr>
+          <a:xfrm>
+            <a:off x="6858000" y="1371600"/>
+            <a:ext cx="4937760" cy="0"/>
+          </a:xfrm>
+          <a:prstGeom prst="line">
+            <a:avLst/>
+          </a:prstGeom>
+          <a:ln w="7620">
+            <a:solidFill>
+              <a:srgbClr val="2E4756"/>
+            </a:solidFill>
+          </a:ln>
+          <a:effectLst/>
+        </p:spPr>
+      </p:cxnSp>
+      <p:sp>
+        <p:nvSpPr>
+          <p:cNvPr id="29" name="C1-E30 text 27" descr="sci-ppt:o027"/>
+          <p:cNvSpPr txBox="1"/>
+          <p:nvPr/>
+        </p:nvSpPr>
+        <p:spPr>
+          <a:xfrm>
+            <a:off x="5989320" y="1289304"/>
+            <a:ext cx="777240" cy="208407"/>
+          </a:xfrm>
+          <a:prstGeom prst="rect">
+            <a:avLst/>
+          </a:prstGeom>
+          <a:noFill/>
+          <a:effectLst/>
+        </p:spPr>
+        <p:txBody>
+          <a:bodyPr wrap="none" lIns="18288" rIns="18288" tIns="18288" bIns="18288" anchor="t">
+            <a:spAutoFit/>
+          </a:bodyPr>
+          <a:lstStyle/>
+          <a:p>
+            <a:pPr algn="r">
+              <a:spcAft>
+                <a:spcPts val="0"/>
+              </a:spcAft>
+            </a:pPr>
+            <a:r>
+              <a:rPr sz="1050" b="0" i="0">
+                <a:solidFill>
+                  <a:srgbClr val="B4C7D2"/>
+                </a:solidFill>
+                <a:latin typeface="Arial"/>
+              </a:rPr>
+              <a:t>1000</a:t>
+            </a:r>
+          </a:p>
+        </p:txBody>
+      </p:sp>
+      <p:sp>
+        <p:nvSpPr>
+          <p:cNvPr id="30" name="C1-E30 text 28" descr="sci-ppt:o028"/>
+          <p:cNvSpPr txBox="1"/>
+          <p:nvPr/>
+        </p:nvSpPr>
+        <p:spPr>
+          <a:xfrm>
+            <a:off x="6858000" y="5221224"/>
+            <a:ext cx="4937760" cy="231648"/>
+          </a:xfrm>
+          <a:prstGeom prst="rect">
+            <a:avLst/>
+          </a:prstGeom>
+          <a:noFill/>
+          <a:effectLst/>
+        </p:spPr>
+        <p:txBody>
+          <a:bodyPr wrap="none" lIns="18288" rIns="18288" tIns="18288" bIns="18288" anchor="t">
+            <a:spAutoFit/>
+          </a:bodyPr>
+          <a:lstStyle/>
+          <a:p>
+            <a:pPr algn="ctr">
+              <a:spcAft>
+                <a:spcPts val="0"/>
+              </a:spcAft>
+            </a:pPr>
+            <a:r>
+              <a:rPr sz="1200" b="0" i="0">
+                <a:solidFill>
+                  <a:srgbClr val="E7F0F3"/>
+                </a:solidFill>
+                <a:latin typeface="Arial"/>
+              </a:rPr>
+              <a:t>t  (µs)</a:t>
+            </a:r>
+          </a:p>
+        </p:txBody>
+      </p:sp>
+      <p:sp>
+        <p:nvSpPr>
+          <p:cNvPr id="31" name="C1-E30 text 29" descr="sci-ppt:o029"/>
+          <p:cNvSpPr txBox="1"/>
+          <p:nvPr/>
+        </p:nvSpPr>
+        <p:spPr>
+          <a:xfrm>
+            <a:off x="6309360" y="1024128"/>
+            <a:ext cx="4937760" cy="231648"/>
+          </a:xfrm>
+          <a:prstGeom prst="rect">
+            <a:avLst/>
+          </a:prstGeom>
+          <a:noFill/>
+          <a:effectLst/>
+        </p:spPr>
+        <p:txBody>
+          <a:bodyPr wrap="none" lIns="18288" rIns="18288" tIns="18288" bIns="18288" anchor="t">
+            <a:spAutoFit/>
+          </a:bodyPr>
+          <a:lstStyle/>
+          <a:p>
+            <a:pPr algn="l">
+              <a:spcAft>
+                <a:spcPts val="0"/>
+              </a:spcAft>
+            </a:pPr>
+            <a:r>
+              <a:rPr sz="1200" b="0" i="0">
+                <a:solidFill>
+                  <a:srgbClr val="E7F0F3"/>
+                </a:solidFill>
+                <a:latin typeface="Arial"/>
+              </a:rPr>
+              <a:t>closure terms (m²/s²)</a:t>
+            </a:r>
+          </a:p>
+        </p:txBody>
+      </p:sp>
+      <p:cxnSp>
+        <p:nvCxnSpPr>
+          <p:cNvPr id="32" name="C1-E30 line 30" descr="sci-ppt:o030"/>
+          <p:cNvCxnSpPr/>
+          <p:nvPr/>
+        </p:nvCxnSpPr>
+        <p:spPr>
+          <a:xfrm>
+            <a:off x="6858000" y="3154680"/>
+            <a:ext cx="4937760" cy="0"/>
+          </a:xfrm>
+          <a:prstGeom prst="line">
+            <a:avLst/>
+          </a:prstGeom>
+          <a:ln w="15240">
+            <a:solidFill>
+              <a:srgbClr val="2E4756"/>
+            </a:solidFill>
+          </a:ln>
+          <a:effectLst/>
+        </p:spPr>
+      </p:cxnSp>
+      <p:sp>
+        <p:nvSpPr>
+          <p:cNvPr id="33" name="C1-E30 polygon 31" descr="sci-ppt:o031"/>
           <p:cNvSpPr/>
           <p:nvPr/>
         </p:nvSpPr>
         <p:spPr>
           <a:xfrm>
-            <a:off x="2072640" y="1402080"/>
-            <a:ext cx="2438400" cy="2438400"/>
-          </a:xfrm>
-          <a:prstGeom prst="ellipse">
+            <a:off x="6865408" y="2992514"/>
+            <a:ext cx="4922943" cy="1712408"/>
+          </a:xfrm>
+          <a:custGeom>
+            <a:avLst/>
+            <a:gdLst/>
+            <a:ahLst/>
+            <a:cxnLst/>
+            <a:rect l="l" t="t" r="r" b="b"/>
+            <a:pathLst>
+              <a:path w="4922943" h="1712408">
+                <a:moveTo>
+                  <a:pt x="0" y="1712408"/>
+                </a:moveTo>
+                <a:lnTo>
+                  <a:pt x="34573" y="1688080"/>
+                </a:lnTo>
+                <a:lnTo>
+                  <a:pt x="69146" y="1631989"/>
+                </a:lnTo>
+                <a:lnTo>
+                  <a:pt x="103719" y="1549311"/>
+                </a:lnTo>
+                <a:lnTo>
+                  <a:pt x="138292" y="1446964"/>
+                </a:lnTo>
+                <a:lnTo>
+                  <a:pt x="172865" y="1332373"/>
+                </a:lnTo>
+                <a:lnTo>
+                  <a:pt x="207438" y="1212425"/>
+                </a:lnTo>
+                <a:lnTo>
+                  <a:pt x="242011" y="1092797"/>
+                </a:lnTo>
+                <a:lnTo>
+                  <a:pt x="276584" y="977692"/>
+                </a:lnTo>
+                <a:lnTo>
+                  <a:pt x="311157" y="869882"/>
+                </a:lnTo>
+                <a:lnTo>
+                  <a:pt x="345730" y="770923"/>
+                </a:lnTo>
+                <a:lnTo>
+                  <a:pt x="380303" y="681450"/>
+                </a:lnTo>
+                <a:lnTo>
+                  <a:pt x="414876" y="601445"/>
+                </a:lnTo>
+                <a:lnTo>
+                  <a:pt x="449449" y="530478"/>
+                </a:lnTo>
+                <a:lnTo>
+                  <a:pt x="484021" y="467878"/>
+                </a:lnTo>
+                <a:lnTo>
+                  <a:pt x="518594" y="412867"/>
+                </a:lnTo>
+                <a:lnTo>
+                  <a:pt x="553167" y="364636"/>
+                </a:lnTo>
+                <a:lnTo>
+                  <a:pt x="587740" y="322400"/>
+                </a:lnTo>
+                <a:lnTo>
+                  <a:pt x="622313" y="285428"/>
+                </a:lnTo>
+                <a:lnTo>
+                  <a:pt x="656886" y="253054"/>
+                </a:lnTo>
+                <a:lnTo>
+                  <a:pt x="691459" y="224686"/>
+                </a:lnTo>
+                <a:lnTo>
+                  <a:pt x="726032" y="199800"/>
+                </a:lnTo>
+                <a:lnTo>
+                  <a:pt x="760605" y="177939"/>
+                </a:lnTo>
+                <a:lnTo>
+                  <a:pt x="795178" y="158705"/>
+                </a:lnTo>
+                <a:lnTo>
+                  <a:pt x="829751" y="141755"/>
+                </a:lnTo>
+                <a:lnTo>
+                  <a:pt x="864324" y="126791"/>
+                </a:lnTo>
+                <a:lnTo>
+                  <a:pt x="898897" y="113557"/>
+                </a:lnTo>
+                <a:lnTo>
+                  <a:pt x="933470" y="101833"/>
+                </a:lnTo>
+                <a:lnTo>
+                  <a:pt x="968043" y="91427"/>
+                </a:lnTo>
+                <a:lnTo>
+                  <a:pt x="1002616" y="82175"/>
+                </a:lnTo>
+                <a:lnTo>
+                  <a:pt x="1037189" y="73935"/>
+                </a:lnTo>
+                <a:lnTo>
+                  <a:pt x="1071762" y="66584"/>
+                </a:lnTo>
+                <a:lnTo>
+                  <a:pt x="1106335" y="60016"/>
+                </a:lnTo>
+                <a:lnTo>
+                  <a:pt x="1140908" y="54138"/>
+                </a:lnTo>
+                <a:lnTo>
+                  <a:pt x="1175481" y="48870"/>
+                </a:lnTo>
+                <a:lnTo>
+                  <a:pt x="1210054" y="44142"/>
+                </a:lnTo>
+                <a:lnTo>
+                  <a:pt x="1244627" y="39893"/>
+                </a:lnTo>
+                <a:lnTo>
+                  <a:pt x="1279200" y="36070"/>
+                </a:lnTo>
+                <a:lnTo>
+                  <a:pt x="1313773" y="32625"/>
+                </a:lnTo>
+                <a:lnTo>
+                  <a:pt x="1348346" y="29518"/>
+                </a:lnTo>
+                <a:lnTo>
+                  <a:pt x="1382919" y="26713"/>
+                </a:lnTo>
+                <a:lnTo>
+                  <a:pt x="1417491" y="24177"/>
+                </a:lnTo>
+                <a:lnTo>
+                  <a:pt x="1452064" y="21884"/>
+                </a:lnTo>
+                <a:lnTo>
+                  <a:pt x="1486637" y="19807"/>
+                </a:lnTo>
+                <a:lnTo>
+                  <a:pt x="1521210" y="17926"/>
+                </a:lnTo>
+                <a:lnTo>
+                  <a:pt x="1555783" y="16220"/>
+                </a:lnTo>
+                <a:lnTo>
+                  <a:pt x="1590356" y="14673"/>
+                </a:lnTo>
+                <a:lnTo>
+                  <a:pt x="1624929" y="13268"/>
+                </a:lnTo>
+                <a:lnTo>
+                  <a:pt x="1659502" y="11992"/>
+                </a:lnTo>
+                <a:lnTo>
+                  <a:pt x="1694075" y="10833"/>
+                </a:lnTo>
+                <a:lnTo>
+                  <a:pt x="1728648" y="9780"/>
+                </a:lnTo>
+                <a:lnTo>
+                  <a:pt x="1763221" y="8822"/>
+                </a:lnTo>
+                <a:lnTo>
+                  <a:pt x="1797794" y="7951"/>
+                </a:lnTo>
+                <a:lnTo>
+                  <a:pt x="1832367" y="7160"/>
+                </a:lnTo>
+                <a:lnTo>
+                  <a:pt x="1866940" y="6440"/>
+                </a:lnTo>
+                <a:lnTo>
+                  <a:pt x="1901513" y="5786"/>
+                </a:lnTo>
+                <a:lnTo>
+                  <a:pt x="1936086" y="5191"/>
+                </a:lnTo>
+                <a:lnTo>
+                  <a:pt x="1970659" y="4650"/>
+                </a:lnTo>
+                <a:lnTo>
+                  <a:pt x="2005232" y="4159"/>
+                </a:lnTo>
+                <a:lnTo>
+                  <a:pt x="2039805" y="3713"/>
+                </a:lnTo>
+                <a:lnTo>
+                  <a:pt x="2074378" y="3308"/>
+                </a:lnTo>
+                <a:lnTo>
+                  <a:pt x="2108951" y="2941"/>
+                </a:lnTo>
+                <a:lnTo>
+                  <a:pt x="2143524" y="2608"/>
+                </a:lnTo>
+                <a:lnTo>
+                  <a:pt x="2178097" y="2307"/>
+                </a:lnTo>
+                <a:lnTo>
+                  <a:pt x="2212670" y="2034"/>
+                </a:lnTo>
+                <a:lnTo>
+                  <a:pt x="2247243" y="1788"/>
+                </a:lnTo>
+                <a:lnTo>
+                  <a:pt x="2281816" y="1567"/>
+                </a:lnTo>
+                <a:lnTo>
+                  <a:pt x="2316389" y="1367"/>
+                </a:lnTo>
+                <a:lnTo>
+                  <a:pt x="2350961" y="1187"/>
+                </a:lnTo>
+                <a:lnTo>
+                  <a:pt x="2385534" y="1026"/>
+                </a:lnTo>
+                <a:lnTo>
+                  <a:pt x="2420107" y="882"/>
+                </a:lnTo>
+                <a:lnTo>
+                  <a:pt x="2454680" y="754"/>
+                </a:lnTo>
+                <a:lnTo>
+                  <a:pt x="2489253" y="640"/>
+                </a:lnTo>
+                <a:lnTo>
+                  <a:pt x="2523826" y="539"/>
+                </a:lnTo>
+                <a:lnTo>
+                  <a:pt x="2558399" y="449"/>
+                </a:lnTo>
+                <a:lnTo>
+                  <a:pt x="2592972" y="371"/>
+                </a:lnTo>
+                <a:lnTo>
+                  <a:pt x="2627545" y="302"/>
+                </a:lnTo>
+                <a:lnTo>
+                  <a:pt x="2662118" y="243"/>
+                </a:lnTo>
+                <a:lnTo>
+                  <a:pt x="2696691" y="192"/>
+                </a:lnTo>
+                <a:lnTo>
+                  <a:pt x="2731264" y="148"/>
+                </a:lnTo>
+                <a:lnTo>
+                  <a:pt x="2765837" y="112"/>
+                </a:lnTo>
+                <a:lnTo>
+                  <a:pt x="2800410" y="81"/>
+                </a:lnTo>
+                <a:lnTo>
+                  <a:pt x="2834983" y="57"/>
+                </a:lnTo>
+                <a:lnTo>
+                  <a:pt x="2869556" y="37"/>
+                </a:lnTo>
+                <a:lnTo>
+                  <a:pt x="2904129" y="22"/>
+                </a:lnTo>
+                <a:lnTo>
+                  <a:pt x="2938702" y="11"/>
+                </a:lnTo>
+                <a:lnTo>
+                  <a:pt x="2973275" y="4"/>
+                </a:lnTo>
+                <a:lnTo>
+                  <a:pt x="3007848" y="1"/>
+                </a:lnTo>
+                <a:lnTo>
+                  <a:pt x="3042421" y="0"/>
+                </a:lnTo>
+                <a:lnTo>
+                  <a:pt x="3076994" y="2"/>
+                </a:lnTo>
+                <a:lnTo>
+                  <a:pt x="3111567" y="7"/>
+                </a:lnTo>
+                <a:lnTo>
+                  <a:pt x="3146140" y="13"/>
+                </a:lnTo>
+                <a:lnTo>
+                  <a:pt x="3180713" y="22"/>
+                </a:lnTo>
+                <a:lnTo>
+                  <a:pt x="3215286" y="32"/>
+                </a:lnTo>
+                <a:lnTo>
+                  <a:pt x="3249859" y="43"/>
+                </a:lnTo>
+                <a:lnTo>
+                  <a:pt x="3284432" y="56"/>
+                </a:lnTo>
+                <a:lnTo>
+                  <a:pt x="3319004" y="69"/>
+                </a:lnTo>
+                <a:lnTo>
+                  <a:pt x="3353577" y="83"/>
+                </a:lnTo>
+                <a:lnTo>
+                  <a:pt x="3388150" y="98"/>
+                </a:lnTo>
+                <a:lnTo>
+                  <a:pt x="3422723" y="113"/>
+                </a:lnTo>
+                <a:lnTo>
+                  <a:pt x="3457296" y="128"/>
+                </a:lnTo>
+                <a:lnTo>
+                  <a:pt x="3491869" y="144"/>
+                </a:lnTo>
+                <a:lnTo>
+                  <a:pt x="3526442" y="159"/>
+                </a:lnTo>
+                <a:lnTo>
+                  <a:pt x="3561015" y="175"/>
+                </a:lnTo>
+                <a:lnTo>
+                  <a:pt x="3595588" y="190"/>
+                </a:lnTo>
+                <a:lnTo>
+                  <a:pt x="3630161" y="205"/>
+                </a:lnTo>
+                <a:lnTo>
+                  <a:pt x="3664734" y="220"/>
+                </a:lnTo>
+                <a:lnTo>
+                  <a:pt x="3699307" y="234"/>
+                </a:lnTo>
+                <a:lnTo>
+                  <a:pt x="3733880" y="247"/>
+                </a:lnTo>
+                <a:lnTo>
+                  <a:pt x="3768453" y="260"/>
+                </a:lnTo>
+                <a:lnTo>
+                  <a:pt x="3803026" y="273"/>
+                </a:lnTo>
+                <a:lnTo>
+                  <a:pt x="3837599" y="284"/>
+                </a:lnTo>
+                <a:lnTo>
+                  <a:pt x="3872172" y="295"/>
+                </a:lnTo>
+                <a:lnTo>
+                  <a:pt x="3906745" y="305"/>
+                </a:lnTo>
+                <a:lnTo>
+                  <a:pt x="3941318" y="314"/>
+                </a:lnTo>
+                <a:lnTo>
+                  <a:pt x="3975891" y="322"/>
+                </a:lnTo>
+                <a:lnTo>
+                  <a:pt x="4010464" y="329"/>
+                </a:lnTo>
+                <a:lnTo>
+                  <a:pt x="4045037" y="335"/>
+                </a:lnTo>
+                <a:lnTo>
+                  <a:pt x="4079610" y="340"/>
+                </a:lnTo>
+                <a:lnTo>
+                  <a:pt x="4114183" y="345"/>
+                </a:lnTo>
+                <a:lnTo>
+                  <a:pt x="4148756" y="348"/>
+                </a:lnTo>
+                <a:lnTo>
+                  <a:pt x="4183329" y="350"/>
+                </a:lnTo>
+                <a:lnTo>
+                  <a:pt x="4217902" y="351"/>
+                </a:lnTo>
+                <a:lnTo>
+                  <a:pt x="4252474" y="351"/>
+                </a:lnTo>
+                <a:lnTo>
+                  <a:pt x="4287047" y="350"/>
+                </a:lnTo>
+                <a:lnTo>
+                  <a:pt x="4321620" y="347"/>
+                </a:lnTo>
+                <a:lnTo>
+                  <a:pt x="4356193" y="344"/>
+                </a:lnTo>
+                <a:lnTo>
+                  <a:pt x="4390766" y="340"/>
+                </a:lnTo>
+                <a:lnTo>
+                  <a:pt x="4425339" y="335"/>
+                </a:lnTo>
+                <a:lnTo>
+                  <a:pt x="4459912" y="328"/>
+                </a:lnTo>
+                <a:lnTo>
+                  <a:pt x="4494485" y="321"/>
+                </a:lnTo>
+                <a:lnTo>
+                  <a:pt x="4529058" y="313"/>
+                </a:lnTo>
+                <a:lnTo>
+                  <a:pt x="4563631" y="304"/>
+                </a:lnTo>
+                <a:lnTo>
+                  <a:pt x="4598204" y="294"/>
+                </a:lnTo>
+                <a:lnTo>
+                  <a:pt x="4632777" y="283"/>
+                </a:lnTo>
+                <a:lnTo>
+                  <a:pt x="4667350" y="271"/>
+                </a:lnTo>
+                <a:lnTo>
+                  <a:pt x="4701923" y="259"/>
+                </a:lnTo>
+                <a:lnTo>
+                  <a:pt x="4736496" y="246"/>
+                </a:lnTo>
+                <a:lnTo>
+                  <a:pt x="4771069" y="232"/>
+                </a:lnTo>
+                <a:lnTo>
+                  <a:pt x="4805642" y="218"/>
+                </a:lnTo>
+                <a:lnTo>
+                  <a:pt x="4840215" y="204"/>
+                </a:lnTo>
+                <a:lnTo>
+                  <a:pt x="4874788" y="189"/>
+                </a:lnTo>
+                <a:lnTo>
+                  <a:pt x="4909361" y="173"/>
+                </a:lnTo>
+                <a:lnTo>
+                  <a:pt x="4922943" y="167"/>
+                </a:lnTo>
+              </a:path>
+            </a:pathLst>
+          </a:custGeom>
+          <a:noFill/>
+          <a:ln w="40640">
+            <a:solidFill>
+              <a:srgbClr val="8EDBD4"/>
+            </a:solidFill>
+          </a:ln>
+          <a:effectLst/>
+        </p:spPr>
+        <p:txBody>
+          <a:bodyPr rtlCol="0" anchor="ctr"/>
+          <a:lstStyle/>
+          <a:p>
+            <a:pPr algn="ctr"/>
+          </a:p>
+        </p:txBody>
+      </p:sp>
+      <p:sp>
+        <p:nvSpPr>
+          <p:cNvPr id="34" name="C1-E30 polygon 32" descr="sci-ppt:o032"/>
+          <p:cNvSpPr/>
+          <p:nvPr/>
+        </p:nvSpPr>
+        <p:spPr>
+          <a:xfrm>
+            <a:off x="6865408" y="2992514"/>
+            <a:ext cx="4922943" cy="1712430"/>
+          </a:xfrm>
+          <a:custGeom>
+            <a:avLst/>
+            <a:gdLst/>
+            <a:ahLst/>
+            <a:cxnLst/>
+            <a:rect l="l" t="t" r="r" b="b"/>
+            <a:pathLst>
+              <a:path w="4922943" h="1712430">
+                <a:moveTo>
+                  <a:pt x="0" y="1712430"/>
+                </a:moveTo>
+                <a:lnTo>
+                  <a:pt x="34573" y="1688100"/>
+                </a:lnTo>
+                <a:lnTo>
+                  <a:pt x="69146" y="1632005"/>
+                </a:lnTo>
+                <a:lnTo>
+                  <a:pt x="103719" y="1549323"/>
+                </a:lnTo>
+                <a:lnTo>
+                  <a:pt x="138292" y="1446970"/>
+                </a:lnTo>
+                <a:lnTo>
+                  <a:pt x="172865" y="1332374"/>
+                </a:lnTo>
+                <a:lnTo>
+                  <a:pt x="207438" y="1212422"/>
+                </a:lnTo>
+                <a:lnTo>
+                  <a:pt x="242011" y="1092791"/>
+                </a:lnTo>
+                <a:lnTo>
+                  <a:pt x="276584" y="977685"/>
+                </a:lnTo>
+                <a:lnTo>
+                  <a:pt x="311157" y="869873"/>
+                </a:lnTo>
+                <a:lnTo>
+                  <a:pt x="345730" y="770915"/>
+                </a:lnTo>
+                <a:lnTo>
+                  <a:pt x="380303" y="681442"/>
+                </a:lnTo>
+                <a:lnTo>
+                  <a:pt x="414876" y="601438"/>
+                </a:lnTo>
+                <a:lnTo>
+                  <a:pt x="449449" y="530471"/>
+                </a:lnTo>
+                <a:lnTo>
+                  <a:pt x="484021" y="467873"/>
+                </a:lnTo>
+                <a:lnTo>
+                  <a:pt x="518594" y="412863"/>
+                </a:lnTo>
+                <a:lnTo>
+                  <a:pt x="553167" y="364632"/>
+                </a:lnTo>
+                <a:lnTo>
+                  <a:pt x="587740" y="322397"/>
+                </a:lnTo>
+                <a:lnTo>
+                  <a:pt x="622313" y="285425"/>
+                </a:lnTo>
+                <a:lnTo>
+                  <a:pt x="656886" y="253052"/>
+                </a:lnTo>
+                <a:lnTo>
+                  <a:pt x="691459" y="224684"/>
+                </a:lnTo>
+                <a:lnTo>
+                  <a:pt x="726032" y="199798"/>
+                </a:lnTo>
+                <a:lnTo>
+                  <a:pt x="760605" y="177937"/>
+                </a:lnTo>
+                <a:lnTo>
+                  <a:pt x="795178" y="158704"/>
+                </a:lnTo>
+                <a:lnTo>
+                  <a:pt x="829751" y="141754"/>
+                </a:lnTo>
+                <a:lnTo>
+                  <a:pt x="864324" y="126790"/>
+                </a:lnTo>
+                <a:lnTo>
+                  <a:pt x="898897" y="113557"/>
+                </a:lnTo>
+                <a:lnTo>
+                  <a:pt x="933470" y="101832"/>
+                </a:lnTo>
+                <a:lnTo>
+                  <a:pt x="968043" y="91426"/>
+                </a:lnTo>
+                <a:lnTo>
+                  <a:pt x="1002616" y="82175"/>
+                </a:lnTo>
+                <a:lnTo>
+                  <a:pt x="1037189" y="73935"/>
+                </a:lnTo>
+                <a:lnTo>
+                  <a:pt x="1071762" y="66584"/>
+                </a:lnTo>
+                <a:lnTo>
+                  <a:pt x="1106335" y="60016"/>
+                </a:lnTo>
+                <a:lnTo>
+                  <a:pt x="1140908" y="54138"/>
+                </a:lnTo>
+                <a:lnTo>
+                  <a:pt x="1175481" y="48870"/>
+                </a:lnTo>
+                <a:lnTo>
+                  <a:pt x="1210054" y="44142"/>
+                </a:lnTo>
+                <a:lnTo>
+                  <a:pt x="1244627" y="39893"/>
+                </a:lnTo>
+                <a:lnTo>
+                  <a:pt x="1279200" y="36070"/>
+                </a:lnTo>
+                <a:lnTo>
+                  <a:pt x="1313773" y="32625"/>
+                </a:lnTo>
+                <a:lnTo>
+                  <a:pt x="1348346" y="29518"/>
+                </a:lnTo>
+                <a:lnTo>
+                  <a:pt x="1382919" y="26713"/>
+                </a:lnTo>
+                <a:lnTo>
+                  <a:pt x="1417491" y="24177"/>
+                </a:lnTo>
+                <a:lnTo>
+                  <a:pt x="1452064" y="21884"/>
+                </a:lnTo>
+                <a:lnTo>
+                  <a:pt x="1486637" y="19807"/>
+                </a:lnTo>
+                <a:lnTo>
+                  <a:pt x="1521210" y="17926"/>
+                </a:lnTo>
+                <a:lnTo>
+                  <a:pt x="1555783" y="16220"/>
+                </a:lnTo>
+                <a:lnTo>
+                  <a:pt x="1590356" y="14673"/>
+                </a:lnTo>
+                <a:lnTo>
+                  <a:pt x="1624929" y="13268"/>
+                </a:lnTo>
+                <a:lnTo>
+                  <a:pt x="1659502" y="11992"/>
+                </a:lnTo>
+                <a:lnTo>
+                  <a:pt x="1694075" y="10833"/>
+                </a:lnTo>
+                <a:lnTo>
+                  <a:pt x="1728648" y="9780"/>
+                </a:lnTo>
+                <a:lnTo>
+                  <a:pt x="1763221" y="8822"/>
+                </a:lnTo>
+                <a:lnTo>
+                  <a:pt x="1797794" y="7952"/>
+                </a:lnTo>
+                <a:lnTo>
+                  <a:pt x="1832367" y="7160"/>
+                </a:lnTo>
+                <a:lnTo>
+                  <a:pt x="1866940" y="6440"/>
+                </a:lnTo>
+                <a:lnTo>
+                  <a:pt x="1901513" y="5786"/>
+                </a:lnTo>
+                <a:lnTo>
+                  <a:pt x="1936086" y="5191"/>
+                </a:lnTo>
+                <a:lnTo>
+                  <a:pt x="1970659" y="4650"/>
+                </a:lnTo>
+                <a:lnTo>
+                  <a:pt x="2005232" y="4159"/>
+                </a:lnTo>
+                <a:lnTo>
+                  <a:pt x="2039805" y="3713"/>
+                </a:lnTo>
+                <a:lnTo>
+                  <a:pt x="2074378" y="3308"/>
+                </a:lnTo>
+                <a:lnTo>
+                  <a:pt x="2108951" y="2941"/>
+                </a:lnTo>
+                <a:lnTo>
+                  <a:pt x="2143524" y="2608"/>
+                </a:lnTo>
+                <a:lnTo>
+                  <a:pt x="2178097" y="2307"/>
+                </a:lnTo>
+                <a:lnTo>
+                  <a:pt x="2212670" y="2034"/>
+                </a:lnTo>
+                <a:lnTo>
+                  <a:pt x="2247243" y="1788"/>
+                </a:lnTo>
+                <a:lnTo>
+                  <a:pt x="2281816" y="1567"/>
+                </a:lnTo>
+                <a:lnTo>
+                  <a:pt x="2316389" y="1367"/>
+                </a:lnTo>
+                <a:lnTo>
+                  <a:pt x="2350961" y="1187"/>
+                </a:lnTo>
+                <a:lnTo>
+                  <a:pt x="2385534" y="1026"/>
+                </a:lnTo>
+                <a:lnTo>
+                  <a:pt x="2420107" y="882"/>
+                </a:lnTo>
+                <a:lnTo>
+                  <a:pt x="2454680" y="754"/>
+                </a:lnTo>
+                <a:lnTo>
+                  <a:pt x="2489253" y="640"/>
+                </a:lnTo>
+                <a:lnTo>
+                  <a:pt x="2523826" y="539"/>
+                </a:lnTo>
+                <a:lnTo>
+                  <a:pt x="2558399" y="449"/>
+                </a:lnTo>
+                <a:lnTo>
+                  <a:pt x="2592972" y="371"/>
+                </a:lnTo>
+                <a:lnTo>
+                  <a:pt x="2627545" y="302"/>
+                </a:lnTo>
+                <a:lnTo>
+                  <a:pt x="2662118" y="243"/>
+                </a:lnTo>
+                <a:lnTo>
+                  <a:pt x="2696691" y="192"/>
+                </a:lnTo>
+                <a:lnTo>
+                  <a:pt x="2731264" y="148"/>
+                </a:lnTo>
+                <a:lnTo>
+                  <a:pt x="2765837" y="112"/>
+                </a:lnTo>
+                <a:lnTo>
+                  <a:pt x="2800410" y="81"/>
+                </a:lnTo>
+                <a:lnTo>
+                  <a:pt x="2834983" y="57"/>
+                </a:lnTo>
+                <a:lnTo>
+                  <a:pt x="2869556" y="37"/>
+                </a:lnTo>
+                <a:lnTo>
+                  <a:pt x="2904129" y="22"/>
+                </a:lnTo>
+                <a:lnTo>
+                  <a:pt x="2938702" y="11"/>
+                </a:lnTo>
+                <a:lnTo>
+                  <a:pt x="2973275" y="4"/>
+                </a:lnTo>
+                <a:lnTo>
+                  <a:pt x="3007848" y="1"/>
+                </a:lnTo>
+                <a:lnTo>
+                  <a:pt x="3042421" y="0"/>
+                </a:lnTo>
+                <a:lnTo>
+                  <a:pt x="3076994" y="2"/>
+                </a:lnTo>
+                <a:lnTo>
+                  <a:pt x="3111567" y="7"/>
+                </a:lnTo>
+                <a:lnTo>
+                  <a:pt x="3146140" y="13"/>
+                </a:lnTo>
+                <a:lnTo>
+                  <a:pt x="3180713" y="22"/>
+                </a:lnTo>
+                <a:lnTo>
+                  <a:pt x="3215286" y="32"/>
+                </a:lnTo>
+                <a:lnTo>
+                  <a:pt x="3249859" y="43"/>
+                </a:lnTo>
+                <a:lnTo>
+                  <a:pt x="3284432" y="56"/>
+                </a:lnTo>
+                <a:lnTo>
+                  <a:pt x="3319004" y="69"/>
+                </a:lnTo>
+                <a:lnTo>
+                  <a:pt x="3353577" y="83"/>
+                </a:lnTo>
+                <a:lnTo>
+                  <a:pt x="3388150" y="98"/>
+                </a:lnTo>
+                <a:lnTo>
+                  <a:pt x="3422723" y="113"/>
+                </a:lnTo>
+                <a:lnTo>
+                  <a:pt x="3457296" y="128"/>
+                </a:lnTo>
+                <a:lnTo>
+                  <a:pt x="3491869" y="144"/>
+                </a:lnTo>
+                <a:lnTo>
+                  <a:pt x="3526442" y="159"/>
+                </a:lnTo>
+                <a:lnTo>
+                  <a:pt x="3561015" y="175"/>
+                </a:lnTo>
+                <a:lnTo>
+                  <a:pt x="3595588" y="190"/>
+                </a:lnTo>
+                <a:lnTo>
+                  <a:pt x="3630161" y="205"/>
+                </a:lnTo>
+                <a:lnTo>
+                  <a:pt x="3664734" y="220"/>
+                </a:lnTo>
+                <a:lnTo>
+                  <a:pt x="3699307" y="234"/>
+                </a:lnTo>
+                <a:lnTo>
+                  <a:pt x="3733880" y="247"/>
+                </a:lnTo>
+                <a:lnTo>
+                  <a:pt x="3768453" y="260"/>
+                </a:lnTo>
+                <a:lnTo>
+                  <a:pt x="3803026" y="273"/>
+                </a:lnTo>
+                <a:lnTo>
+                  <a:pt x="3837599" y="284"/>
+                </a:lnTo>
+                <a:lnTo>
+                  <a:pt x="3872172" y="295"/>
+                </a:lnTo>
+                <a:lnTo>
+                  <a:pt x="3906745" y="305"/>
+                </a:lnTo>
+                <a:lnTo>
+                  <a:pt x="3941318" y="314"/>
+                </a:lnTo>
+                <a:lnTo>
+                  <a:pt x="3975891" y="322"/>
+                </a:lnTo>
+                <a:lnTo>
+                  <a:pt x="4010464" y="329"/>
+                </a:lnTo>
+                <a:lnTo>
+                  <a:pt x="4045037" y="335"/>
+                </a:lnTo>
+                <a:lnTo>
+                  <a:pt x="4079610" y="340"/>
+                </a:lnTo>
+                <a:lnTo>
+                  <a:pt x="4114183" y="345"/>
+                </a:lnTo>
+                <a:lnTo>
+                  <a:pt x="4148756" y="348"/>
+                </a:lnTo>
+                <a:lnTo>
+                  <a:pt x="4183329" y="350"/>
+                </a:lnTo>
+                <a:lnTo>
+                  <a:pt x="4217902" y="351"/>
+                </a:lnTo>
+                <a:lnTo>
+                  <a:pt x="4252474" y="351"/>
+                </a:lnTo>
+                <a:lnTo>
+                  <a:pt x="4287047" y="350"/>
+                </a:lnTo>
+                <a:lnTo>
+                  <a:pt x="4321620" y="347"/>
+                </a:lnTo>
+                <a:lnTo>
+                  <a:pt x="4356193" y="344"/>
+                </a:lnTo>
+                <a:lnTo>
+                  <a:pt x="4390766" y="340"/>
+                </a:lnTo>
+                <a:lnTo>
+                  <a:pt x="4425339" y="335"/>
+                </a:lnTo>
+                <a:lnTo>
+                  <a:pt x="4459912" y="328"/>
+                </a:lnTo>
+                <a:lnTo>
+                  <a:pt x="4494485" y="321"/>
+                </a:lnTo>
+                <a:lnTo>
+                  <a:pt x="4529058" y="313"/>
+                </a:lnTo>
+                <a:lnTo>
+                  <a:pt x="4563631" y="304"/>
+                </a:lnTo>
+                <a:lnTo>
+                  <a:pt x="4598204" y="294"/>
+                </a:lnTo>
+                <a:lnTo>
+                  <a:pt x="4632777" y="283"/>
+                </a:lnTo>
+                <a:lnTo>
+                  <a:pt x="4667350" y="271"/>
+                </a:lnTo>
+                <a:lnTo>
+                  <a:pt x="4701923" y="259"/>
+                </a:lnTo>
+                <a:lnTo>
+                  <a:pt x="4736496" y="246"/>
+                </a:lnTo>
+                <a:lnTo>
+                  <a:pt x="4771069" y="232"/>
+                </a:lnTo>
+                <a:lnTo>
+                  <a:pt x="4805642" y="218"/>
+                </a:lnTo>
+                <a:lnTo>
+                  <a:pt x="4840215" y="204"/>
+                </a:lnTo>
+                <a:lnTo>
+                  <a:pt x="4874788" y="189"/>
+                </a:lnTo>
+                <a:lnTo>
+                  <a:pt x="4909361" y="173"/>
+                </a:lnTo>
+                <a:lnTo>
+                  <a:pt x="4922943" y="167"/>
+                </a:lnTo>
+              </a:path>
+            </a:pathLst>
+          </a:custGeom>
+          <a:noFill/>
+          <a:ln w="20320">
+            <a:solidFill>
+              <a:srgbClr val="FFFFFF"/>
+            </a:solidFill>
+            <a:prstDash val="dash"/>
+          </a:ln>
+          <a:effectLst/>
+        </p:spPr>
+        <p:txBody>
+          <a:bodyPr rtlCol="0" anchor="ctr"/>
+          <a:lstStyle/>
+          <a:p>
+            <a:pPr algn="ctr"/>
+          </a:p>
+        </p:txBody>
+      </p:sp>
+      <p:sp>
+        <p:nvSpPr>
+          <p:cNvPr id="35" name="C1-E30 text 33" descr="sci-ppt:o033"/>
+          <p:cNvSpPr txBox="1"/>
+          <p:nvPr/>
+        </p:nvSpPr>
+        <p:spPr>
+          <a:xfrm>
+            <a:off x="7095744" y="1407261"/>
+            <a:ext cx="4754880" cy="216153"/>
+          </a:xfrm>
+          <a:prstGeom prst="rect">
+            <a:avLst/>
+          </a:prstGeom>
+          <a:noFill/>
+          <a:effectLst/>
+        </p:spPr>
+        <p:txBody>
+          <a:bodyPr wrap="none" lIns="18288" rIns="18288" tIns="18288" bIns="18288" anchor="t">
+            <a:spAutoFit/>
+          </a:bodyPr>
+          <a:lstStyle/>
+          <a:p>
+            <a:pPr algn="l">
+              <a:spcAft>
+                <a:spcPts val="0"/>
+              </a:spcAft>
+            </a:pPr>
+            <a:r>
+              <a:rPr sz="1100" b="0" i="0">
+                <a:solidFill>
+                  <a:srgbClr val="E7F0F3"/>
+                </a:solidFill>
+                <a:latin typeface="Arial"/>
+              </a:rPr>
+              <a:t>solid: left side, dashed: right side; relative gap 1e-05</a:t>
+            </a:r>
+          </a:p>
+        </p:txBody>
+      </p:sp>
+      <p:sp>
+        <p:nvSpPr>
+          <p:cNvPr id="36" name="C1-E30 round_rect 34" descr="sci-ppt:o034"/>
+          <p:cNvSpPr/>
+          <p:nvPr/>
+        </p:nvSpPr>
+        <p:spPr>
+          <a:xfrm>
+            <a:off x="365760" y="914400"/>
+            <a:ext cx="5669280" cy="4937760"/>
+          </a:xfrm>
+          <a:prstGeom prst="roundRect">
             <a:avLst/>
           </a:prstGeom>
           <a:solidFill>
             <a:srgbClr val="213E4B"/>
           </a:solidFill>
-          <a:ln w="21590">
+          <a:ln w="20320">
             <a:solidFill>
-              <a:srgbClr val="B4C7D2"/>
+              <a:srgbClr val="8EDBD4"/>
             </a:solidFill>
           </a:ln>
           <a:effectLst/>
@@ -3168,23 +4989,143 @@
           </a:p>
         </p:txBody>
       </p:sp>
+      <p:sp>
+        <p:nvSpPr>
+          <p:cNvPr id="37" name="C1-E30 text 35" descr="sci-ppt:o035"/>
+          <p:cNvSpPr txBox="1"/>
+          <p:nvPr/>
+        </p:nvSpPr>
+        <p:spPr>
+          <a:xfrm>
+            <a:off x="475488" y="969264"/>
+            <a:ext cx="5449824" cy="254889"/>
+          </a:xfrm>
+          <a:prstGeom prst="rect">
+            <a:avLst/>
+          </a:prstGeom>
+          <a:noFill/>
+          <a:effectLst/>
+        </p:spPr>
+        <p:txBody>
+          <a:bodyPr wrap="none" lIns="18288" rIns="18288" tIns="18288" bIns="18288" anchor="t">
+            <a:spAutoFit/>
+          </a:bodyPr>
+          <a:lstStyle/>
+          <a:p>
+            <a:pPr algn="l">
+              <a:spcAft>
+                <a:spcPts val="0"/>
+              </a:spcAft>
+            </a:pPr>
+            <a:r>
+              <a:rPr sz="1350" b="1" i="0">
+                <a:solidFill>
+                  <a:srgbClr val="8EDBD4"/>
+                </a:solidFill>
+                <a:latin typeface="Arial"/>
+              </a:rPr>
+              <a:t>The general closure contains the sphere</a:t>
+            </a:r>
+          </a:p>
+        </p:txBody>
+      </p:sp>
+      <p:sp>
+        <p:nvSpPr>
+          <p:cNvPr id="38" name="C1-E30 text 36" descr="sci-ppt:o036"/>
+          <p:cNvSpPr txBox="1"/>
+          <p:nvPr/>
+        </p:nvSpPr>
+        <p:spPr>
+          <a:xfrm>
+            <a:off x="548640" y="1371600"/>
+            <a:ext cx="5303520" cy="239395"/>
+          </a:xfrm>
+          <a:prstGeom prst="rect">
+            <a:avLst/>
+          </a:prstGeom>
+          <a:noFill/>
+          <a:effectLst/>
+        </p:spPr>
+        <p:txBody>
+          <a:bodyPr wrap="none" lIns="18288" rIns="18288" tIns="18288" bIns="18288" anchor="t">
+            <a:spAutoFit/>
+          </a:bodyPr>
+          <a:lstStyle/>
+          <a:p>
+            <a:pPr algn="l">
+              <a:spcAft>
+                <a:spcPts val="0"/>
+              </a:spcAft>
+            </a:pPr>
+            <a:r>
+              <a:rPr sz="1250" b="1" i="0">
+                <a:solidFill>
+                  <a:srgbClr val="8EDBD4"/>
+                </a:solidFill>
+                <a:latin typeface="Arial"/>
+              </a:rPr>
+              <a:t>General closure, Eq. C1-E29</a:t>
+            </a:r>
+          </a:p>
+        </p:txBody>
+      </p:sp>
+      <p:sp>
+        <p:nvSpPr>
+          <p:cNvPr id="39" name="C1-E30 text 37" descr="sci-ppt:o037"/>
+          <p:cNvSpPr txBox="1"/>
+          <p:nvPr/>
+        </p:nvSpPr>
+        <p:spPr>
+          <a:xfrm>
+            <a:off x="777240" y="1664208"/>
+            <a:ext cx="5120640" cy="239395"/>
+          </a:xfrm>
+          <a:prstGeom prst="rect">
+            <a:avLst/>
+          </a:prstGeom>
+          <a:noFill/>
+          <a:effectLst/>
+        </p:spPr>
+        <p:txBody>
+          <a:bodyPr wrap="none" lIns="18288" rIns="18288" tIns="18288" bIns="18288" anchor="t">
+            <a:spAutoFit/>
+          </a:bodyPr>
+          <a:lstStyle/>
+          <a:p>
+            <a:pPr algn="l">
+              <a:spcAft>
+                <a:spcPts val="0"/>
+              </a:spcAft>
+            </a:pPr>
+            <a:r>
+              <a:rPr sz="1250" b="0" i="0">
+                <a:solidFill>
+                  <a:srgbClr val="E7F0F3"/>
+                </a:solidFill>
+                <a:latin typeface="Arial"/>
+              </a:rPr>
+              <a:t>D φ/Dt = ½|u|² + (p∞ − p_b − σκ)/ρ</a:t>
+            </a:r>
+          </a:p>
+        </p:txBody>
+      </p:sp>
       <p:cxnSp>
         <p:nvCxnSpPr>
-          <p:cNvPr id="4" name="arrow3" descr="sci-ppt:C1-E30-003"/>
+          <p:cNvPr id="40" name="C1-E30 arrow 38" descr="sci-ppt:o038"/>
           <p:cNvCxnSpPr/>
           <p:nvPr/>
         </p:nvCxnSpPr>
         <p:spPr>
           <a:xfrm>
-            <a:off x="3291840" y="2621280"/>
-            <a:ext cx="1219200" cy="0"/>
+            <a:off x="3108960" y="1976755"/>
+            <a:ext cx="0" cy="182880"/>
           </a:xfrm>
           <a:prstGeom prst="line">
             <a:avLst/>
           </a:prstGeom>
           <a:ln w="25400">
             <a:solidFill>
-              <a:srgbClr val="8EDBD4"/>
+              <a:srgbClr val="B4C7D2"/>
             </a:solidFill>
             <a:headEnd type="none" w="med" len="med"/>
             <a:tailEnd type="triangle" w="med" len="med"/>
@@ -3194,14 +5135,14 @@
       </p:cxnSp>
       <p:sp>
         <p:nvSpPr>
-          <p:cNvPr id="5" name="text4" descr="sci-ppt:C1-E30-004"/>
+          <p:cNvPr id="41" name="C1-E30 text 39" descr="sci-ppt:o039"/>
           <p:cNvSpPr txBox="1"/>
           <p:nvPr/>
         </p:nvSpPr>
         <p:spPr>
           <a:xfrm>
-            <a:off x="3474720" y="2133600"/>
-            <a:ext cx="1584960" cy="396849"/>
+            <a:off x="548640" y="2214499"/>
+            <a:ext cx="5303520" cy="239395"/>
           </a:xfrm>
           <a:prstGeom prst="rect">
             <a:avLst/>
@@ -3210,7 +5151,7 @@
           <a:effectLst/>
         </p:spPr>
         <p:txBody>
-          <a:bodyPr wrap="none" lIns="27432" rIns="27432" tIns="18288" bIns="18288" anchor="ctr">
+          <a:bodyPr wrap="none" lIns="18288" rIns="18288" tIns="18288" bIns="18288" anchor="t">
             <a:spAutoFit/>
           </a:bodyPr>
           <a:lstStyle/>
@@ -3221,27 +5162,91 @@
               </a:spcAft>
             </a:pPr>
             <a:r>
-              <a:rPr sz="2016" b="0" i="0">
+              <a:rPr sz="1250" b="1" i="0">
+                <a:solidFill>
+                  <a:srgbClr val="F2B880"/>
+                </a:solidFill>
+                <a:latin typeface="Arial"/>
+              </a:rPr>
+              <a:t>Insert the sphere</a:t>
+            </a:r>
+          </a:p>
+        </p:txBody>
+      </p:sp>
+      <p:sp>
+        <p:nvSpPr>
+          <p:cNvPr id="42" name="C1-E30 text 40" descr="sci-ppt:o040"/>
+          <p:cNvSpPr txBox="1"/>
+          <p:nvPr/>
+        </p:nvSpPr>
+        <p:spPr>
+          <a:xfrm>
+            <a:off x="777240" y="2507107"/>
+            <a:ext cx="5120640" cy="239395"/>
+          </a:xfrm>
+          <a:prstGeom prst="rect">
+            <a:avLst/>
+          </a:prstGeom>
+          <a:noFill/>
+          <a:effectLst/>
+        </p:spPr>
+        <p:txBody>
+          <a:bodyPr wrap="none" lIns="18288" rIns="18288" tIns="18288" bIns="18288" anchor="t">
+            <a:spAutoFit/>
+          </a:bodyPr>
+          <a:lstStyle/>
+          <a:p>
+            <a:pPr algn="l">
+              <a:spcAft>
+                <a:spcPts val="0"/>
+              </a:spcAft>
+            </a:pPr>
+            <a:r>
+              <a:rPr sz="1250" b="0" i="0">
                 <a:solidFill>
                   <a:srgbClr val="E7F0F3"/>
                 </a:solidFill>
                 <a:latin typeface="Arial"/>
               </a:rPr>
-              <a:t>R(t)</a:t>
-            </a:r>
-          </a:p>
-        </p:txBody>
-      </p:sp>
-      <p:sp>
-        <p:nvSpPr>
-          <p:cNvPr id="6" name="text5" descr="sci-ppt:C1-E30-005"/>
+              <a:t>φ_Γ = −RṘ,   κ = −2/R</a:t>
+            </a:r>
+          </a:p>
+        </p:txBody>
+      </p:sp>
+      <p:cxnSp>
+        <p:nvCxnSpPr>
+          <p:cNvPr id="43" name="C1-E30 arrow 41" descr="sci-ppt:o041"/>
+          <p:cNvCxnSpPr/>
+          <p:nvPr/>
+        </p:nvCxnSpPr>
+        <p:spPr>
+          <a:xfrm>
+            <a:off x="3108960" y="2819654"/>
+            <a:ext cx="0" cy="182880"/>
+          </a:xfrm>
+          <a:prstGeom prst="line">
+            <a:avLst/>
+          </a:prstGeom>
+          <a:ln w="25400">
+            <a:solidFill>
+              <a:srgbClr val="B4C7D2"/>
+            </a:solidFill>
+            <a:headEnd type="none" w="med" len="med"/>
+            <a:tailEnd type="triangle" w="med" len="med"/>
+          </a:ln>
+          <a:effectLst/>
+        </p:spPr>
+      </p:cxnSp>
+      <p:sp>
+        <p:nvSpPr>
+          <p:cNvPr id="44" name="C1-E30 text 42" descr="sci-ppt:o042"/>
           <p:cNvSpPr txBox="1"/>
           <p:nvPr/>
         </p:nvSpPr>
         <p:spPr>
           <a:xfrm>
-            <a:off x="2682240" y="2804160"/>
-            <a:ext cx="2194560" cy="377952"/>
+            <a:off x="548640" y="3057398"/>
+            <a:ext cx="5303520" cy="239395"/>
           </a:xfrm>
           <a:prstGeom prst="rect">
             <a:avLst/>
@@ -3250,7 +5255,7 @@
           <a:effectLst/>
         </p:spPr>
         <p:txBody>
-          <a:bodyPr wrap="none" lIns="27432" rIns="27432" tIns="18288" bIns="18288" anchor="ctr">
+          <a:bodyPr wrap="none" lIns="18288" rIns="18288" tIns="18288" bIns="18288" anchor="t">
             <a:spAutoFit/>
           </a:bodyPr>
           <a:lstStyle/>
@@ -3261,27 +5266,91 @@
               </a:spcAft>
             </a:pPr>
             <a:r>
-              <a:rPr sz="1920" b="0" i="0">
+              <a:rPr sz="1250" b="1" i="0">
+                <a:solidFill>
+                  <a:srgbClr val="7FC8F8"/>
+                </a:solidFill>
+                <a:latin typeface="Arial"/>
+              </a:rPr>
+              <a:t>Differentiate along the wall</a:t>
+            </a:r>
+          </a:p>
+        </p:txBody>
+      </p:sp>
+      <p:sp>
+        <p:nvSpPr>
+          <p:cNvPr id="45" name="C1-E30 text 43" descr="sci-ppt:o043"/>
+          <p:cNvSpPr txBox="1"/>
+          <p:nvPr/>
+        </p:nvSpPr>
+        <p:spPr>
+          <a:xfrm>
+            <a:off x="777240" y="3350006"/>
+            <a:ext cx="5120640" cy="239395"/>
+          </a:xfrm>
+          <a:prstGeom prst="rect">
+            <a:avLst/>
+          </a:prstGeom>
+          <a:noFill/>
+          <a:effectLst/>
+        </p:spPr>
+        <p:txBody>
+          <a:bodyPr wrap="none" lIns="18288" rIns="18288" tIns="18288" bIns="18288" anchor="t">
+            <a:spAutoFit/>
+          </a:bodyPr>
+          <a:lstStyle/>
+          <a:p>
+            <a:pPr algn="l">
+              <a:spcAft>
+                <a:spcPts val="0"/>
+              </a:spcAft>
+            </a:pPr>
+            <a:r>
+              <a:rPr sz="1250" b="0" i="0">
                 <a:solidFill>
                   <a:srgbClr val="E7F0F3"/>
                 </a:solidFill>
                 <a:latin typeface="Arial"/>
               </a:rPr>
-              <a:t>p_b</a:t>
-            </a:r>
-          </a:p>
-        </p:txBody>
-      </p:sp>
-      <p:sp>
-        <p:nvSpPr>
-          <p:cNvPr id="7" name="text6" descr="sci-ppt:C1-E30-006"/>
+              <a:t>−Ṙ² − RR̈ = (p∞ − p_b + 2σ/R)/ρ + ½Ṙ²</a:t>
+            </a:r>
+          </a:p>
+        </p:txBody>
+      </p:sp>
+      <p:cxnSp>
+        <p:nvCxnSpPr>
+          <p:cNvPr id="46" name="C1-E30 arrow 44" descr="sci-ppt:o044"/>
+          <p:cNvCxnSpPr/>
+          <p:nvPr/>
+        </p:nvCxnSpPr>
+        <p:spPr>
+          <a:xfrm>
+            <a:off x="3108960" y="3662552"/>
+            <a:ext cx="0" cy="182880"/>
+          </a:xfrm>
+          <a:prstGeom prst="line">
+            <a:avLst/>
+          </a:prstGeom>
+          <a:ln w="25400">
+            <a:solidFill>
+              <a:srgbClr val="B4C7D2"/>
+            </a:solidFill>
+            <a:headEnd type="none" w="med" len="med"/>
+            <a:tailEnd type="triangle" w="med" len="med"/>
+          </a:ln>
+          <a:effectLst/>
+        </p:spPr>
+      </p:cxnSp>
+      <p:sp>
+        <p:nvSpPr>
+          <p:cNvPr id="47" name="C1-E30 text 45" descr="sci-ppt:o045"/>
           <p:cNvSpPr txBox="1"/>
           <p:nvPr/>
         </p:nvSpPr>
         <p:spPr>
           <a:xfrm>
-            <a:off x="5242560" y="1524000"/>
-            <a:ext cx="4876800" cy="415747"/>
+            <a:off x="548640" y="3900296"/>
+            <a:ext cx="5303520" cy="239395"/>
           </a:xfrm>
           <a:prstGeom prst="rect">
             <a:avLst/>
@@ -3290,7 +5359,7 @@
           <a:effectLst/>
         </p:spPr>
         <p:txBody>
-          <a:bodyPr wrap="none" lIns="27432" rIns="27432" tIns="18288" bIns="18288" anchor="ctr">
+          <a:bodyPr wrap="none" lIns="18288" rIns="18288" tIns="18288" bIns="18288" anchor="t">
             <a:spAutoFit/>
           </a:bodyPr>
           <a:lstStyle/>
@@ -3301,27 +5370,67 @@
               </a:spcAft>
             </a:pPr>
             <a:r>
-              <a:rPr sz="2111" b="0" i="0">
+              <a:rPr sz="1250" b="1" i="0">
+                <a:solidFill>
+                  <a:srgbClr val="F28BA0"/>
+                </a:solidFill>
+                <a:latin typeface="Arial"/>
+              </a:rPr>
+              <a:t>Rearrange</a:t>
+            </a:r>
+          </a:p>
+        </p:txBody>
+      </p:sp>
+      <p:sp>
+        <p:nvSpPr>
+          <p:cNvPr id="48" name="C1-E30 text 46" descr="sci-ppt:o046"/>
+          <p:cNvSpPr txBox="1"/>
+          <p:nvPr/>
+        </p:nvSpPr>
+        <p:spPr>
+          <a:xfrm>
+            <a:off x="777240" y="4192904"/>
+            <a:ext cx="5120640" cy="239395"/>
+          </a:xfrm>
+          <a:prstGeom prst="rect">
+            <a:avLst/>
+          </a:prstGeom>
+          <a:noFill/>
+          <a:effectLst/>
+        </p:spPr>
+        <p:txBody>
+          <a:bodyPr wrap="none" lIns="18288" rIns="18288" tIns="18288" bIns="18288" anchor="t">
+            <a:spAutoFit/>
+          </a:bodyPr>
+          <a:lstStyle/>
+          <a:p>
+            <a:pPr algn="l">
+              <a:spcAft>
+                <a:spcPts val="0"/>
+              </a:spcAft>
+            </a:pPr>
+            <a:r>
+              <a:rPr sz="1250" b="0" i="0">
                 <a:solidFill>
                   <a:srgbClr val="E7F0F3"/>
                 </a:solidFill>
                 <a:latin typeface="Arial"/>
               </a:rPr>
-              <a:t>Surrounding liquid</a:t>
-            </a:r>
-          </a:p>
-        </p:txBody>
-      </p:sp>
-      <p:sp>
-        <p:nvSpPr>
-          <p:cNvPr id="8" name="text7" descr="sci-ppt:C1-E30-007"/>
+              <a:t>ρ(RR̈ + 3Ṙ²/2) = p_b − p∞ − 2σ/R</a:t>
+            </a:r>
+          </a:p>
+        </p:txBody>
+      </p:sp>
+      <p:sp>
+        <p:nvSpPr>
+          <p:cNvPr id="49" name="C1-E30 text 47" descr="sci-ppt:o047"/>
           <p:cNvSpPr txBox="1"/>
           <p:nvPr/>
         </p:nvSpPr>
         <p:spPr>
           <a:xfrm>
-            <a:off x="5242560" y="1987296"/>
-            <a:ext cx="5852160" cy="359054"/>
+            <a:off x="548640" y="5074920"/>
+            <a:ext cx="5303520" cy="417576"/>
           </a:xfrm>
           <a:prstGeom prst="rect">
             <a:avLst/>
@@ -3330,7 +5439,7 @@
           <a:effectLst/>
         </p:spPr>
         <p:txBody>
-          <a:bodyPr wrap="none" lIns="27432" rIns="27432" tIns="18288" bIns="18288" anchor="ctr">
+          <a:bodyPr wrap="none" lIns="18288" rIns="18288" tIns="18288" bIns="18288" anchor="t">
             <a:spAutoFit/>
           </a:bodyPr>
           <a:lstStyle/>
@@ -3341,51 +5450,99 @@
               </a:spcAft>
             </a:pPr>
             <a:r>
-              <a:rPr sz="1823" b="0" i="0">
+              <a:rPr sz="1200" b="0" i="0">
+                <a:solidFill>
+                  <a:srgbClr val="B4C7D2"/>
+                </a:solidFill>
+                <a:latin typeface="Arial"/>
+              </a:rPr>
+              <a:t>This is the Rayleigh–Plesset equation without viscosity: the</a:t>
+            </a:r>
+          </a:p>
+          <a:p>
+            <a:pPr algn="l">
+              <a:spcAft>
+                <a:spcPts val="0"/>
+              </a:spcAft>
+            </a:pPr>
+            <a:r>
+              <a:rPr sz="1200" b="0" i="0">
+                <a:solidFill>
+                  <a:srgbClr val="B4C7D2"/>
+                </a:solidFill>
+                <a:latin typeface="Arial"/>
+              </a:rPr>
+              <a:t>spatial theory returns the spherical model in its own limit.</a:t>
+            </a:r>
+          </a:p>
+        </p:txBody>
+      </p:sp>
+      <p:sp>
+        <p:nvSpPr>
+          <p:cNvPr id="50" name="C1-E30 text 48" descr="sci-ppt:o048"/>
+          <p:cNvSpPr txBox="1"/>
+          <p:nvPr/>
+        </p:nvSpPr>
+        <p:spPr>
+          <a:xfrm>
+            <a:off x="6858000" y="5669280"/>
+            <a:ext cx="4937760" cy="433070"/>
+          </a:xfrm>
+          <a:prstGeom prst="rect">
+            <a:avLst/>
+          </a:prstGeom>
+          <a:noFill/>
+          <a:effectLst/>
+        </p:spPr>
+        <p:txBody>
+          <a:bodyPr wrap="none" lIns="18288" rIns="18288" tIns="18288" bIns="18288" anchor="t">
+            <a:spAutoFit/>
+          </a:bodyPr>
+          <a:lstStyle/>
+          <a:p>
+            <a:pPr algn="l">
+              <a:spcAft>
+                <a:spcPts val="0"/>
+              </a:spcAft>
+            </a:pPr>
+            <a:r>
+              <a:rPr sz="1250" b="0" i="0">
                 <a:solidFill>
                   <a:srgbClr val="E7F0F3"/>
                 </a:solidFill>
                 <a:latin typeface="Arial"/>
               </a:rPr>
-              <a:t>p∞, ρ, μ; interface: σ</a:t>
-            </a:r>
-          </a:p>
-        </p:txBody>
-      </p:sp>
-      <p:cxnSp>
-        <p:nvCxnSpPr>
-          <p:cNvPr id="9" name="arrow8" descr="sci-ppt:C1-E30-008"/>
-          <p:cNvCxnSpPr/>
-          <p:nvPr/>
-        </p:nvCxnSpPr>
-        <p:spPr>
-          <a:xfrm>
-            <a:off x="3291840" y="2621280"/>
-            <a:ext cx="1706880" cy="1158240"/>
-          </a:xfrm>
-          <a:prstGeom prst="line">
-            <a:avLst/>
-          </a:prstGeom>
-          <a:ln w="25400">
-            <a:solidFill>
-              <a:srgbClr val="8EDBD4"/>
-            </a:solidFill>
-            <a:headEnd type="none" w="med" len="med"/>
-            <a:tailEnd type="triangle" w="med" len="med"/>
-          </a:ln>
-          <a:effectLst/>
-        </p:spPr>
-      </p:cxnSp>
-      <p:sp>
-        <p:nvSpPr>
-          <p:cNvPr id="10" name="text9" descr="sci-ppt:C1-E30-009"/>
+              <a:t>Check: R(t) from the solution, R̈ by finite differences.</a:t>
+            </a:r>
+          </a:p>
+          <a:p>
+            <a:pPr algn="l">
+              <a:spcAft>
+                <a:spcPts val="0"/>
+              </a:spcAft>
+            </a:pPr>
+            <a:r>
+              <a:rPr sz="1250" b="0" i="0">
+                <a:solidFill>
+                  <a:srgbClr val="E7F0F3"/>
+                </a:solidFill>
+                <a:latin typeface="Arial"/>
+              </a:rPr>
+              <a:t>The two sides coincide, so the algebra above is exact.</a:t>
+            </a:r>
+          </a:p>
+        </p:txBody>
+      </p:sp>
+      <p:sp>
+        <p:nvSpPr>
+          <p:cNvPr id="51" name="C1-E30 text 49" descr="sci-ppt:o049"/>
           <p:cNvSpPr txBox="1"/>
           <p:nvPr/>
         </p:nvSpPr>
         <p:spPr>
           <a:xfrm>
-            <a:off x="5364480" y="3657600"/>
-            <a:ext cx="1950720" cy="340156"/>
+            <a:off x="320040" y="6510528"/>
+            <a:ext cx="11521440" cy="200660"/>
           </a:xfrm>
           <a:prstGeom prst="rect">
             <a:avLst/>
@@ -3394,7 +5551,7 @@
           <a:effectLst/>
         </p:spPr>
         <p:txBody>
-          <a:bodyPr wrap="none" lIns="27432" rIns="27432" tIns="18288" bIns="18288" anchor="ctr">
+          <a:bodyPr wrap="none" lIns="18288" rIns="18288" tIns="18288" bIns="18288" anchor="t">
             <a:spAutoFit/>
           </a:bodyPr>
           <a:lstStyle/>
@@ -3405,517 +5562,13 @@
               </a:spcAft>
             </a:pPr>
             <a:r>
-              <a:rPr sz="1728" b="0" i="0">
-                <a:solidFill>
-                  <a:srgbClr val="E7F0F3"/>
-                </a:solidFill>
-                <a:latin typeface="Arial"/>
-              </a:rPr>
-              <a:t>r ≥ R</a:t>
-            </a:r>
-          </a:p>
-        </p:txBody>
-      </p:sp>
-      <p:cxnSp>
-        <p:nvCxnSpPr>
-          <p:cNvPr id="11" name="arrow10" descr="sci-ppt:C1-E30-010"/>
-          <p:cNvCxnSpPr/>
-          <p:nvPr/>
-        </p:nvCxnSpPr>
-        <p:spPr>
-          <a:xfrm>
-            <a:off x="4998720" y="2621280"/>
-            <a:ext cx="792480" cy="0"/>
-          </a:xfrm>
-          <a:prstGeom prst="line">
-            <a:avLst/>
-          </a:prstGeom>
-          <a:ln w="25400">
-            <a:solidFill>
-              <a:srgbClr val="8EDBD4"/>
-            </a:solidFill>
-            <a:headEnd type="none" w="med" len="med"/>
-            <a:tailEnd type="triangle" w="med" len="med"/>
-          </a:ln>
-          <a:effectLst/>
-        </p:spPr>
-      </p:cxnSp>
-      <p:sp>
-        <p:nvSpPr>
-          <p:cNvPr id="12" name="text11" descr="sci-ppt:C1-E30-011"/>
-          <p:cNvSpPr txBox="1"/>
-          <p:nvPr/>
-        </p:nvSpPr>
-        <p:spPr>
-          <a:xfrm>
-            <a:off x="5059680" y="2865120"/>
-            <a:ext cx="3291840" cy="321259"/>
-          </a:xfrm>
-          <a:prstGeom prst="rect">
-            <a:avLst/>
-          </a:prstGeom>
-          <a:noFill/>
-          <a:effectLst/>
-        </p:spPr>
-        <p:txBody>
-          <a:bodyPr wrap="none" lIns="27432" rIns="27432" tIns="18288" bIns="18288" anchor="ctr">
-            <a:spAutoFit/>
-          </a:bodyPr>
-          <a:lstStyle/>
-          <a:p>
-            <a:pPr algn="l">
-              <a:spcAft>
-                <a:spcPts val="0"/>
-              </a:spcAft>
-            </a:pPr>
-            <a:r>
-              <a:rPr sz="1632" b="0" i="0">
-                <a:solidFill>
-                  <a:srgbClr val="E7F0F3"/>
-                </a:solidFill>
-                <a:latin typeface="Arial"/>
-              </a:rPr>
-              <a:t>+e_r (coordinate)</a:t>
-            </a:r>
-          </a:p>
-        </p:txBody>
-      </p:sp>
-      <p:sp>
-        <p:nvSpPr>
-          <p:cNvPr id="13" name="text12" descr="sci-ppt:C1-E30-012"/>
-          <p:cNvSpPr txBox="1"/>
-          <p:nvPr/>
-        </p:nvSpPr>
-        <p:spPr>
-          <a:xfrm>
-            <a:off x="1219200" y="4206240"/>
-            <a:ext cx="9753600" cy="340156"/>
-          </a:xfrm>
-          <a:prstGeom prst="rect">
-            <a:avLst/>
-          </a:prstGeom>
-          <a:noFill/>
-          <a:effectLst/>
-        </p:spPr>
-        <p:txBody>
-          <a:bodyPr wrap="none" lIns="27432" rIns="27432" tIns="18288" bIns="18288" anchor="ctr">
-            <a:spAutoFit/>
-          </a:bodyPr>
-          <a:lstStyle/>
-          <a:p>
-            <a:pPr algn="l">
-              <a:spcAft>
-                <a:spcPts val="0"/>
-              </a:spcAft>
-            </a:pPr>
-            <a:r>
-              <a:rPr sz="1728" b="0" i="0">
-                <a:solidFill>
-                  <a:srgbClr val="E7F0F3"/>
-                </a:solidFill>
-                <a:latin typeface="Arial"/>
-              </a:rPr>
-              <a:t>Signed wall speed: Ṙ; acceleration: R̈</a:t>
-            </a:r>
-          </a:p>
-        </p:txBody>
-      </p:sp>
-      <p:sp>
-        <p:nvSpPr>
-          <p:cNvPr id="14" name="text13" descr="sci-ppt:C1-E30-013"/>
-          <p:cNvSpPr txBox="1"/>
-          <p:nvPr/>
-        </p:nvSpPr>
-        <p:spPr>
-          <a:xfrm>
-            <a:off x="365760" y="4974336"/>
-            <a:ext cx="5547360" cy="321259"/>
-          </a:xfrm>
-          <a:prstGeom prst="rect">
-            <a:avLst/>
-          </a:prstGeom>
-          <a:noFill/>
-          <a:effectLst/>
-        </p:spPr>
-        <p:txBody>
-          <a:bodyPr wrap="none" lIns="27432" rIns="27432" tIns="18288" bIns="18288" anchor="ctr">
-            <a:spAutoFit/>
-          </a:bodyPr>
-          <a:lstStyle/>
-          <a:p>
-            <a:pPr algn="l">
-              <a:spcAft>
-                <a:spcPts val="0"/>
-              </a:spcAft>
-            </a:pPr>
-            <a:r>
-              <a:rPr sz="1632" b="0" i="0">
-                <a:solidFill>
-                  <a:srgbClr val="E7F0F3"/>
-                </a:solidFill>
-                <a:latin typeface="Arial"/>
-              </a:rPr>
-              <a:t>φΓ = −R Ṙ</a:t>
-            </a:r>
-          </a:p>
-        </p:txBody>
-      </p:sp>
-      <p:sp>
-        <p:nvSpPr>
-          <p:cNvPr id="15" name="text14" descr="sci-ppt:C1-E30-014"/>
-          <p:cNvSpPr txBox="1"/>
-          <p:nvPr/>
-        </p:nvSpPr>
-        <p:spPr>
-          <a:xfrm>
-            <a:off x="365760" y="5266944"/>
-            <a:ext cx="5547360" cy="321259"/>
-          </a:xfrm>
-          <a:prstGeom prst="rect">
-            <a:avLst/>
-          </a:prstGeom>
-          <a:noFill/>
-          <a:effectLst/>
-        </p:spPr>
-        <p:txBody>
-          <a:bodyPr wrap="none" lIns="27432" rIns="27432" tIns="18288" bIns="18288" anchor="ctr">
-            <a:spAutoFit/>
-          </a:bodyPr>
-          <a:lstStyle/>
-          <a:p>
-            <a:pPr algn="l">
-              <a:spcAft>
-                <a:spcPts val="0"/>
-              </a:spcAft>
-            </a:pPr>
-            <a:r>
-              <a:rPr sz="1632" b="0" i="0">
-                <a:solidFill>
-                  <a:srgbClr val="E7F0F3"/>
-                </a:solidFill>
-                <a:latin typeface="Arial"/>
-              </a:rPr>
-              <a:t>R</a:t>
-            </a:r>
-          </a:p>
-        </p:txBody>
-      </p:sp>
-      <p:sp>
-        <p:nvSpPr>
-          <p:cNvPr id="16" name="text15" descr="sci-ppt:C1-E30-015"/>
-          <p:cNvSpPr txBox="1"/>
-          <p:nvPr/>
-        </p:nvSpPr>
-        <p:spPr>
-          <a:xfrm>
-            <a:off x="365760" y="5559552"/>
-            <a:ext cx="5547360" cy="321259"/>
-          </a:xfrm>
-          <a:prstGeom prst="rect">
-            <a:avLst/>
-          </a:prstGeom>
-          <a:noFill/>
-          <a:effectLst/>
-        </p:spPr>
-        <p:txBody>
-          <a:bodyPr wrap="none" lIns="27432" rIns="27432" tIns="18288" bIns="18288" anchor="ctr">
-            <a:spAutoFit/>
-          </a:bodyPr>
-          <a:lstStyle/>
-          <a:p>
-            <a:pPr algn="l">
-              <a:spcAft>
-                <a:spcPts val="0"/>
-              </a:spcAft>
-            </a:pPr>
-            <a:r>
-              <a:rPr sz="1632" b="0" i="0">
-                <a:solidFill>
-                  <a:srgbClr val="E7F0F3"/>
-                </a:solidFill>
-                <a:latin typeface="Arial"/>
-              </a:rPr>
-              <a:t>R̈</a:t>
-            </a:r>
-          </a:p>
-        </p:txBody>
-      </p:sp>
-      <p:sp>
-        <p:nvSpPr>
-          <p:cNvPr id="17" name="text16" descr="sci-ppt:C1-E30-016"/>
-          <p:cNvSpPr txBox="1"/>
-          <p:nvPr/>
-        </p:nvSpPr>
-        <p:spPr>
-          <a:xfrm>
-            <a:off x="365760" y="5852160"/>
-            <a:ext cx="5547360" cy="321259"/>
-          </a:xfrm>
-          <a:prstGeom prst="rect">
-            <a:avLst/>
-          </a:prstGeom>
-          <a:noFill/>
-          <a:effectLst/>
-        </p:spPr>
-        <p:txBody>
-          <a:bodyPr wrap="none" lIns="27432" rIns="27432" tIns="18288" bIns="18288" anchor="ctr">
-            <a:spAutoFit/>
-          </a:bodyPr>
-          <a:lstStyle/>
-          <a:p>
-            <a:pPr algn="l">
-              <a:spcAft>
-                <a:spcPts val="0"/>
-              </a:spcAft>
-            </a:pPr>
-            <a:r>
-              <a:rPr sz="1632" b="0" i="0">
-                <a:solidFill>
-                  <a:srgbClr val="E7F0F3"/>
-                </a:solidFill>
-                <a:latin typeface="Arial"/>
-              </a:rPr>
-              <a:t>p∞</a:t>
-            </a:r>
-          </a:p>
-        </p:txBody>
-      </p:sp>
-      <p:sp>
-        <p:nvSpPr>
-          <p:cNvPr id="18" name="text17" descr="sci-ppt:C1-E30-017"/>
-          <p:cNvSpPr txBox="1"/>
-          <p:nvPr/>
-        </p:nvSpPr>
-        <p:spPr>
-          <a:xfrm>
-            <a:off x="365760" y="6144768"/>
-            <a:ext cx="5547360" cy="321259"/>
-          </a:xfrm>
-          <a:prstGeom prst="rect">
-            <a:avLst/>
-          </a:prstGeom>
-          <a:noFill/>
-          <a:effectLst/>
-        </p:spPr>
-        <p:txBody>
-          <a:bodyPr wrap="none" lIns="27432" rIns="27432" tIns="18288" bIns="18288" anchor="ctr">
-            <a:spAutoFit/>
-          </a:bodyPr>
-          <a:lstStyle/>
-          <a:p>
-            <a:pPr algn="l">
-              <a:spcAft>
-                <a:spcPts val="0"/>
-              </a:spcAft>
-            </a:pPr>
-            <a:r>
-              <a:rPr sz="1632" b="0" i="0">
-                <a:solidFill>
-                  <a:srgbClr val="E7F0F3"/>
-                </a:solidFill>
-                <a:latin typeface="Arial"/>
-              </a:rPr>
-              <a:t>ρ</a:t>
-            </a:r>
-          </a:p>
-        </p:txBody>
-      </p:sp>
-      <p:sp>
-        <p:nvSpPr>
-          <p:cNvPr id="19" name="text18" descr="sci-ppt:C1-E30-018"/>
-          <p:cNvSpPr txBox="1"/>
-          <p:nvPr/>
-        </p:nvSpPr>
-        <p:spPr>
-          <a:xfrm>
-            <a:off x="6156960" y="4974336"/>
-            <a:ext cx="5547360" cy="321259"/>
-          </a:xfrm>
-          <a:prstGeom prst="rect">
-            <a:avLst/>
-          </a:prstGeom>
-          <a:noFill/>
-          <a:effectLst/>
-        </p:spPr>
-        <p:txBody>
-          <a:bodyPr wrap="none" lIns="27432" rIns="27432" tIns="18288" bIns="18288" anchor="ctr">
-            <a:spAutoFit/>
-          </a:bodyPr>
-          <a:lstStyle/>
-          <a:p>
-            <a:pPr algn="l">
-              <a:spcAft>
-                <a:spcPts val="0"/>
-              </a:spcAft>
-            </a:pPr>
-            <a:r>
-              <a:rPr sz="1632" b="0" i="0">
-                <a:solidFill>
-                  <a:srgbClr val="E7F0F3"/>
-                </a:solidFill>
-                <a:latin typeface="Arial"/>
-              </a:rPr>
-              <a:t>κ = −2/R</a:t>
-            </a:r>
-          </a:p>
-        </p:txBody>
-      </p:sp>
-      <p:sp>
-        <p:nvSpPr>
-          <p:cNvPr id="20" name="text19" descr="sci-ppt:C1-E30-019"/>
-          <p:cNvSpPr txBox="1"/>
-          <p:nvPr/>
-        </p:nvSpPr>
-        <p:spPr>
-          <a:xfrm>
-            <a:off x="6156960" y="5266944"/>
-            <a:ext cx="5547360" cy="321259"/>
-          </a:xfrm>
-          <a:prstGeom prst="rect">
-            <a:avLst/>
-          </a:prstGeom>
-          <a:noFill/>
-          <a:effectLst/>
-        </p:spPr>
-        <p:txBody>
-          <a:bodyPr wrap="none" lIns="27432" rIns="27432" tIns="18288" bIns="18288" anchor="ctr">
-            <a:spAutoFit/>
-          </a:bodyPr>
-          <a:lstStyle/>
-          <a:p>
-            <a:pPr algn="l">
-              <a:spcAft>
-                <a:spcPts val="0"/>
-              </a:spcAft>
-            </a:pPr>
-            <a:r>
-              <a:rPr sz="1632" b="0" i="0">
-                <a:solidFill>
-                  <a:srgbClr val="E7F0F3"/>
-                </a:solidFill>
-                <a:latin typeface="Arial"/>
-              </a:rPr>
-              <a:t>Ṙ</a:t>
-            </a:r>
-          </a:p>
-        </p:txBody>
-      </p:sp>
-      <p:sp>
-        <p:nvSpPr>
-          <p:cNvPr id="21" name="text20" descr="sci-ppt:C1-E30-020"/>
-          <p:cNvSpPr txBox="1"/>
-          <p:nvPr/>
-        </p:nvSpPr>
-        <p:spPr>
-          <a:xfrm>
-            <a:off x="6156960" y="5559552"/>
-            <a:ext cx="5547360" cy="321259"/>
-          </a:xfrm>
-          <a:prstGeom prst="rect">
-            <a:avLst/>
-          </a:prstGeom>
-          <a:noFill/>
-          <a:effectLst/>
-        </p:spPr>
-        <p:txBody>
-          <a:bodyPr wrap="none" lIns="27432" rIns="27432" tIns="18288" bIns="18288" anchor="ctr">
-            <a:spAutoFit/>
-          </a:bodyPr>
-          <a:lstStyle/>
-          <a:p>
-            <a:pPr algn="l">
-              <a:spcAft>
-                <a:spcPts val="0"/>
-              </a:spcAft>
-            </a:pPr>
-            <a:r>
-              <a:rPr sz="1632" b="0" i="0">
-                <a:solidFill>
-                  <a:srgbClr val="E7F0F3"/>
-                </a:solidFill>
-                <a:latin typeface="Arial"/>
-              </a:rPr>
-              <a:t>pb</a:t>
-            </a:r>
-          </a:p>
-        </p:txBody>
-      </p:sp>
-      <p:sp>
-        <p:nvSpPr>
-          <p:cNvPr id="22" name="text21" descr="sci-ppt:C1-E30-021"/>
-          <p:cNvSpPr txBox="1"/>
-          <p:nvPr/>
-        </p:nvSpPr>
-        <p:spPr>
-          <a:xfrm>
-            <a:off x="6156960" y="5852160"/>
-            <a:ext cx="5547360" cy="321259"/>
-          </a:xfrm>
-          <a:prstGeom prst="rect">
-            <a:avLst/>
-          </a:prstGeom>
-          <a:noFill/>
-          <a:effectLst/>
-        </p:spPr>
-        <p:txBody>
-          <a:bodyPr wrap="none" lIns="27432" rIns="27432" tIns="18288" bIns="18288" anchor="ctr">
-            <a:spAutoFit/>
-          </a:bodyPr>
-          <a:lstStyle/>
-          <a:p>
-            <a:pPr algn="l">
-              <a:spcAft>
-                <a:spcPts val="0"/>
-              </a:spcAft>
-            </a:pPr>
-            <a:r>
-              <a:rPr sz="1632" b="0" i="0">
-                <a:solidFill>
-                  <a:srgbClr val="E7F0F3"/>
-                </a:solidFill>
-                <a:latin typeface="Arial"/>
-              </a:rPr>
-              <a:t>σ</a:t>
-            </a:r>
-          </a:p>
-        </p:txBody>
-      </p:sp>
-      <p:sp>
-        <p:nvSpPr>
-          <p:cNvPr id="23" name="text22" descr="sci-ppt:C1-E30-022"/>
-          <p:cNvSpPr txBox="1"/>
-          <p:nvPr/>
-        </p:nvSpPr>
-        <p:spPr>
-          <a:xfrm>
-            <a:off x="365760" y="6632448"/>
-            <a:ext cx="11277600" cy="302361"/>
-          </a:xfrm>
-          <a:prstGeom prst="rect">
-            <a:avLst/>
-          </a:prstGeom>
-          <a:noFill/>
-          <a:effectLst/>
-        </p:spPr>
-        <p:txBody>
-          <a:bodyPr wrap="none" lIns="27432" rIns="27432" tIns="18288" bIns="18288" anchor="ctr">
-            <a:spAutoFit/>
-          </a:bodyPr>
-          <a:lstStyle/>
-          <a:p>
-            <a:pPr algn="l">
-              <a:spcAft>
-                <a:spcPts val="0"/>
-              </a:spcAft>
-            </a:pPr>
-            <a:r>
-              <a:rPr sz="1536" b="0" i="0">
+              <a:rPr sz="1000" b="0" i="0">
                 <a:solidFill>
                   <a:srgbClr val="B4C7D2"/>
                 </a:solidFill>
                 <a:latin typeface="Arial"/>
               </a:rPr>
-              <a:t>Recover the same 3/2 coefficient from the material derivative</a:t>
+              <a:t>Inviscid Rayleigh–Plesset run: R₀ = 5 µm, p_g0 = 1 MPa, γ = 1.4, σ = 0.072 N/m.</a:t>
             </a:r>
           </a:p>
         </p:txBody>

--- a/assets/figures-editable/c1-c2/c1-e30.pptx
+++ b/assets/figures-editable/c1-c2/c1-e30.pptx
@@ -3131,20 +3131,840 @@
                 </a:solidFill>
                 <a:latin typeface="Arial"/>
               </a:rPr>
-              <a:t>C1-E30 · Exact spherical recovery of the potential closure</a:t>
+              <a:t>C1-E30 · Compressibility applicability diagnostics</a:t>
+            </a:r>
+          </a:p>
+        </p:txBody>
+      </p:sp>
+      <p:sp>
+        <p:nvSpPr>
+          <p:cNvPr id="3" name="C1-E30 text 1" descr="sci-ppt:o001"/>
+          <p:cNvSpPr txBox="1"/>
+          <p:nvPr/>
+        </p:nvSpPr>
+        <p:spPr>
+          <a:xfrm>
+            <a:off x="457200" y="914400"/>
+            <a:ext cx="5669280" cy="262636"/>
+          </a:xfrm>
+          <a:prstGeom prst="rect">
+            <a:avLst/>
+          </a:prstGeom>
+          <a:noFill/>
+          <a:effectLst/>
+        </p:spPr>
+        <p:txBody>
+          <a:bodyPr wrap="none" lIns="18288" rIns="18288" tIns="18288" bIns="18288" anchor="t">
+            <a:spAutoFit/>
+          </a:bodyPr>
+          <a:lstStyle/>
+          <a:p>
+            <a:pPr algn="l">
+              <a:spcAft>
+                <a:spcPts val="0"/>
+              </a:spcAft>
+            </a:pPr>
+            <a:r>
+              <a:rPr sz="1400" b="1" i="0">
+                <a:solidFill>
+                  <a:srgbClr val="8EDBD4"/>
+                </a:solidFill>
+                <a:latin typeface="Arial"/>
+              </a:rPr>
+              <a:t>A pressure pulse crossing a distance Lₑ</a:t>
+            </a:r>
+          </a:p>
+        </p:txBody>
+      </p:sp>
+      <p:sp>
+        <p:nvSpPr>
+          <p:cNvPr id="4" name="C1-E30 rect 2" descr="sci-ppt:o002"/>
+          <p:cNvSpPr/>
+          <p:nvPr/>
+        </p:nvSpPr>
+        <p:spPr>
+          <a:xfrm>
+            <a:off x="548640" y="2194560"/>
+            <a:ext cx="5120640" cy="502920"/>
+          </a:xfrm>
+          <a:prstGeom prst="rect">
+            <a:avLst/>
+          </a:prstGeom>
+          <a:solidFill>
+            <a:srgbClr val="1E4A5A"/>
+          </a:solidFill>
+          <a:ln w="15240">
+            <a:solidFill>
+              <a:srgbClr val="2B6678"/>
+            </a:solidFill>
+          </a:ln>
+          <a:effectLst/>
+        </p:spPr>
+        <p:txBody>
+          <a:bodyPr rtlCol="0" anchor="ctr"/>
+          <a:lstStyle/>
+          <a:p>
+            <a:pPr algn="ctr"/>
+          </a:p>
+        </p:txBody>
+      </p:sp>
+      <p:sp>
+        <p:nvSpPr>
+          <p:cNvPr id="5" name="C1-E30 text 3" descr="sci-ppt:o003"/>
+          <p:cNvSpPr txBox="1"/>
+          <p:nvPr/>
+        </p:nvSpPr>
+        <p:spPr>
+          <a:xfrm>
+            <a:off x="548640" y="1417319"/>
+            <a:ext cx="5120640" cy="239395"/>
+          </a:xfrm>
+          <a:prstGeom prst="rect">
+            <a:avLst/>
+          </a:prstGeom>
+          <a:noFill/>
+          <a:effectLst/>
+        </p:spPr>
+        <p:txBody>
+          <a:bodyPr wrap="none" lIns="18288" rIns="18288" tIns="18288" bIns="18288" anchor="t">
+            <a:spAutoFit/>
+          </a:bodyPr>
+          <a:lstStyle/>
+          <a:p>
+            <a:pPr algn="l">
+              <a:spcAft>
+                <a:spcPts val="0"/>
+              </a:spcAft>
+            </a:pPr>
+            <a:r>
+              <a:rPr sz="1250" b="1" i="0">
+                <a:solidFill>
+                  <a:srgbClr val="8EDBD4"/>
+                </a:solidFill>
+                <a:latin typeface="Arial"/>
+              </a:rPr>
+              <a:t>slow rise: τₑ ≫ Lₑ/c</a:t>
+            </a:r>
+          </a:p>
+        </p:txBody>
+      </p:sp>
+      <p:sp>
+        <p:nvSpPr>
+          <p:cNvPr id="6" name="C1-E30 polygon 4" descr="sci-ppt:o004"/>
+          <p:cNvSpPr/>
+          <p:nvPr/>
+        </p:nvSpPr>
+        <p:spPr>
+          <a:xfrm>
+            <a:off x="548640" y="2087051"/>
+            <a:ext cx="5120640" cy="419841"/>
+          </a:xfrm>
+          <a:custGeom>
+            <a:avLst/>
+            <a:gdLst/>
+            <a:ahLst/>
+            <a:cxnLst/>
+            <a:rect l="l" t="t" r="r" b="b"/>
+            <a:pathLst>
+              <a:path w="5120640" h="419841">
+                <a:moveTo>
+                  <a:pt x="0" y="0"/>
+                </a:moveTo>
+                <a:lnTo>
+                  <a:pt x="64818" y="4051"/>
+                </a:lnTo>
+                <a:lnTo>
+                  <a:pt x="129636" y="8172"/>
+                </a:lnTo>
+                <a:lnTo>
+                  <a:pt x="194454" y="12363"/>
+                </a:lnTo>
+                <a:lnTo>
+                  <a:pt x="259272" y="16624"/>
+                </a:lnTo>
+                <a:lnTo>
+                  <a:pt x="324091" y="20955"/>
+                </a:lnTo>
+                <a:lnTo>
+                  <a:pt x="388909" y="25355"/>
+                </a:lnTo>
+                <a:lnTo>
+                  <a:pt x="453727" y="29823"/>
+                </a:lnTo>
+                <a:lnTo>
+                  <a:pt x="518545" y="34360"/>
+                </a:lnTo>
+                <a:lnTo>
+                  <a:pt x="583364" y="38964"/>
+                </a:lnTo>
+                <a:lnTo>
+                  <a:pt x="648182" y="43635"/>
+                </a:lnTo>
+                <a:lnTo>
+                  <a:pt x="713000" y="48372"/>
+                </a:lnTo>
+                <a:lnTo>
+                  <a:pt x="777818" y="53175"/>
+                </a:lnTo>
+                <a:lnTo>
+                  <a:pt x="842636" y="58041"/>
+                </a:lnTo>
+                <a:lnTo>
+                  <a:pt x="907455" y="62971"/>
+                </a:lnTo>
+                <a:lnTo>
+                  <a:pt x="972273" y="67964"/>
+                </a:lnTo>
+                <a:lnTo>
+                  <a:pt x="1037091" y="73017"/>
+                </a:lnTo>
+                <a:lnTo>
+                  <a:pt x="1101909" y="78129"/>
+                </a:lnTo>
+                <a:lnTo>
+                  <a:pt x="1166728" y="83300"/>
+                </a:lnTo>
+                <a:lnTo>
+                  <a:pt x="1231546" y="88528"/>
+                </a:lnTo>
+                <a:lnTo>
+                  <a:pt x="1296364" y="93811"/>
+                </a:lnTo>
+                <a:lnTo>
+                  <a:pt x="1361182" y="99148"/>
+                </a:lnTo>
+                <a:lnTo>
+                  <a:pt x="1426001" y="104536"/>
+                </a:lnTo>
+                <a:lnTo>
+                  <a:pt x="1490819" y="109975"/>
+                </a:lnTo>
+                <a:lnTo>
+                  <a:pt x="1555637" y="115462"/>
+                </a:lnTo>
+                <a:lnTo>
+                  <a:pt x="1620455" y="120995"/>
+                </a:lnTo>
+                <a:lnTo>
+                  <a:pt x="1685273" y="126572"/>
+                </a:lnTo>
+                <a:lnTo>
+                  <a:pt x="1750092" y="132191"/>
+                </a:lnTo>
+                <a:lnTo>
+                  <a:pt x="1814910" y="137850"/>
+                </a:lnTo>
+                <a:lnTo>
+                  <a:pt x="1879728" y="143547"/>
+                </a:lnTo>
+                <a:lnTo>
+                  <a:pt x="1944546" y="149279"/>
+                </a:lnTo>
+                <a:lnTo>
+                  <a:pt x="2009365" y="155044"/>
+                </a:lnTo>
+                <a:lnTo>
+                  <a:pt x="2074183" y="160839"/>
+                </a:lnTo>
+                <a:lnTo>
+                  <a:pt x="2139001" y="166662"/>
+                </a:lnTo>
+                <a:lnTo>
+                  <a:pt x="2203819" y="172511"/>
+                </a:lnTo>
+                <a:lnTo>
+                  <a:pt x="2268637" y="178382"/>
+                </a:lnTo>
+                <a:lnTo>
+                  <a:pt x="2333456" y="184274"/>
+                </a:lnTo>
+                <a:lnTo>
+                  <a:pt x="2398274" y="190183"/>
+                </a:lnTo>
+                <a:lnTo>
+                  <a:pt x="2463092" y="196106"/>
+                </a:lnTo>
+                <a:lnTo>
+                  <a:pt x="2527910" y="202042"/>
+                </a:lnTo>
+                <a:lnTo>
+                  <a:pt x="2592729" y="207987"/>
+                </a:lnTo>
+                <a:lnTo>
+                  <a:pt x="2657547" y="213939"/>
+                </a:lnTo>
+                <a:lnTo>
+                  <a:pt x="2722365" y="219894"/>
+                </a:lnTo>
+                <a:lnTo>
+                  <a:pt x="2787183" y="225850"/>
+                </a:lnTo>
+                <a:lnTo>
+                  <a:pt x="2852002" y="231804"/>
+                </a:lnTo>
+                <a:lnTo>
+                  <a:pt x="2916820" y="237754"/>
+                </a:lnTo>
+                <a:lnTo>
+                  <a:pt x="2981638" y="243696"/>
+                </a:lnTo>
+                <a:lnTo>
+                  <a:pt x="3046456" y="249628"/>
+                </a:lnTo>
+                <a:lnTo>
+                  <a:pt x="3111274" y="255546"/>
+                </a:lnTo>
+                <a:lnTo>
+                  <a:pt x="3176093" y="261450"/>
+                </a:lnTo>
+                <a:lnTo>
+                  <a:pt x="3240911" y="267334"/>
+                </a:lnTo>
+                <a:lnTo>
+                  <a:pt x="3305729" y="273198"/>
+                </a:lnTo>
+                <a:lnTo>
+                  <a:pt x="3370547" y="279038"/>
+                </a:lnTo>
+                <a:lnTo>
+                  <a:pt x="3435366" y="284851"/>
+                </a:lnTo>
+                <a:lnTo>
+                  <a:pt x="3500184" y="290636"/>
+                </a:lnTo>
+                <a:lnTo>
+                  <a:pt x="3565002" y="296389"/>
+                </a:lnTo>
+                <a:lnTo>
+                  <a:pt x="3629820" y="302109"/>
+                </a:lnTo>
+                <a:lnTo>
+                  <a:pt x="3694638" y="307792"/>
+                </a:lnTo>
+                <a:lnTo>
+                  <a:pt x="3759457" y="313437"/>
+                </a:lnTo>
+                <a:lnTo>
+                  <a:pt x="3824275" y="319042"/>
+                </a:lnTo>
+                <a:lnTo>
+                  <a:pt x="3889093" y="324603"/>
+                </a:lnTo>
+                <a:lnTo>
+                  <a:pt x="3953911" y="330120"/>
+                </a:lnTo>
+                <a:lnTo>
+                  <a:pt x="4018730" y="335590"/>
+                </a:lnTo>
+                <a:lnTo>
+                  <a:pt x="4083548" y="341011"/>
+                </a:lnTo>
+                <a:lnTo>
+                  <a:pt x="4148366" y="346381"/>
+                </a:lnTo>
+                <a:lnTo>
+                  <a:pt x="4213184" y="351699"/>
+                </a:lnTo>
+                <a:lnTo>
+                  <a:pt x="4278003" y="356962"/>
+                </a:lnTo>
+                <a:lnTo>
+                  <a:pt x="4342821" y="362170"/>
+                </a:lnTo>
+                <a:lnTo>
+                  <a:pt x="4407639" y="367320"/>
+                </a:lnTo>
+                <a:lnTo>
+                  <a:pt x="4472457" y="372412"/>
+                </a:lnTo>
+                <a:lnTo>
+                  <a:pt x="4537275" y="377443"/>
+                </a:lnTo>
+                <a:lnTo>
+                  <a:pt x="4602094" y="382414"/>
+                </a:lnTo>
+                <a:lnTo>
+                  <a:pt x="4666912" y="387321"/>
+                </a:lnTo>
+                <a:lnTo>
+                  <a:pt x="4731730" y="392165"/>
+                </a:lnTo>
+                <a:lnTo>
+                  <a:pt x="4796548" y="396944"/>
+                </a:lnTo>
+                <a:lnTo>
+                  <a:pt x="4861367" y="401658"/>
+                </a:lnTo>
+                <a:lnTo>
+                  <a:pt x="4926185" y="406305"/>
+                </a:lnTo>
+                <a:lnTo>
+                  <a:pt x="4991003" y="410885"/>
+                </a:lnTo>
+                <a:lnTo>
+                  <a:pt x="5055821" y="415397"/>
+                </a:lnTo>
+                <a:lnTo>
+                  <a:pt x="5120640" y="419841"/>
+                </a:lnTo>
+              </a:path>
+            </a:pathLst>
+          </a:custGeom>
+          <a:noFill/>
+          <a:ln w="38100">
+            <a:solidFill>
+              <a:srgbClr val="8EDBD4"/>
+            </a:solidFill>
+          </a:ln>
+          <a:effectLst/>
+        </p:spPr>
+        <p:txBody>
+          <a:bodyPr rtlCol="0" anchor="ctr"/>
+          <a:lstStyle/>
+          <a:p>
+            <a:pPr algn="ctr"/>
+          </a:p>
+        </p:txBody>
+      </p:sp>
+      <p:sp>
+        <p:nvSpPr>
+          <p:cNvPr id="7" name="C1-E30 text 5" descr="sci-ppt:o005"/>
+          <p:cNvSpPr txBox="1"/>
+          <p:nvPr/>
+        </p:nvSpPr>
+        <p:spPr>
+          <a:xfrm>
+            <a:off x="548640" y="2752344"/>
+            <a:ext cx="5120640" cy="208407"/>
+          </a:xfrm>
+          <a:prstGeom prst="rect">
+            <a:avLst/>
+          </a:prstGeom>
+          <a:noFill/>
+          <a:effectLst/>
+        </p:spPr>
+        <p:txBody>
+          <a:bodyPr wrap="none" lIns="18288" rIns="18288" tIns="18288" bIns="18288" anchor="t">
+            <a:spAutoFit/>
+          </a:bodyPr>
+          <a:lstStyle/>
+          <a:p>
+            <a:pPr algn="l">
+              <a:spcAft>
+                <a:spcPts val="0"/>
+              </a:spcAft>
+            </a:pPr>
+            <a:r>
+              <a:rPr sz="1050" b="0" i="0">
+                <a:solidFill>
+                  <a:srgbClr val="B4C7D2"/>
+                </a:solidFill>
+                <a:latin typeface="Arial"/>
+              </a:rPr>
+              <a:t>pressure along the column at one instant</a:t>
+            </a:r>
+          </a:p>
+        </p:txBody>
+      </p:sp>
+      <p:sp>
+        <p:nvSpPr>
+          <p:cNvPr id="8" name="C1-E30 rect 6" descr="sci-ppt:o006"/>
+          <p:cNvSpPr/>
+          <p:nvPr/>
+        </p:nvSpPr>
+        <p:spPr>
+          <a:xfrm>
+            <a:off x="548640" y="4114800"/>
+            <a:ext cx="5120640" cy="502920"/>
+          </a:xfrm>
+          <a:prstGeom prst="rect">
+            <a:avLst/>
+          </a:prstGeom>
+          <a:solidFill>
+            <a:srgbClr val="1E4A5A"/>
+          </a:solidFill>
+          <a:ln w="15240">
+            <a:solidFill>
+              <a:srgbClr val="2B6678"/>
+            </a:solidFill>
+          </a:ln>
+          <a:effectLst/>
+        </p:spPr>
+        <p:txBody>
+          <a:bodyPr rtlCol="0" anchor="ctr"/>
+          <a:lstStyle/>
+          <a:p>
+            <a:pPr algn="ctr"/>
+          </a:p>
+        </p:txBody>
+      </p:sp>
+      <p:sp>
+        <p:nvSpPr>
+          <p:cNvPr id="9" name="C1-E30 text 7" descr="sci-ppt:o007"/>
+          <p:cNvSpPr txBox="1"/>
+          <p:nvPr/>
+        </p:nvSpPr>
+        <p:spPr>
+          <a:xfrm>
+            <a:off x="548640" y="3337560"/>
+            <a:ext cx="5120640" cy="239395"/>
+          </a:xfrm>
+          <a:prstGeom prst="rect">
+            <a:avLst/>
+          </a:prstGeom>
+          <a:noFill/>
+          <a:effectLst/>
+        </p:spPr>
+        <p:txBody>
+          <a:bodyPr wrap="none" lIns="18288" rIns="18288" tIns="18288" bIns="18288" anchor="t">
+            <a:spAutoFit/>
+          </a:bodyPr>
+          <a:lstStyle/>
+          <a:p>
+            <a:pPr algn="l">
+              <a:spcAft>
+                <a:spcPts val="0"/>
+              </a:spcAft>
+            </a:pPr>
+            <a:r>
+              <a:rPr sz="1250" b="1" i="0">
+                <a:solidFill>
+                  <a:srgbClr val="F28BA0"/>
+                </a:solidFill>
+                <a:latin typeface="Arial"/>
+              </a:rPr>
+              <a:t>fast rise: τₑ ≪ Lₑ/c</a:t>
+            </a:r>
+          </a:p>
+        </p:txBody>
+      </p:sp>
+      <p:sp>
+        <p:nvSpPr>
+          <p:cNvPr id="10" name="C1-E30 polygon 8" descr="sci-ppt:o008"/>
+          <p:cNvSpPr/>
+          <p:nvPr/>
+        </p:nvSpPr>
+        <p:spPr>
+          <a:xfrm>
+            <a:off x="548640" y="3840565"/>
+            <a:ext cx="5120640" cy="776866"/>
+          </a:xfrm>
+          <a:custGeom>
+            <a:avLst/>
+            <a:gdLst/>
+            <a:ahLst/>
+            <a:cxnLst/>
+            <a:rect l="l" t="t" r="r" b="b"/>
+            <a:pathLst>
+              <a:path w="5120640" h="776866">
+                <a:moveTo>
+                  <a:pt x="0" y="0"/>
+                </a:moveTo>
+                <a:lnTo>
+                  <a:pt x="64818" y="21"/>
+                </a:lnTo>
+                <a:lnTo>
+                  <a:pt x="129636" y="46"/>
+                </a:lnTo>
+                <a:lnTo>
+                  <a:pt x="194454" y="78"/>
+                </a:lnTo>
+                <a:lnTo>
+                  <a:pt x="259272" y="117"/>
+                </a:lnTo>
+                <a:lnTo>
+                  <a:pt x="324091" y="166"/>
+                </a:lnTo>
+                <a:lnTo>
+                  <a:pt x="388909" y="226"/>
+                </a:lnTo>
+                <a:lnTo>
+                  <a:pt x="453727" y="301"/>
+                </a:lnTo>
+                <a:lnTo>
+                  <a:pt x="518545" y="394"/>
+                </a:lnTo>
+                <a:lnTo>
+                  <a:pt x="583364" y="509"/>
+                </a:lnTo>
+                <a:lnTo>
+                  <a:pt x="648182" y="651"/>
+                </a:lnTo>
+                <a:lnTo>
+                  <a:pt x="713000" y="828"/>
+                </a:lnTo>
+                <a:lnTo>
+                  <a:pt x="777818" y="1047"/>
+                </a:lnTo>
+                <a:lnTo>
+                  <a:pt x="842636" y="1319"/>
+                </a:lnTo>
+                <a:lnTo>
+                  <a:pt x="907455" y="1656"/>
+                </a:lnTo>
+                <a:lnTo>
+                  <a:pt x="972273" y="2073"/>
+                </a:lnTo>
+                <a:lnTo>
+                  <a:pt x="1037091" y="2590"/>
+                </a:lnTo>
+                <a:lnTo>
+                  <a:pt x="1101909" y="3230"/>
+                </a:lnTo>
+                <a:lnTo>
+                  <a:pt x="1166728" y="4022"/>
+                </a:lnTo>
+                <a:lnTo>
+                  <a:pt x="1231546" y="5003"/>
+                </a:lnTo>
+                <a:lnTo>
+                  <a:pt x="1296364" y="6215"/>
+                </a:lnTo>
+                <a:lnTo>
+                  <a:pt x="1361182" y="7714"/>
+                </a:lnTo>
+                <a:lnTo>
+                  <a:pt x="1426001" y="9565"/>
+                </a:lnTo>
+                <a:lnTo>
+                  <a:pt x="1490819" y="11849"/>
+                </a:lnTo>
+                <a:lnTo>
+                  <a:pt x="1555637" y="14662"/>
+                </a:lnTo>
+                <a:lnTo>
+                  <a:pt x="1620455" y="18123"/>
+                </a:lnTo>
+                <a:lnTo>
+                  <a:pt x="1685273" y="22372"/>
+                </a:lnTo>
+                <a:lnTo>
+                  <a:pt x="1750092" y="27576"/>
+                </a:lnTo>
+                <a:lnTo>
+                  <a:pt x="1814910" y="33932"/>
+                </a:lnTo>
+                <a:lnTo>
+                  <a:pt x="1879728" y="41667"/>
+                </a:lnTo>
+                <a:lnTo>
+                  <a:pt x="1944546" y="51040"/>
+                </a:lnTo>
+                <a:lnTo>
+                  <a:pt x="2009365" y="62339"/>
+                </a:lnTo>
+                <a:lnTo>
+                  <a:pt x="2074183" y="75873"/>
+                </a:lnTo>
+                <a:lnTo>
+                  <a:pt x="2139001" y="91964"/>
+                </a:lnTo>
+                <a:lnTo>
+                  <a:pt x="2203819" y="110924"/>
+                </a:lnTo>
+                <a:lnTo>
+                  <a:pt x="2268637" y="133030"/>
+                </a:lnTo>
+                <a:lnTo>
+                  <a:pt x="2333456" y="158492"/>
+                </a:lnTo>
+                <a:lnTo>
+                  <a:pt x="2398274" y="187405"/>
+                </a:lnTo>
+                <a:lnTo>
+                  <a:pt x="2463092" y="219717"/>
+                </a:lnTo>
+                <a:lnTo>
+                  <a:pt x="2527910" y="255188"/>
+                </a:lnTo>
+                <a:lnTo>
+                  <a:pt x="2592729" y="293369"/>
+                </a:lnTo>
+                <a:lnTo>
+                  <a:pt x="2657547" y="333610"/>
+                </a:lnTo>
+                <a:lnTo>
+                  <a:pt x="2722365" y="375090"/>
+                </a:lnTo>
+                <a:lnTo>
+                  <a:pt x="2787183" y="416879"/>
+                </a:lnTo>
+                <a:lnTo>
+                  <a:pt x="2852002" y="458019"/>
+                </a:lnTo>
+                <a:lnTo>
+                  <a:pt x="2916820" y="497611"/>
+                </a:lnTo>
+                <a:lnTo>
+                  <a:pt x="2981638" y="534888"/>
+                </a:lnTo>
+                <a:lnTo>
+                  <a:pt x="3046456" y="569271"/>
+                </a:lnTo>
+                <a:lnTo>
+                  <a:pt x="3111274" y="600387"/>
+                </a:lnTo>
+                <a:lnTo>
+                  <a:pt x="3176093" y="628065"/>
+                </a:lnTo>
+                <a:lnTo>
+                  <a:pt x="3240911" y="652310"/>
+                </a:lnTo>
+                <a:lnTo>
+                  <a:pt x="3305729" y="673264"/>
+                </a:lnTo>
+                <a:lnTo>
+                  <a:pt x="3370547" y="691165"/>
+                </a:lnTo>
+                <a:lnTo>
+                  <a:pt x="3435366" y="706306"/>
+                </a:lnTo>
+                <a:lnTo>
+                  <a:pt x="3500184" y="719006"/>
+                </a:lnTo>
+                <a:lnTo>
+                  <a:pt x="3565002" y="729582"/>
+                </a:lnTo>
+                <a:lnTo>
+                  <a:pt x="3629820" y="738338"/>
+                </a:lnTo>
+                <a:lnTo>
+                  <a:pt x="3694638" y="745553"/>
+                </a:lnTo>
+                <a:lnTo>
+                  <a:pt x="3759457" y="751473"/>
+                </a:lnTo>
+                <a:lnTo>
+                  <a:pt x="3824275" y="756315"/>
+                </a:lnTo>
+                <a:lnTo>
+                  <a:pt x="3889093" y="760265"/>
+                </a:lnTo>
+                <a:lnTo>
+                  <a:pt x="3953911" y="763480"/>
+                </a:lnTo>
+                <a:lnTo>
+                  <a:pt x="4018730" y="766091"/>
+                </a:lnTo>
+                <a:lnTo>
+                  <a:pt x="4083548" y="768210"/>
+                </a:lnTo>
+                <a:lnTo>
+                  <a:pt x="4148366" y="769927"/>
+                </a:lnTo>
+                <a:lnTo>
+                  <a:pt x="4213184" y="771317"/>
+                </a:lnTo>
+                <a:lnTo>
+                  <a:pt x="4278003" y="772441"/>
+                </a:lnTo>
+                <a:lnTo>
+                  <a:pt x="4342821" y="773350"/>
+                </a:lnTo>
+                <a:lnTo>
+                  <a:pt x="4407639" y="774084"/>
+                </a:lnTo>
+                <a:lnTo>
+                  <a:pt x="4472457" y="774677"/>
+                </a:lnTo>
+                <a:lnTo>
+                  <a:pt x="4537275" y="775156"/>
+                </a:lnTo>
+                <a:lnTo>
+                  <a:pt x="4602094" y="775542"/>
+                </a:lnTo>
+                <a:lnTo>
+                  <a:pt x="4666912" y="775854"/>
+                </a:lnTo>
+                <a:lnTo>
+                  <a:pt x="4731730" y="776106"/>
+                </a:lnTo>
+                <a:lnTo>
+                  <a:pt x="4796548" y="776309"/>
+                </a:lnTo>
+                <a:lnTo>
+                  <a:pt x="4861367" y="776472"/>
+                </a:lnTo>
+                <a:lnTo>
+                  <a:pt x="4926185" y="776604"/>
+                </a:lnTo>
+                <a:lnTo>
+                  <a:pt x="4991003" y="776711"/>
+                </a:lnTo>
+                <a:lnTo>
+                  <a:pt x="5055821" y="776797"/>
+                </a:lnTo>
+                <a:lnTo>
+                  <a:pt x="5120640" y="776866"/>
+                </a:lnTo>
+              </a:path>
+            </a:pathLst>
+          </a:custGeom>
+          <a:noFill/>
+          <a:ln w="38100">
+            <a:solidFill>
+              <a:srgbClr val="F28BA0"/>
+            </a:solidFill>
+          </a:ln>
+          <a:effectLst/>
+        </p:spPr>
+        <p:txBody>
+          <a:bodyPr rtlCol="0" anchor="ctr"/>
+          <a:lstStyle/>
+          <a:p>
+            <a:pPr algn="ctr"/>
+          </a:p>
+        </p:txBody>
+      </p:sp>
+      <p:sp>
+        <p:nvSpPr>
+          <p:cNvPr id="11" name="C1-E30 text 9" descr="sci-ppt:o009"/>
+          <p:cNvSpPr txBox="1"/>
+          <p:nvPr/>
+        </p:nvSpPr>
+        <p:spPr>
+          <a:xfrm>
+            <a:off x="548640" y="4672584"/>
+            <a:ext cx="5120640" cy="208407"/>
+          </a:xfrm>
+          <a:prstGeom prst="rect">
+            <a:avLst/>
+          </a:prstGeom>
+          <a:noFill/>
+          <a:effectLst/>
+        </p:spPr>
+        <p:txBody>
+          <a:bodyPr wrap="none" lIns="18288" rIns="18288" tIns="18288" bIns="18288" anchor="t">
+            <a:spAutoFit/>
+          </a:bodyPr>
+          <a:lstStyle/>
+          <a:p>
+            <a:pPr algn="l">
+              <a:spcAft>
+                <a:spcPts val="0"/>
+              </a:spcAft>
+            </a:pPr>
+            <a:r>
+              <a:rPr sz="1050" b="0" i="0">
+                <a:solidFill>
+                  <a:srgbClr val="B4C7D2"/>
+                </a:solidFill>
+                <a:latin typeface="Arial"/>
+              </a:rPr>
+              <a:t>pressure along the column at one instant</a:t>
             </a:r>
           </a:p>
         </p:txBody>
       </p:sp>
       <p:cxnSp>
         <p:nvCxnSpPr>
-          <p:cNvPr id="3" name="C1-E30 line 1" descr="sci-ppt:o001"/>
+          <p:cNvPr id="12" name="C1-E30 line 10" descr="sci-ppt:o010"/>
           <p:cNvCxnSpPr/>
           <p:nvPr/>
         </p:nvCxnSpPr>
         <p:spPr>
           <a:xfrm>
-            <a:off x="6858000" y="4937760"/>
+            <a:off x="6858000" y="4709160"/>
             <a:ext cx="4937760" cy="0"/>
           </a:xfrm>
           <a:prstGeom prst="line">
@@ -3160,14 +3980,14 @@
       </p:cxnSp>
       <p:cxnSp>
         <p:nvCxnSpPr>
-          <p:cNvPr id="4" name="C1-E30 line 2" descr="sci-ppt:o002"/>
+          <p:cNvPr id="13" name="C1-E30 line 11" descr="sci-ppt:o011"/>
           <p:cNvCxnSpPr/>
           <p:nvPr/>
         </p:nvCxnSpPr>
         <p:spPr>
           <a:xfrm>
-            <a:off x="6858000" y="1371600"/>
-            <a:ext cx="0" cy="3566160"/>
+            <a:off x="6858000" y="1417320"/>
+            <a:ext cx="0" cy="3291840"/>
           </a:xfrm>
           <a:prstGeom prst="line">
             <a:avLst/>
@@ -3182,13 +4002,13 @@
       </p:cxnSp>
       <p:cxnSp>
         <p:nvCxnSpPr>
-          <p:cNvPr id="5" name="C1-E30 line 3" descr="sci-ppt:o003"/>
+          <p:cNvPr id="14" name="C1-E30 line 12" descr="sci-ppt:o012"/>
           <p:cNvCxnSpPr/>
           <p:nvPr/>
         </p:nvCxnSpPr>
         <p:spPr>
           <a:xfrm>
-            <a:off x="6858000" y="4937760"/>
+            <a:off x="6858000" y="4709160"/>
             <a:ext cx="0" cy="64008"/>
           </a:xfrm>
           <a:prstGeom prst="line">
@@ -3204,14 +4024,14 @@
       </p:cxnSp>
       <p:cxnSp>
         <p:nvCxnSpPr>
-          <p:cNvPr id="6" name="C1-E30 line 4" descr="sci-ppt:o004"/>
+          <p:cNvPr id="15" name="C1-E30 line 13" descr="sci-ppt:o013"/>
           <p:cNvCxnSpPr/>
           <p:nvPr/>
         </p:nvCxnSpPr>
         <p:spPr>
           <a:xfrm>
-            <a:off x="6858000" y="1371600"/>
-            <a:ext cx="0" cy="3566160"/>
+            <a:off x="6858000" y="1417320"/>
+            <a:ext cx="0" cy="3291840"/>
           </a:xfrm>
           <a:prstGeom prst="line">
             <a:avLst/>
@@ -3226,13 +4046,13 @@
       </p:cxnSp>
       <p:sp>
         <p:nvSpPr>
-          <p:cNvPr id="7" name="C1-E30 text 5" descr="sci-ppt:o005"/>
+          <p:cNvPr id="16" name="C1-E30 text 14" descr="sci-ppt:o014"/>
           <p:cNvSpPr txBox="1"/>
           <p:nvPr/>
         </p:nvSpPr>
         <p:spPr>
           <a:xfrm>
-            <a:off x="6400800" y="5020056"/>
+            <a:off x="6400800" y="4791456"/>
             <a:ext cx="914400" cy="208407"/>
           </a:xfrm>
           <a:prstGeom prst="rect">
@@ -3259,20 +4079,20 @@
                 </a:solidFill>
                 <a:latin typeface="Arial"/>
               </a:rPr>
-              <a:t>0.0</a:t>
+              <a:t>1e-05</a:t>
             </a:r>
           </a:p>
         </p:txBody>
       </p:sp>
       <p:cxnSp>
         <p:nvCxnSpPr>
-          <p:cNvPr id="8" name="C1-E30 line 6" descr="sci-ppt:o006"/>
+          <p:cNvPr id="17" name="C1-E30 line 15" descr="sci-ppt:o015"/>
           <p:cNvCxnSpPr/>
           <p:nvPr/>
         </p:nvCxnSpPr>
         <p:spPr>
           <a:xfrm>
-            <a:off x="8503920" y="4937760"/>
+            <a:off x="8503920" y="4709160"/>
             <a:ext cx="0" cy="64008"/>
           </a:xfrm>
           <a:prstGeom prst="line">
@@ -3288,14 +4108,14 @@
       </p:cxnSp>
       <p:cxnSp>
         <p:nvCxnSpPr>
-          <p:cNvPr id="9" name="C1-E30 line 7" descr="sci-ppt:o007"/>
+          <p:cNvPr id="18" name="C1-E30 line 16" descr="sci-ppt:o016"/>
           <p:cNvCxnSpPr/>
           <p:nvPr/>
         </p:nvCxnSpPr>
         <p:spPr>
           <a:xfrm>
-            <a:off x="8503920" y="1371600"/>
-            <a:ext cx="0" cy="3566160"/>
+            <a:off x="8503920" y="1417320"/>
+            <a:ext cx="0" cy="3291840"/>
           </a:xfrm>
           <a:prstGeom prst="line">
             <a:avLst/>
@@ -3310,13 +4130,13 @@
       </p:cxnSp>
       <p:sp>
         <p:nvSpPr>
-          <p:cNvPr id="10" name="C1-E30 text 8" descr="sci-ppt:o008"/>
+          <p:cNvPr id="19" name="C1-E30 text 17" descr="sci-ppt:o017"/>
           <p:cNvSpPr txBox="1"/>
           <p:nvPr/>
         </p:nvSpPr>
         <p:spPr>
           <a:xfrm>
-            <a:off x="8046720" y="5020056"/>
+            <a:off x="8046720" y="4791456"/>
             <a:ext cx="914400" cy="208407"/>
           </a:xfrm>
           <a:prstGeom prst="rect">
@@ -3343,20 +4163,20 @@
                 </a:solidFill>
                 <a:latin typeface="Arial"/>
               </a:rPr>
-              <a:t>0.5</a:t>
+              <a:t>1e-04</a:t>
             </a:r>
           </a:p>
         </p:txBody>
       </p:sp>
       <p:cxnSp>
         <p:nvCxnSpPr>
-          <p:cNvPr id="11" name="C1-E30 line 9" descr="sci-ppt:o009"/>
+          <p:cNvPr id="20" name="C1-E30 line 18" descr="sci-ppt:o018"/>
           <p:cNvCxnSpPr/>
           <p:nvPr/>
         </p:nvCxnSpPr>
         <p:spPr>
           <a:xfrm>
-            <a:off x="10149840" y="4937760"/>
+            <a:off x="10149840" y="4709160"/>
             <a:ext cx="0" cy="64008"/>
           </a:xfrm>
           <a:prstGeom prst="line">
@@ -3372,14 +4192,14 @@
       </p:cxnSp>
       <p:cxnSp>
         <p:nvCxnSpPr>
-          <p:cNvPr id="12" name="C1-E30 line 10" descr="sci-ppt:o010"/>
+          <p:cNvPr id="21" name="C1-E30 line 19" descr="sci-ppt:o019"/>
           <p:cNvCxnSpPr/>
           <p:nvPr/>
         </p:nvCxnSpPr>
         <p:spPr>
           <a:xfrm>
-            <a:off x="10149840" y="1371600"/>
-            <a:ext cx="0" cy="3566160"/>
+            <a:off x="10149840" y="1417320"/>
+            <a:ext cx="0" cy="3291840"/>
           </a:xfrm>
           <a:prstGeom prst="line">
             <a:avLst/>
@@ -3394,13 +4214,13 @@
       </p:cxnSp>
       <p:sp>
         <p:nvSpPr>
-          <p:cNvPr id="13" name="C1-E30 text 11" descr="sci-ppt:o011"/>
+          <p:cNvPr id="22" name="C1-E30 text 20" descr="sci-ppt:o020"/>
           <p:cNvSpPr txBox="1"/>
           <p:nvPr/>
         </p:nvSpPr>
         <p:spPr>
           <a:xfrm>
-            <a:off x="9692640" y="5020056"/>
+            <a:off x="9692640" y="4791456"/>
             <a:ext cx="914400" cy="208407"/>
           </a:xfrm>
           <a:prstGeom prst="rect">
@@ -3427,20 +4247,20 @@
                 </a:solidFill>
                 <a:latin typeface="Arial"/>
               </a:rPr>
-              <a:t>1.0</a:t>
+              <a:t>1e-03</a:t>
             </a:r>
           </a:p>
         </p:txBody>
       </p:sp>
       <p:cxnSp>
         <p:nvCxnSpPr>
-          <p:cNvPr id="14" name="C1-E30 line 12" descr="sci-ppt:o012"/>
+          <p:cNvPr id="23" name="C1-E30 line 21" descr="sci-ppt:o021"/>
           <p:cNvCxnSpPr/>
           <p:nvPr/>
         </p:nvCxnSpPr>
         <p:spPr>
           <a:xfrm>
-            <a:off x="11795760" y="4937760"/>
+            <a:off x="11795760" y="4709160"/>
             <a:ext cx="0" cy="64008"/>
           </a:xfrm>
           <a:prstGeom prst="line">
@@ -3456,14 +4276,14 @@
       </p:cxnSp>
       <p:cxnSp>
         <p:nvCxnSpPr>
-          <p:cNvPr id="15" name="C1-E30 line 13" descr="sci-ppt:o013"/>
+          <p:cNvPr id="24" name="C1-E30 line 22" descr="sci-ppt:o022"/>
           <p:cNvCxnSpPr/>
           <p:nvPr/>
         </p:nvCxnSpPr>
         <p:spPr>
           <a:xfrm>
-            <a:off x="11795760" y="1371600"/>
-            <a:ext cx="0" cy="3566160"/>
+            <a:off x="11795760" y="1417320"/>
+            <a:ext cx="0" cy="3291840"/>
           </a:xfrm>
           <a:prstGeom prst="line">
             <a:avLst/>
@@ -3478,13 +4298,13 @@
       </p:cxnSp>
       <p:sp>
         <p:nvSpPr>
-          <p:cNvPr id="16" name="C1-E30 text 14" descr="sci-ppt:o014"/>
+          <p:cNvPr id="25" name="C1-E30 text 23" descr="sci-ppt:o023"/>
           <p:cNvSpPr txBox="1"/>
           <p:nvPr/>
         </p:nvSpPr>
         <p:spPr>
           <a:xfrm>
-            <a:off x="11338560" y="5020056"/>
+            <a:off x="11338560" y="4791456"/>
             <a:ext cx="914400" cy="208407"/>
           </a:xfrm>
           <a:prstGeom prst="rect">
@@ -3511,20 +4331,20 @@
                 </a:solidFill>
                 <a:latin typeface="Arial"/>
               </a:rPr>
-              <a:t>1.5</a:t>
+              <a:t>1e-02</a:t>
             </a:r>
           </a:p>
         </p:txBody>
       </p:sp>
       <p:cxnSp>
         <p:nvCxnSpPr>
-          <p:cNvPr id="17" name="C1-E30 line 15" descr="sci-ppt:o015"/>
+          <p:cNvPr id="26" name="C1-E30 line 24" descr="sci-ppt:o024"/>
           <p:cNvCxnSpPr/>
           <p:nvPr/>
         </p:nvCxnSpPr>
         <p:spPr>
           <a:xfrm>
-            <a:off x="6793992" y="4937760"/>
+            <a:off x="6793992" y="4709160"/>
             <a:ext cx="64008" cy="0"/>
           </a:xfrm>
           <a:prstGeom prst="line">
@@ -3540,13 +4360,13 @@
       </p:cxnSp>
       <p:cxnSp>
         <p:nvCxnSpPr>
-          <p:cNvPr id="18" name="C1-E30 line 16" descr="sci-ppt:o016"/>
+          <p:cNvPr id="27" name="C1-E30 line 25" descr="sci-ppt:o025"/>
           <p:cNvCxnSpPr/>
           <p:nvPr/>
         </p:nvCxnSpPr>
         <p:spPr>
           <a:xfrm>
-            <a:off x="6793992" y="4046220"/>
+            <a:off x="6793992" y="3063240"/>
             <a:ext cx="64008" cy="0"/>
           </a:xfrm>
           <a:prstGeom prst="line">
@@ -3562,13 +4382,13 @@
       </p:cxnSp>
       <p:cxnSp>
         <p:nvCxnSpPr>
-          <p:cNvPr id="19" name="C1-E30 line 17" descr="sci-ppt:o017"/>
+          <p:cNvPr id="28" name="C1-E30 line 26" descr="sci-ppt:o026"/>
           <p:cNvCxnSpPr/>
           <p:nvPr/>
         </p:nvCxnSpPr>
         <p:spPr>
           <a:xfrm>
-            <a:off x="6858000" y="4046220"/>
+            <a:off x="6858000" y="3063240"/>
             <a:ext cx="4937760" cy="0"/>
           </a:xfrm>
           <a:prstGeom prst="line">
@@ -3584,13 +4404,13 @@
       </p:cxnSp>
       <p:sp>
         <p:nvSpPr>
-          <p:cNvPr id="20" name="C1-E30 text 18" descr="sci-ppt:o018"/>
+          <p:cNvPr id="29" name="C1-E30 text 27" descr="sci-ppt:o027"/>
           <p:cNvSpPr txBox="1"/>
           <p:nvPr/>
         </p:nvSpPr>
         <p:spPr>
           <a:xfrm>
-            <a:off x="5989320" y="3963924"/>
+            <a:off x="5989320" y="2980944"/>
             <a:ext cx="777240" cy="208407"/>
           </a:xfrm>
           <a:prstGeom prst="rect">
@@ -3617,20 +4437,20 @@
                 </a:solidFill>
                 <a:latin typeface="Arial"/>
               </a:rPr>
-              <a:t>-500</a:t>
+              <a:t>1e+00</a:t>
             </a:r>
           </a:p>
         </p:txBody>
       </p:sp>
       <p:cxnSp>
         <p:nvCxnSpPr>
-          <p:cNvPr id="21" name="C1-E30 line 19" descr="sci-ppt:o019"/>
+          <p:cNvPr id="30" name="C1-E30 line 28" descr="sci-ppt:o028"/>
           <p:cNvCxnSpPr/>
           <p:nvPr/>
         </p:nvCxnSpPr>
         <p:spPr>
           <a:xfrm>
-            <a:off x="6793992" y="3154680"/>
+            <a:off x="6793992" y="1417320"/>
             <a:ext cx="64008" cy="0"/>
           </a:xfrm>
           <a:prstGeom prst="line">
@@ -3646,13 +4466,13 @@
       </p:cxnSp>
       <p:cxnSp>
         <p:nvCxnSpPr>
-          <p:cNvPr id="22" name="C1-E30 line 20" descr="sci-ppt:o020"/>
+          <p:cNvPr id="31" name="C1-E30 line 29" descr="sci-ppt:o029"/>
           <p:cNvCxnSpPr/>
           <p:nvPr/>
         </p:nvCxnSpPr>
         <p:spPr>
           <a:xfrm>
-            <a:off x="6858000" y="3154680"/>
+            <a:off x="6858000" y="1417320"/>
             <a:ext cx="4937760" cy="0"/>
           </a:xfrm>
           <a:prstGeom prst="line">
@@ -3668,13 +4488,13 @@
       </p:cxnSp>
       <p:sp>
         <p:nvSpPr>
-          <p:cNvPr id="23" name="C1-E30 text 21" descr="sci-ppt:o021"/>
+          <p:cNvPr id="32" name="C1-E30 text 30" descr="sci-ppt:o030"/>
           <p:cNvSpPr txBox="1"/>
           <p:nvPr/>
         </p:nvSpPr>
         <p:spPr>
           <a:xfrm>
-            <a:off x="5989320" y="3072384"/>
+            <a:off x="5989320" y="1335024"/>
             <a:ext cx="777240" cy="208407"/>
           </a:xfrm>
           <a:prstGeom prst="rect">
@@ -3701,188 +4521,20 @@
                 </a:solidFill>
                 <a:latin typeface="Arial"/>
               </a:rPr>
-              <a:t>0</a:t>
-            </a:r>
-          </a:p>
-        </p:txBody>
-      </p:sp>
-      <p:cxnSp>
-        <p:nvCxnSpPr>
-          <p:cNvPr id="24" name="C1-E30 line 22" descr="sci-ppt:o022"/>
-          <p:cNvCxnSpPr/>
-          <p:nvPr/>
-        </p:nvCxnSpPr>
-        <p:spPr>
-          <a:xfrm>
-            <a:off x="6793992" y="2263140"/>
-            <a:ext cx="64008" cy="0"/>
-          </a:xfrm>
-          <a:prstGeom prst="line">
-            <a:avLst/>
-          </a:prstGeom>
-          <a:ln w="12700">
-            <a:solidFill>
-              <a:srgbClr val="B4C7D2"/>
-            </a:solidFill>
-          </a:ln>
-          <a:effectLst/>
-        </p:spPr>
-      </p:cxnSp>
-      <p:cxnSp>
-        <p:nvCxnSpPr>
-          <p:cNvPr id="25" name="C1-E30 line 23" descr="sci-ppt:o023"/>
-          <p:cNvCxnSpPr/>
-          <p:nvPr/>
-        </p:nvCxnSpPr>
-        <p:spPr>
-          <a:xfrm>
-            <a:off x="6858000" y="2263140"/>
-            <a:ext cx="4937760" cy="0"/>
-          </a:xfrm>
-          <a:prstGeom prst="line">
-            <a:avLst/>
-          </a:prstGeom>
-          <a:ln w="7620">
-            <a:solidFill>
-              <a:srgbClr val="2E4756"/>
-            </a:solidFill>
-          </a:ln>
-          <a:effectLst/>
-        </p:spPr>
-      </p:cxnSp>
-      <p:sp>
-        <p:nvSpPr>
-          <p:cNvPr id="26" name="C1-E30 text 24" descr="sci-ppt:o024"/>
+              <a:t>1e+02</a:t>
+            </a:r>
+          </a:p>
+        </p:txBody>
+      </p:sp>
+      <p:sp>
+        <p:nvSpPr>
+          <p:cNvPr id="33" name="C1-E30 text 31" descr="sci-ppt:o031"/>
           <p:cNvSpPr txBox="1"/>
           <p:nvPr/>
         </p:nvSpPr>
         <p:spPr>
           <a:xfrm>
-            <a:off x="5989320" y="2180844"/>
-            <a:ext cx="777240" cy="208407"/>
-          </a:xfrm>
-          <a:prstGeom prst="rect">
-            <a:avLst/>
-          </a:prstGeom>
-          <a:noFill/>
-          <a:effectLst/>
-        </p:spPr>
-        <p:txBody>
-          <a:bodyPr wrap="none" lIns="18288" rIns="18288" tIns="18288" bIns="18288" anchor="t">
-            <a:spAutoFit/>
-          </a:bodyPr>
-          <a:lstStyle/>
-          <a:p>
-            <a:pPr algn="r">
-              <a:spcAft>
-                <a:spcPts val="0"/>
-              </a:spcAft>
-            </a:pPr>
-            <a:r>
-              <a:rPr sz="1050" b="0" i="0">
-                <a:solidFill>
-                  <a:srgbClr val="B4C7D2"/>
-                </a:solidFill>
-                <a:latin typeface="Arial"/>
-              </a:rPr>
-              <a:t>500</a:t>
-            </a:r>
-          </a:p>
-        </p:txBody>
-      </p:sp>
-      <p:cxnSp>
-        <p:nvCxnSpPr>
-          <p:cNvPr id="27" name="C1-E30 line 25" descr="sci-ppt:o025"/>
-          <p:cNvCxnSpPr/>
-          <p:nvPr/>
-        </p:nvCxnSpPr>
-        <p:spPr>
-          <a:xfrm>
-            <a:off x="6793992" y="1371600"/>
-            <a:ext cx="64008" cy="0"/>
-          </a:xfrm>
-          <a:prstGeom prst="line">
-            <a:avLst/>
-          </a:prstGeom>
-          <a:ln w="12700">
-            <a:solidFill>
-              <a:srgbClr val="B4C7D2"/>
-            </a:solidFill>
-          </a:ln>
-          <a:effectLst/>
-        </p:spPr>
-      </p:cxnSp>
-      <p:cxnSp>
-        <p:nvCxnSpPr>
-          <p:cNvPr id="28" name="C1-E30 line 26" descr="sci-ppt:o026"/>
-          <p:cNvCxnSpPr/>
-          <p:nvPr/>
-        </p:nvCxnSpPr>
-        <p:spPr>
-          <a:xfrm>
-            <a:off x="6858000" y="1371600"/>
-            <a:ext cx="4937760" cy="0"/>
-          </a:xfrm>
-          <a:prstGeom prst="line">
-            <a:avLst/>
-          </a:prstGeom>
-          <a:ln w="7620">
-            <a:solidFill>
-              <a:srgbClr val="2E4756"/>
-            </a:solidFill>
-          </a:ln>
-          <a:effectLst/>
-        </p:spPr>
-      </p:cxnSp>
-      <p:sp>
-        <p:nvSpPr>
-          <p:cNvPr id="29" name="C1-E30 text 27" descr="sci-ppt:o027"/>
-          <p:cNvSpPr txBox="1"/>
-          <p:nvPr/>
-        </p:nvSpPr>
-        <p:spPr>
-          <a:xfrm>
-            <a:off x="5989320" y="1289304"/>
-            <a:ext cx="777240" cy="208407"/>
-          </a:xfrm>
-          <a:prstGeom prst="rect">
-            <a:avLst/>
-          </a:prstGeom>
-          <a:noFill/>
-          <a:effectLst/>
-        </p:spPr>
-        <p:txBody>
-          <a:bodyPr wrap="none" lIns="18288" rIns="18288" tIns="18288" bIns="18288" anchor="t">
-            <a:spAutoFit/>
-          </a:bodyPr>
-          <a:lstStyle/>
-          <a:p>
-            <a:pPr algn="r">
-              <a:spcAft>
-                <a:spcPts val="0"/>
-              </a:spcAft>
-            </a:pPr>
-            <a:r>
-              <a:rPr sz="1050" b="0" i="0">
-                <a:solidFill>
-                  <a:srgbClr val="B4C7D2"/>
-                </a:solidFill>
-                <a:latin typeface="Arial"/>
-              </a:rPr>
-              <a:t>1000</a:t>
-            </a:r>
-          </a:p>
-        </p:txBody>
-      </p:sp>
-      <p:sp>
-        <p:nvSpPr>
-          <p:cNvPr id="30" name="C1-E30 text 28" descr="sci-ppt:o028"/>
-          <p:cNvSpPr txBox="1"/>
-          <p:nvPr/>
-        </p:nvSpPr>
-        <p:spPr>
-          <a:xfrm>
-            <a:off x="6858000" y="5221224"/>
+            <a:off x="6858000" y="4992624"/>
             <a:ext cx="4937760" cy="231648"/>
           </a:xfrm>
           <a:prstGeom prst="rect">
@@ -3909,20 +4561,20 @@
                 </a:solidFill>
                 <a:latin typeface="Arial"/>
               </a:rPr>
-              <a:t>t  (µs)</a:t>
-            </a:r>
-          </a:p>
-        </p:txBody>
-      </p:sp>
-      <p:sp>
-        <p:nvSpPr>
-          <p:cNvPr id="31" name="C1-E30 text 29" descr="sci-ppt:o029"/>
+              <a:t>communication length Lₑ  (m)</a:t>
+            </a:r>
+          </a:p>
+        </p:txBody>
+      </p:sp>
+      <p:sp>
+        <p:nvSpPr>
+          <p:cNvPr id="34" name="C1-E30 text 32" descr="sci-ppt:o032"/>
           <p:cNvSpPr txBox="1"/>
           <p:nvPr/>
         </p:nvSpPr>
         <p:spPr>
           <a:xfrm>
-            <a:off x="6309360" y="1024128"/>
+            <a:off x="6309360" y="1069848"/>
             <a:ext cx="4937760" cy="231648"/>
           </a:xfrm>
           <a:prstGeom prst="rect">
@@ -3949,43 +4601,21 @@
                 </a:solidFill>
                 <a:latin typeface="Arial"/>
               </a:rPr>
-              <a:t>closure terms (m²/s²)</a:t>
-            </a:r>
-          </a:p>
-        </p:txBody>
-      </p:sp>
-      <p:cxnSp>
-        <p:nvCxnSpPr>
-          <p:cNvPr id="32" name="C1-E30 line 30" descr="sci-ppt:o030"/>
-          <p:cNvCxnSpPr/>
-          <p:nvPr/>
-        </p:nvCxnSpPr>
-        <p:spPr>
-          <a:xfrm>
-            <a:off x="6858000" y="3154680"/>
-            <a:ext cx="4937760" cy="0"/>
-          </a:xfrm>
-          <a:prstGeom prst="line">
-            <a:avLst/>
-          </a:prstGeom>
-          <a:ln w="15240">
-            <a:solidFill>
-              <a:srgbClr val="2E4756"/>
-            </a:solidFill>
-          </a:ln>
-          <a:effectLst/>
-        </p:spPr>
-      </p:cxnSp>
-      <p:sp>
-        <p:nvSpPr>
-          <p:cNvPr id="33" name="C1-E30 polygon 31" descr="sci-ppt:o031"/>
+              <a:t>𝒞ₑ = Lₑ / (c τₑ)</a:t>
+            </a:r>
+          </a:p>
+        </p:txBody>
+      </p:sp>
+      <p:sp>
+        <p:nvSpPr>
+          <p:cNvPr id="35" name="C1-E30 polygon 33" descr="sci-ppt:o033"/>
           <p:cNvSpPr/>
           <p:nvPr/>
         </p:nvSpPr>
         <p:spPr>
           <a:xfrm>
-            <a:off x="6865408" y="2992514"/>
-            <a:ext cx="4922943" cy="1712408"/>
+            <a:off x="6858000" y="1562236"/>
+            <a:ext cx="4937760" cy="2468880"/>
           </a:xfrm>
           <a:custGeom>
             <a:avLst/>
@@ -3994,446 +4624,314 @@
             <a:cxnLst/>
             <a:rect l="l" t="t" r="r" b="b"/>
             <a:pathLst>
-              <a:path w="4922943" h="1712408">
+              <a:path w="4937760" h="2468880">
                 <a:moveTo>
-                  <a:pt x="0" y="1712408"/>
+                  <a:pt x="0" y="2468880"/>
                 </a:moveTo>
                 <a:lnTo>
-                  <a:pt x="34573" y="1688080"/>
-                </a:lnTo>
-                <a:lnTo>
-                  <a:pt x="69146" y="1631989"/>
-                </a:lnTo>
-                <a:lnTo>
-                  <a:pt x="103719" y="1549311"/>
-                </a:lnTo>
-                <a:lnTo>
-                  <a:pt x="138292" y="1446964"/>
-                </a:lnTo>
-                <a:lnTo>
-                  <a:pt x="172865" y="1332373"/>
-                </a:lnTo>
-                <a:lnTo>
-                  <a:pt x="207438" y="1212425"/>
-                </a:lnTo>
-                <a:lnTo>
-                  <a:pt x="242011" y="1092797"/>
-                </a:lnTo>
-                <a:lnTo>
-                  <a:pt x="276584" y="977692"/>
-                </a:lnTo>
-                <a:lnTo>
-                  <a:pt x="311157" y="869882"/>
-                </a:lnTo>
-                <a:lnTo>
-                  <a:pt x="345730" y="770923"/>
-                </a:lnTo>
-                <a:lnTo>
-                  <a:pt x="380303" y="681450"/>
-                </a:lnTo>
-                <a:lnTo>
-                  <a:pt x="414876" y="601445"/>
-                </a:lnTo>
-                <a:lnTo>
-                  <a:pt x="449449" y="530478"/>
-                </a:lnTo>
-                <a:lnTo>
-                  <a:pt x="484021" y="467878"/>
-                </a:lnTo>
-                <a:lnTo>
-                  <a:pt x="518594" y="412867"/>
-                </a:lnTo>
-                <a:lnTo>
-                  <a:pt x="553167" y="364636"/>
-                </a:lnTo>
-                <a:lnTo>
-                  <a:pt x="587740" y="322400"/>
-                </a:lnTo>
-                <a:lnTo>
-                  <a:pt x="622313" y="285428"/>
-                </a:lnTo>
-                <a:lnTo>
-                  <a:pt x="656886" y="253054"/>
-                </a:lnTo>
-                <a:lnTo>
-                  <a:pt x="691459" y="224686"/>
-                </a:lnTo>
-                <a:lnTo>
-                  <a:pt x="726032" y="199800"/>
-                </a:lnTo>
-                <a:lnTo>
-                  <a:pt x="760605" y="177939"/>
-                </a:lnTo>
-                <a:lnTo>
-                  <a:pt x="795178" y="158705"/>
-                </a:lnTo>
-                <a:lnTo>
-                  <a:pt x="829751" y="141755"/>
-                </a:lnTo>
-                <a:lnTo>
-                  <a:pt x="864324" y="126791"/>
-                </a:lnTo>
-                <a:lnTo>
-                  <a:pt x="898897" y="113557"/>
-                </a:lnTo>
-                <a:lnTo>
-                  <a:pt x="933470" y="101833"/>
-                </a:lnTo>
-                <a:lnTo>
-                  <a:pt x="968043" y="91427"/>
-                </a:lnTo>
-                <a:lnTo>
-                  <a:pt x="1002616" y="82175"/>
-                </a:lnTo>
-                <a:lnTo>
-                  <a:pt x="1037189" y="73935"/>
-                </a:lnTo>
-                <a:lnTo>
-                  <a:pt x="1071762" y="66584"/>
-                </a:lnTo>
-                <a:lnTo>
-                  <a:pt x="1106335" y="60016"/>
-                </a:lnTo>
-                <a:lnTo>
-                  <a:pt x="1140908" y="54138"/>
-                </a:lnTo>
-                <a:lnTo>
-                  <a:pt x="1175481" y="48870"/>
-                </a:lnTo>
-                <a:lnTo>
-                  <a:pt x="1210054" y="44142"/>
-                </a:lnTo>
-                <a:lnTo>
-                  <a:pt x="1244627" y="39893"/>
-                </a:lnTo>
-                <a:lnTo>
-                  <a:pt x="1279200" y="36070"/>
-                </a:lnTo>
-                <a:lnTo>
-                  <a:pt x="1313773" y="32625"/>
-                </a:lnTo>
-                <a:lnTo>
-                  <a:pt x="1348346" y="29518"/>
-                </a:lnTo>
-                <a:lnTo>
-                  <a:pt x="1382919" y="26713"/>
-                </a:lnTo>
-                <a:lnTo>
-                  <a:pt x="1417491" y="24177"/>
-                </a:lnTo>
-                <a:lnTo>
-                  <a:pt x="1452064" y="21884"/>
-                </a:lnTo>
-                <a:lnTo>
-                  <a:pt x="1486637" y="19807"/>
-                </a:lnTo>
-                <a:lnTo>
-                  <a:pt x="1521210" y="17926"/>
-                </a:lnTo>
-                <a:lnTo>
-                  <a:pt x="1555783" y="16220"/>
-                </a:lnTo>
-                <a:lnTo>
-                  <a:pt x="1590356" y="14673"/>
-                </a:lnTo>
-                <a:lnTo>
-                  <a:pt x="1624929" y="13268"/>
-                </a:lnTo>
-                <a:lnTo>
-                  <a:pt x="1659502" y="11992"/>
-                </a:lnTo>
-                <a:lnTo>
-                  <a:pt x="1694075" y="10833"/>
-                </a:lnTo>
-                <a:lnTo>
-                  <a:pt x="1728648" y="9780"/>
-                </a:lnTo>
-                <a:lnTo>
-                  <a:pt x="1763221" y="8822"/>
-                </a:lnTo>
-                <a:lnTo>
-                  <a:pt x="1797794" y="7951"/>
-                </a:lnTo>
-                <a:lnTo>
-                  <a:pt x="1832367" y="7160"/>
-                </a:lnTo>
-                <a:lnTo>
-                  <a:pt x="1866940" y="6440"/>
-                </a:lnTo>
-                <a:lnTo>
-                  <a:pt x="1901513" y="5786"/>
-                </a:lnTo>
-                <a:lnTo>
-                  <a:pt x="1936086" y="5191"/>
-                </a:lnTo>
-                <a:lnTo>
-                  <a:pt x="1970659" y="4650"/>
-                </a:lnTo>
-                <a:lnTo>
-                  <a:pt x="2005232" y="4159"/>
-                </a:lnTo>
-                <a:lnTo>
-                  <a:pt x="2039805" y="3713"/>
-                </a:lnTo>
-                <a:lnTo>
-                  <a:pt x="2074378" y="3308"/>
-                </a:lnTo>
-                <a:lnTo>
-                  <a:pt x="2108951" y="2941"/>
-                </a:lnTo>
-                <a:lnTo>
-                  <a:pt x="2143524" y="2608"/>
-                </a:lnTo>
-                <a:lnTo>
-                  <a:pt x="2178097" y="2307"/>
-                </a:lnTo>
-                <a:lnTo>
-                  <a:pt x="2212670" y="2034"/>
-                </a:lnTo>
-                <a:lnTo>
-                  <a:pt x="2247243" y="1788"/>
-                </a:lnTo>
-                <a:lnTo>
-                  <a:pt x="2281816" y="1567"/>
-                </a:lnTo>
-                <a:lnTo>
-                  <a:pt x="2316389" y="1367"/>
-                </a:lnTo>
-                <a:lnTo>
-                  <a:pt x="2350961" y="1187"/>
-                </a:lnTo>
-                <a:lnTo>
-                  <a:pt x="2385534" y="1026"/>
-                </a:lnTo>
-                <a:lnTo>
-                  <a:pt x="2420107" y="882"/>
-                </a:lnTo>
-                <a:lnTo>
-                  <a:pt x="2454680" y="754"/>
-                </a:lnTo>
-                <a:lnTo>
-                  <a:pt x="2489253" y="640"/>
-                </a:lnTo>
-                <a:lnTo>
-                  <a:pt x="2523826" y="539"/>
-                </a:lnTo>
-                <a:lnTo>
-                  <a:pt x="2558399" y="449"/>
-                </a:lnTo>
-                <a:lnTo>
-                  <a:pt x="2592972" y="371"/>
-                </a:lnTo>
-                <a:lnTo>
-                  <a:pt x="2627545" y="302"/>
-                </a:lnTo>
-                <a:lnTo>
-                  <a:pt x="2662118" y="243"/>
-                </a:lnTo>
-                <a:lnTo>
-                  <a:pt x="2696691" y="192"/>
-                </a:lnTo>
-                <a:lnTo>
-                  <a:pt x="2731264" y="148"/>
-                </a:lnTo>
-                <a:lnTo>
-                  <a:pt x="2765837" y="112"/>
-                </a:lnTo>
-                <a:lnTo>
-                  <a:pt x="2800410" y="81"/>
-                </a:lnTo>
-                <a:lnTo>
-                  <a:pt x="2834983" y="57"/>
-                </a:lnTo>
-                <a:lnTo>
-                  <a:pt x="2869556" y="37"/>
-                </a:lnTo>
-                <a:lnTo>
-                  <a:pt x="2904129" y="22"/>
-                </a:lnTo>
-                <a:lnTo>
-                  <a:pt x="2938702" y="11"/>
-                </a:lnTo>
-                <a:lnTo>
-                  <a:pt x="2973275" y="4"/>
-                </a:lnTo>
-                <a:lnTo>
-                  <a:pt x="3007848" y="1"/>
-                </a:lnTo>
-                <a:lnTo>
-                  <a:pt x="3042421" y="0"/>
-                </a:lnTo>
-                <a:lnTo>
-                  <a:pt x="3076994" y="2"/>
-                </a:lnTo>
-                <a:lnTo>
-                  <a:pt x="3111567" y="7"/>
-                </a:lnTo>
-                <a:lnTo>
-                  <a:pt x="3146140" y="13"/>
-                </a:lnTo>
-                <a:lnTo>
-                  <a:pt x="3180713" y="22"/>
-                </a:lnTo>
-                <a:lnTo>
-                  <a:pt x="3215286" y="32"/>
-                </a:lnTo>
-                <a:lnTo>
-                  <a:pt x="3249859" y="43"/>
-                </a:lnTo>
-                <a:lnTo>
-                  <a:pt x="3284432" y="56"/>
-                </a:lnTo>
-                <a:lnTo>
-                  <a:pt x="3319004" y="69"/>
-                </a:lnTo>
-                <a:lnTo>
-                  <a:pt x="3353577" y="83"/>
-                </a:lnTo>
-                <a:lnTo>
-                  <a:pt x="3388150" y="98"/>
-                </a:lnTo>
-                <a:lnTo>
-                  <a:pt x="3422723" y="113"/>
-                </a:lnTo>
-                <a:lnTo>
-                  <a:pt x="3457296" y="128"/>
-                </a:lnTo>
-                <a:lnTo>
-                  <a:pt x="3491869" y="144"/>
-                </a:lnTo>
-                <a:lnTo>
-                  <a:pt x="3526442" y="159"/>
-                </a:lnTo>
-                <a:lnTo>
-                  <a:pt x="3561015" y="175"/>
-                </a:lnTo>
-                <a:lnTo>
-                  <a:pt x="3595588" y="190"/>
-                </a:lnTo>
-                <a:lnTo>
-                  <a:pt x="3630161" y="205"/>
-                </a:lnTo>
-                <a:lnTo>
-                  <a:pt x="3664734" y="220"/>
-                </a:lnTo>
-                <a:lnTo>
-                  <a:pt x="3699307" y="234"/>
-                </a:lnTo>
-                <a:lnTo>
-                  <a:pt x="3733880" y="247"/>
-                </a:lnTo>
-                <a:lnTo>
-                  <a:pt x="3768453" y="260"/>
-                </a:lnTo>
-                <a:lnTo>
-                  <a:pt x="3803026" y="273"/>
-                </a:lnTo>
-                <a:lnTo>
-                  <a:pt x="3837599" y="284"/>
-                </a:lnTo>
-                <a:lnTo>
-                  <a:pt x="3872172" y="295"/>
-                </a:lnTo>
-                <a:lnTo>
-                  <a:pt x="3906745" y="305"/>
-                </a:lnTo>
-                <a:lnTo>
-                  <a:pt x="3941318" y="314"/>
-                </a:lnTo>
-                <a:lnTo>
-                  <a:pt x="3975891" y="322"/>
-                </a:lnTo>
-                <a:lnTo>
-                  <a:pt x="4010464" y="329"/>
-                </a:lnTo>
-                <a:lnTo>
-                  <a:pt x="4045037" y="335"/>
-                </a:lnTo>
-                <a:lnTo>
-                  <a:pt x="4079610" y="340"/>
-                </a:lnTo>
-                <a:lnTo>
-                  <a:pt x="4114183" y="345"/>
-                </a:lnTo>
-                <a:lnTo>
-                  <a:pt x="4148756" y="348"/>
-                </a:lnTo>
-                <a:lnTo>
-                  <a:pt x="4183329" y="350"/>
-                </a:lnTo>
-                <a:lnTo>
-                  <a:pt x="4217902" y="351"/>
-                </a:lnTo>
-                <a:lnTo>
-                  <a:pt x="4252474" y="351"/>
-                </a:lnTo>
-                <a:lnTo>
-                  <a:pt x="4287047" y="350"/>
-                </a:lnTo>
-                <a:lnTo>
-                  <a:pt x="4321620" y="347"/>
-                </a:lnTo>
-                <a:lnTo>
-                  <a:pt x="4356193" y="344"/>
-                </a:lnTo>
-                <a:lnTo>
-                  <a:pt x="4390766" y="340"/>
-                </a:lnTo>
-                <a:lnTo>
-                  <a:pt x="4425339" y="335"/>
-                </a:lnTo>
-                <a:lnTo>
-                  <a:pt x="4459912" y="328"/>
-                </a:lnTo>
-                <a:lnTo>
-                  <a:pt x="4494485" y="321"/>
-                </a:lnTo>
-                <a:lnTo>
-                  <a:pt x="4529058" y="313"/>
-                </a:lnTo>
-                <a:lnTo>
-                  <a:pt x="4563631" y="304"/>
-                </a:lnTo>
-                <a:lnTo>
-                  <a:pt x="4598204" y="294"/>
-                </a:lnTo>
-                <a:lnTo>
-                  <a:pt x="4632777" y="283"/>
-                </a:lnTo>
-                <a:lnTo>
-                  <a:pt x="4667350" y="271"/>
-                </a:lnTo>
-                <a:lnTo>
-                  <a:pt x="4701923" y="259"/>
-                </a:lnTo>
-                <a:lnTo>
-                  <a:pt x="4736496" y="246"/>
-                </a:lnTo>
-                <a:lnTo>
-                  <a:pt x="4771069" y="232"/>
-                </a:lnTo>
-                <a:lnTo>
-                  <a:pt x="4805642" y="218"/>
-                </a:lnTo>
-                <a:lnTo>
-                  <a:pt x="4840215" y="204"/>
-                </a:lnTo>
-                <a:lnTo>
-                  <a:pt x="4874788" y="189"/>
-                </a:lnTo>
-                <a:lnTo>
-                  <a:pt x="4909361" y="173"/>
-                </a:lnTo>
-                <a:lnTo>
-                  <a:pt x="4922943" y="167"/>
+                  <a:pt x="49876" y="2443941"/>
+                </a:lnTo>
+                <a:lnTo>
+                  <a:pt x="99752" y="2419003"/>
+                </a:lnTo>
+                <a:lnTo>
+                  <a:pt x="149629" y="2394065"/>
+                </a:lnTo>
+                <a:lnTo>
+                  <a:pt x="199505" y="2369127"/>
+                </a:lnTo>
+                <a:lnTo>
+                  <a:pt x="249381" y="2344189"/>
+                </a:lnTo>
+                <a:lnTo>
+                  <a:pt x="299258" y="2319250"/>
+                </a:lnTo>
+                <a:lnTo>
+                  <a:pt x="349134" y="2294312"/>
+                </a:lnTo>
+                <a:lnTo>
+                  <a:pt x="399010" y="2269374"/>
+                </a:lnTo>
+                <a:lnTo>
+                  <a:pt x="448887" y="2244436"/>
+                </a:lnTo>
+                <a:lnTo>
+                  <a:pt x="498763" y="2219498"/>
+                </a:lnTo>
+                <a:lnTo>
+                  <a:pt x="548640" y="2194560"/>
+                </a:lnTo>
+                <a:lnTo>
+                  <a:pt x="598516" y="2169621"/>
+                </a:lnTo>
+                <a:lnTo>
+                  <a:pt x="648392" y="2144683"/>
+                </a:lnTo>
+                <a:lnTo>
+                  <a:pt x="698269" y="2119745"/>
+                </a:lnTo>
+                <a:lnTo>
+                  <a:pt x="748145" y="2094807"/>
+                </a:lnTo>
+                <a:lnTo>
+                  <a:pt x="798021" y="2069869"/>
+                </a:lnTo>
+                <a:lnTo>
+                  <a:pt x="847898" y="2044930"/>
+                </a:lnTo>
+                <a:lnTo>
+                  <a:pt x="897774" y="2019992"/>
+                </a:lnTo>
+                <a:lnTo>
+                  <a:pt x="947650" y="1995054"/>
+                </a:lnTo>
+                <a:lnTo>
+                  <a:pt x="997527" y="1970116"/>
+                </a:lnTo>
+                <a:lnTo>
+                  <a:pt x="1047403" y="1945178"/>
+                </a:lnTo>
+                <a:lnTo>
+                  <a:pt x="1097280" y="1920240"/>
+                </a:lnTo>
+                <a:lnTo>
+                  <a:pt x="1147156" y="1895301"/>
+                </a:lnTo>
+                <a:lnTo>
+                  <a:pt x="1197032" y="1870363"/>
+                </a:lnTo>
+                <a:lnTo>
+                  <a:pt x="1246909" y="1845425"/>
+                </a:lnTo>
+                <a:lnTo>
+                  <a:pt x="1296785" y="1820487"/>
+                </a:lnTo>
+                <a:lnTo>
+                  <a:pt x="1346661" y="1795549"/>
+                </a:lnTo>
+                <a:lnTo>
+                  <a:pt x="1396538" y="1770610"/>
+                </a:lnTo>
+                <a:lnTo>
+                  <a:pt x="1446414" y="1745672"/>
+                </a:lnTo>
+                <a:lnTo>
+                  <a:pt x="1496290" y="1720734"/>
+                </a:lnTo>
+                <a:lnTo>
+                  <a:pt x="1546167" y="1695796"/>
+                </a:lnTo>
+                <a:lnTo>
+                  <a:pt x="1596043" y="1670858"/>
+                </a:lnTo>
+                <a:lnTo>
+                  <a:pt x="1645920" y="1645920"/>
+                </a:lnTo>
+                <a:lnTo>
+                  <a:pt x="1695796" y="1620981"/>
+                </a:lnTo>
+                <a:lnTo>
+                  <a:pt x="1745672" y="1596043"/>
+                </a:lnTo>
+                <a:lnTo>
+                  <a:pt x="1795549" y="1571105"/>
+                </a:lnTo>
+                <a:lnTo>
+                  <a:pt x="1845425" y="1546167"/>
+                </a:lnTo>
+                <a:lnTo>
+                  <a:pt x="1895301" y="1521229"/>
+                </a:lnTo>
+                <a:lnTo>
+                  <a:pt x="1945178" y="1496290"/>
+                </a:lnTo>
+                <a:lnTo>
+                  <a:pt x="1995054" y="1471352"/>
+                </a:lnTo>
+                <a:lnTo>
+                  <a:pt x="2044930" y="1446414"/>
+                </a:lnTo>
+                <a:lnTo>
+                  <a:pt x="2094807" y="1421476"/>
+                </a:lnTo>
+                <a:lnTo>
+                  <a:pt x="2144683" y="1396538"/>
+                </a:lnTo>
+                <a:lnTo>
+                  <a:pt x="2194560" y="1371600"/>
+                </a:lnTo>
+                <a:lnTo>
+                  <a:pt x="2244436" y="1346661"/>
+                </a:lnTo>
+                <a:lnTo>
+                  <a:pt x="2294312" y="1321723"/>
+                </a:lnTo>
+                <a:lnTo>
+                  <a:pt x="2344189" y="1296785"/>
+                </a:lnTo>
+                <a:lnTo>
+                  <a:pt x="2394065" y="1271847"/>
+                </a:lnTo>
+                <a:lnTo>
+                  <a:pt x="2443941" y="1246909"/>
+                </a:lnTo>
+                <a:lnTo>
+                  <a:pt x="2493818" y="1221970"/>
+                </a:lnTo>
+                <a:lnTo>
+                  <a:pt x="2543694" y="1197032"/>
+                </a:lnTo>
+                <a:lnTo>
+                  <a:pt x="2593570" y="1172094"/>
+                </a:lnTo>
+                <a:lnTo>
+                  <a:pt x="2643447" y="1147156"/>
+                </a:lnTo>
+                <a:lnTo>
+                  <a:pt x="2693323" y="1122218"/>
+                </a:lnTo>
+                <a:lnTo>
+                  <a:pt x="2743200" y="1097280"/>
+                </a:lnTo>
+                <a:lnTo>
+                  <a:pt x="2793076" y="1072341"/>
+                </a:lnTo>
+                <a:lnTo>
+                  <a:pt x="2842952" y="1047403"/>
+                </a:lnTo>
+                <a:lnTo>
+                  <a:pt x="2892829" y="1022465"/>
+                </a:lnTo>
+                <a:lnTo>
+                  <a:pt x="2942705" y="997527"/>
+                </a:lnTo>
+                <a:lnTo>
+                  <a:pt x="2992581" y="972589"/>
+                </a:lnTo>
+                <a:lnTo>
+                  <a:pt x="3042458" y="947650"/>
+                </a:lnTo>
+                <a:lnTo>
+                  <a:pt x="3092334" y="922712"/>
+                </a:lnTo>
+                <a:lnTo>
+                  <a:pt x="3142210" y="897774"/>
+                </a:lnTo>
+                <a:lnTo>
+                  <a:pt x="3192087" y="872836"/>
+                </a:lnTo>
+                <a:lnTo>
+                  <a:pt x="3241963" y="847898"/>
+                </a:lnTo>
+                <a:lnTo>
+                  <a:pt x="3291840" y="822960"/>
+                </a:lnTo>
+                <a:lnTo>
+                  <a:pt x="3341716" y="798021"/>
+                </a:lnTo>
+                <a:lnTo>
+                  <a:pt x="3391592" y="773083"/>
+                </a:lnTo>
+                <a:lnTo>
+                  <a:pt x="3441469" y="748145"/>
+                </a:lnTo>
+                <a:lnTo>
+                  <a:pt x="3491345" y="723207"/>
+                </a:lnTo>
+                <a:lnTo>
+                  <a:pt x="3541221" y="698269"/>
+                </a:lnTo>
+                <a:lnTo>
+                  <a:pt x="3591098" y="673330"/>
+                </a:lnTo>
+                <a:lnTo>
+                  <a:pt x="3640974" y="648392"/>
+                </a:lnTo>
+                <a:lnTo>
+                  <a:pt x="3690850" y="623454"/>
+                </a:lnTo>
+                <a:lnTo>
+                  <a:pt x="3740727" y="598516"/>
+                </a:lnTo>
+                <a:lnTo>
+                  <a:pt x="3790603" y="573578"/>
+                </a:lnTo>
+                <a:lnTo>
+                  <a:pt x="3840480" y="548640"/>
+                </a:lnTo>
+                <a:lnTo>
+                  <a:pt x="3890356" y="523701"/>
+                </a:lnTo>
+                <a:lnTo>
+                  <a:pt x="3940232" y="498763"/>
+                </a:lnTo>
+                <a:lnTo>
+                  <a:pt x="3990109" y="473825"/>
+                </a:lnTo>
+                <a:lnTo>
+                  <a:pt x="4039985" y="448887"/>
+                </a:lnTo>
+                <a:lnTo>
+                  <a:pt x="4089861" y="423949"/>
+                </a:lnTo>
+                <a:lnTo>
+                  <a:pt x="4139738" y="399010"/>
+                </a:lnTo>
+                <a:lnTo>
+                  <a:pt x="4189614" y="374072"/>
+                </a:lnTo>
+                <a:lnTo>
+                  <a:pt x="4239490" y="349134"/>
+                </a:lnTo>
+                <a:lnTo>
+                  <a:pt x="4289367" y="324196"/>
+                </a:lnTo>
+                <a:lnTo>
+                  <a:pt x="4339243" y="299258"/>
+                </a:lnTo>
+                <a:lnTo>
+                  <a:pt x="4389120" y="274320"/>
+                </a:lnTo>
+                <a:lnTo>
+                  <a:pt x="4438996" y="249381"/>
+                </a:lnTo>
+                <a:lnTo>
+                  <a:pt x="4488872" y="224443"/>
+                </a:lnTo>
+                <a:lnTo>
+                  <a:pt x="4538749" y="199505"/>
+                </a:lnTo>
+                <a:lnTo>
+                  <a:pt x="4588625" y="174567"/>
+                </a:lnTo>
+                <a:lnTo>
+                  <a:pt x="4638501" y="149629"/>
+                </a:lnTo>
+                <a:lnTo>
+                  <a:pt x="4688378" y="124690"/>
+                </a:lnTo>
+                <a:lnTo>
+                  <a:pt x="4738254" y="99752"/>
+                </a:lnTo>
+                <a:lnTo>
+                  <a:pt x="4788130" y="74814"/>
+                </a:lnTo>
+                <a:lnTo>
+                  <a:pt x="4838007" y="49876"/>
+                </a:lnTo>
+                <a:lnTo>
+                  <a:pt x="4887883" y="24938"/>
+                </a:lnTo>
+                <a:lnTo>
+                  <a:pt x="4937760" y="0"/>
                 </a:lnTo>
               </a:path>
             </a:pathLst>
           </a:custGeom>
           <a:noFill/>
-          <a:ln w="40640">
+          <a:ln w="38100">
             <a:solidFill>
-              <a:srgbClr val="8EDBD4"/>
+              <a:srgbClr val="F28BA0"/>
             </a:solidFill>
           </a:ln>
           <a:effectLst/>
@@ -4448,14 +4946,14 @@
       </p:sp>
       <p:sp>
         <p:nvSpPr>
-          <p:cNvPr id="34" name="C1-E30 polygon 32" descr="sci-ppt:o032"/>
+          <p:cNvPr id="36" name="C1-E30 polygon 34" descr="sci-ppt:o034"/>
           <p:cNvSpPr/>
           <p:nvPr/>
         </p:nvSpPr>
         <p:spPr>
           <a:xfrm>
-            <a:off x="6865408" y="2992514"/>
-            <a:ext cx="4922943" cy="1712430"/>
+            <a:off x="8803178" y="3208156"/>
+            <a:ext cx="2992582" cy="1496290"/>
           </a:xfrm>
           <a:custGeom>
             <a:avLst/>
@@ -4464,469 +4962,242 @@
             <a:cxnLst/>
             <a:rect l="l" t="t" r="r" b="b"/>
             <a:pathLst>
-              <a:path w="4922943" h="1712430">
+              <a:path w="2992582" h="1496290">
                 <a:moveTo>
-                  <a:pt x="0" y="1712430"/>
+                  <a:pt x="0" y="1496290"/>
                 </a:moveTo>
                 <a:lnTo>
-                  <a:pt x="34573" y="1688100"/>
-                </a:lnTo>
-                <a:lnTo>
-                  <a:pt x="69146" y="1632005"/>
-                </a:lnTo>
-                <a:lnTo>
-                  <a:pt x="103719" y="1549323"/>
-                </a:lnTo>
-                <a:lnTo>
-                  <a:pt x="138292" y="1446970"/>
-                </a:lnTo>
-                <a:lnTo>
-                  <a:pt x="172865" y="1332374"/>
-                </a:lnTo>
-                <a:lnTo>
-                  <a:pt x="207438" y="1212422"/>
-                </a:lnTo>
-                <a:lnTo>
-                  <a:pt x="242011" y="1092791"/>
-                </a:lnTo>
-                <a:lnTo>
-                  <a:pt x="276584" y="977685"/>
-                </a:lnTo>
-                <a:lnTo>
-                  <a:pt x="311157" y="869873"/>
-                </a:lnTo>
-                <a:lnTo>
-                  <a:pt x="345730" y="770915"/>
-                </a:lnTo>
-                <a:lnTo>
-                  <a:pt x="380303" y="681442"/>
-                </a:lnTo>
-                <a:lnTo>
-                  <a:pt x="414876" y="601438"/>
-                </a:lnTo>
-                <a:lnTo>
-                  <a:pt x="449449" y="530471"/>
-                </a:lnTo>
-                <a:lnTo>
-                  <a:pt x="484021" y="467873"/>
-                </a:lnTo>
-                <a:lnTo>
-                  <a:pt x="518594" y="412863"/>
-                </a:lnTo>
-                <a:lnTo>
-                  <a:pt x="553167" y="364632"/>
-                </a:lnTo>
-                <a:lnTo>
-                  <a:pt x="587740" y="322397"/>
-                </a:lnTo>
-                <a:lnTo>
-                  <a:pt x="622313" y="285425"/>
-                </a:lnTo>
-                <a:lnTo>
-                  <a:pt x="656886" y="253052"/>
-                </a:lnTo>
-                <a:lnTo>
-                  <a:pt x="691459" y="224684"/>
-                </a:lnTo>
-                <a:lnTo>
-                  <a:pt x="726032" y="199798"/>
-                </a:lnTo>
-                <a:lnTo>
-                  <a:pt x="760605" y="177937"/>
-                </a:lnTo>
-                <a:lnTo>
-                  <a:pt x="795178" y="158704"/>
-                </a:lnTo>
-                <a:lnTo>
-                  <a:pt x="829751" y="141754"/>
-                </a:lnTo>
-                <a:lnTo>
-                  <a:pt x="864324" y="126790"/>
-                </a:lnTo>
-                <a:lnTo>
-                  <a:pt x="898897" y="113557"/>
-                </a:lnTo>
-                <a:lnTo>
-                  <a:pt x="933470" y="101832"/>
-                </a:lnTo>
-                <a:lnTo>
-                  <a:pt x="968043" y="91426"/>
-                </a:lnTo>
-                <a:lnTo>
-                  <a:pt x="1002616" y="82175"/>
-                </a:lnTo>
-                <a:lnTo>
-                  <a:pt x="1037189" y="73935"/>
-                </a:lnTo>
-                <a:lnTo>
-                  <a:pt x="1071762" y="66584"/>
-                </a:lnTo>
-                <a:lnTo>
-                  <a:pt x="1106335" y="60016"/>
-                </a:lnTo>
-                <a:lnTo>
-                  <a:pt x="1140908" y="54138"/>
-                </a:lnTo>
-                <a:lnTo>
-                  <a:pt x="1175481" y="48870"/>
-                </a:lnTo>
-                <a:lnTo>
-                  <a:pt x="1210054" y="44142"/>
-                </a:lnTo>
-                <a:lnTo>
-                  <a:pt x="1244627" y="39893"/>
-                </a:lnTo>
-                <a:lnTo>
-                  <a:pt x="1279200" y="36070"/>
-                </a:lnTo>
-                <a:lnTo>
-                  <a:pt x="1313773" y="32625"/>
-                </a:lnTo>
-                <a:lnTo>
-                  <a:pt x="1348346" y="29518"/>
-                </a:lnTo>
-                <a:lnTo>
-                  <a:pt x="1382919" y="26713"/>
-                </a:lnTo>
-                <a:lnTo>
-                  <a:pt x="1417491" y="24177"/>
-                </a:lnTo>
-                <a:lnTo>
-                  <a:pt x="1452064" y="21884"/>
-                </a:lnTo>
-                <a:lnTo>
-                  <a:pt x="1486637" y="19807"/>
-                </a:lnTo>
-                <a:lnTo>
-                  <a:pt x="1521210" y="17926"/>
-                </a:lnTo>
-                <a:lnTo>
-                  <a:pt x="1555783" y="16220"/>
-                </a:lnTo>
-                <a:lnTo>
-                  <a:pt x="1590356" y="14673"/>
-                </a:lnTo>
-                <a:lnTo>
-                  <a:pt x="1624929" y="13268"/>
-                </a:lnTo>
-                <a:lnTo>
-                  <a:pt x="1659502" y="11992"/>
-                </a:lnTo>
-                <a:lnTo>
-                  <a:pt x="1694075" y="10833"/>
-                </a:lnTo>
-                <a:lnTo>
-                  <a:pt x="1728648" y="9780"/>
-                </a:lnTo>
-                <a:lnTo>
-                  <a:pt x="1763221" y="8822"/>
-                </a:lnTo>
-                <a:lnTo>
-                  <a:pt x="1797794" y="7952"/>
-                </a:lnTo>
-                <a:lnTo>
-                  <a:pt x="1832367" y="7160"/>
-                </a:lnTo>
-                <a:lnTo>
-                  <a:pt x="1866940" y="6440"/>
-                </a:lnTo>
-                <a:lnTo>
-                  <a:pt x="1901513" y="5786"/>
-                </a:lnTo>
-                <a:lnTo>
-                  <a:pt x="1936086" y="5191"/>
-                </a:lnTo>
-                <a:lnTo>
-                  <a:pt x="1970659" y="4650"/>
-                </a:lnTo>
-                <a:lnTo>
-                  <a:pt x="2005232" y="4159"/>
-                </a:lnTo>
-                <a:lnTo>
-                  <a:pt x="2039805" y="3713"/>
-                </a:lnTo>
-                <a:lnTo>
-                  <a:pt x="2074378" y="3308"/>
-                </a:lnTo>
-                <a:lnTo>
-                  <a:pt x="2108951" y="2941"/>
-                </a:lnTo>
-                <a:lnTo>
-                  <a:pt x="2143524" y="2608"/>
-                </a:lnTo>
-                <a:lnTo>
-                  <a:pt x="2178097" y="2307"/>
-                </a:lnTo>
-                <a:lnTo>
-                  <a:pt x="2212670" y="2034"/>
-                </a:lnTo>
-                <a:lnTo>
-                  <a:pt x="2247243" y="1788"/>
-                </a:lnTo>
-                <a:lnTo>
-                  <a:pt x="2281816" y="1567"/>
-                </a:lnTo>
-                <a:lnTo>
-                  <a:pt x="2316389" y="1367"/>
-                </a:lnTo>
-                <a:lnTo>
-                  <a:pt x="2350961" y="1187"/>
-                </a:lnTo>
-                <a:lnTo>
-                  <a:pt x="2385534" y="1026"/>
-                </a:lnTo>
-                <a:lnTo>
-                  <a:pt x="2420107" y="882"/>
-                </a:lnTo>
-                <a:lnTo>
-                  <a:pt x="2454680" y="754"/>
-                </a:lnTo>
-                <a:lnTo>
-                  <a:pt x="2489253" y="640"/>
-                </a:lnTo>
-                <a:lnTo>
-                  <a:pt x="2523826" y="539"/>
-                </a:lnTo>
-                <a:lnTo>
-                  <a:pt x="2558399" y="449"/>
-                </a:lnTo>
-                <a:lnTo>
-                  <a:pt x="2592972" y="371"/>
-                </a:lnTo>
-                <a:lnTo>
-                  <a:pt x="2627545" y="302"/>
-                </a:lnTo>
-                <a:lnTo>
-                  <a:pt x="2662118" y="243"/>
-                </a:lnTo>
-                <a:lnTo>
-                  <a:pt x="2696691" y="192"/>
-                </a:lnTo>
-                <a:lnTo>
-                  <a:pt x="2731264" y="148"/>
-                </a:lnTo>
-                <a:lnTo>
-                  <a:pt x="2765837" y="112"/>
-                </a:lnTo>
-                <a:lnTo>
-                  <a:pt x="2800410" y="81"/>
-                </a:lnTo>
-                <a:lnTo>
-                  <a:pt x="2834983" y="57"/>
-                </a:lnTo>
-                <a:lnTo>
-                  <a:pt x="2869556" y="37"/>
-                </a:lnTo>
-                <a:lnTo>
-                  <a:pt x="2904129" y="22"/>
-                </a:lnTo>
-                <a:lnTo>
-                  <a:pt x="2938702" y="11"/>
-                </a:lnTo>
-                <a:lnTo>
-                  <a:pt x="2973275" y="4"/>
-                </a:lnTo>
-                <a:lnTo>
-                  <a:pt x="3007848" y="1"/>
-                </a:lnTo>
-                <a:lnTo>
-                  <a:pt x="3042421" y="0"/>
-                </a:lnTo>
-                <a:lnTo>
-                  <a:pt x="3076994" y="2"/>
-                </a:lnTo>
-                <a:lnTo>
-                  <a:pt x="3111567" y="7"/>
-                </a:lnTo>
-                <a:lnTo>
-                  <a:pt x="3146140" y="13"/>
-                </a:lnTo>
-                <a:lnTo>
-                  <a:pt x="3180713" y="22"/>
-                </a:lnTo>
-                <a:lnTo>
-                  <a:pt x="3215286" y="32"/>
-                </a:lnTo>
-                <a:lnTo>
-                  <a:pt x="3249859" y="43"/>
-                </a:lnTo>
-                <a:lnTo>
-                  <a:pt x="3284432" y="56"/>
-                </a:lnTo>
-                <a:lnTo>
-                  <a:pt x="3319004" y="69"/>
-                </a:lnTo>
-                <a:lnTo>
-                  <a:pt x="3353577" y="83"/>
-                </a:lnTo>
-                <a:lnTo>
-                  <a:pt x="3388150" y="98"/>
-                </a:lnTo>
-                <a:lnTo>
-                  <a:pt x="3422723" y="113"/>
-                </a:lnTo>
-                <a:lnTo>
-                  <a:pt x="3457296" y="128"/>
-                </a:lnTo>
-                <a:lnTo>
-                  <a:pt x="3491869" y="144"/>
-                </a:lnTo>
-                <a:lnTo>
-                  <a:pt x="3526442" y="159"/>
-                </a:lnTo>
-                <a:lnTo>
-                  <a:pt x="3561015" y="175"/>
-                </a:lnTo>
-                <a:lnTo>
-                  <a:pt x="3595588" y="190"/>
-                </a:lnTo>
-                <a:lnTo>
-                  <a:pt x="3630161" y="205"/>
-                </a:lnTo>
-                <a:lnTo>
-                  <a:pt x="3664734" y="220"/>
-                </a:lnTo>
-                <a:lnTo>
-                  <a:pt x="3699307" y="234"/>
-                </a:lnTo>
-                <a:lnTo>
-                  <a:pt x="3733880" y="247"/>
-                </a:lnTo>
-                <a:lnTo>
-                  <a:pt x="3768453" y="260"/>
-                </a:lnTo>
-                <a:lnTo>
-                  <a:pt x="3803026" y="273"/>
-                </a:lnTo>
-                <a:lnTo>
-                  <a:pt x="3837599" y="284"/>
-                </a:lnTo>
-                <a:lnTo>
-                  <a:pt x="3872172" y="295"/>
-                </a:lnTo>
-                <a:lnTo>
-                  <a:pt x="3906745" y="305"/>
-                </a:lnTo>
-                <a:lnTo>
-                  <a:pt x="3941318" y="314"/>
-                </a:lnTo>
-                <a:lnTo>
-                  <a:pt x="3975891" y="322"/>
-                </a:lnTo>
-                <a:lnTo>
-                  <a:pt x="4010464" y="329"/>
-                </a:lnTo>
-                <a:lnTo>
-                  <a:pt x="4045037" y="335"/>
-                </a:lnTo>
-                <a:lnTo>
-                  <a:pt x="4079610" y="340"/>
-                </a:lnTo>
-                <a:lnTo>
-                  <a:pt x="4114183" y="345"/>
-                </a:lnTo>
-                <a:lnTo>
-                  <a:pt x="4148756" y="348"/>
-                </a:lnTo>
-                <a:lnTo>
-                  <a:pt x="4183329" y="350"/>
-                </a:lnTo>
-                <a:lnTo>
-                  <a:pt x="4217902" y="351"/>
-                </a:lnTo>
-                <a:lnTo>
-                  <a:pt x="4252474" y="351"/>
-                </a:lnTo>
-                <a:lnTo>
-                  <a:pt x="4287047" y="350"/>
-                </a:lnTo>
-                <a:lnTo>
-                  <a:pt x="4321620" y="347"/>
-                </a:lnTo>
-                <a:lnTo>
-                  <a:pt x="4356193" y="344"/>
-                </a:lnTo>
-                <a:lnTo>
-                  <a:pt x="4390766" y="340"/>
-                </a:lnTo>
-                <a:lnTo>
-                  <a:pt x="4425339" y="335"/>
-                </a:lnTo>
-                <a:lnTo>
-                  <a:pt x="4459912" y="328"/>
-                </a:lnTo>
-                <a:lnTo>
-                  <a:pt x="4494485" y="321"/>
-                </a:lnTo>
-                <a:lnTo>
-                  <a:pt x="4529058" y="313"/>
-                </a:lnTo>
-                <a:lnTo>
-                  <a:pt x="4563631" y="304"/>
-                </a:lnTo>
-                <a:lnTo>
-                  <a:pt x="4598204" y="294"/>
-                </a:lnTo>
-                <a:lnTo>
-                  <a:pt x="4632777" y="283"/>
-                </a:lnTo>
-                <a:lnTo>
-                  <a:pt x="4667350" y="271"/>
-                </a:lnTo>
-                <a:lnTo>
-                  <a:pt x="4701923" y="259"/>
-                </a:lnTo>
-                <a:lnTo>
-                  <a:pt x="4736496" y="246"/>
-                </a:lnTo>
-                <a:lnTo>
-                  <a:pt x="4771069" y="232"/>
-                </a:lnTo>
-                <a:lnTo>
-                  <a:pt x="4805642" y="218"/>
-                </a:lnTo>
-                <a:lnTo>
-                  <a:pt x="4840215" y="204"/>
-                </a:lnTo>
-                <a:lnTo>
-                  <a:pt x="4874788" y="189"/>
-                </a:lnTo>
-                <a:lnTo>
-                  <a:pt x="4909361" y="173"/>
-                </a:lnTo>
-                <a:lnTo>
-                  <a:pt x="4922943" y="167"/>
+                  <a:pt x="49876" y="1471352"/>
+                </a:lnTo>
+                <a:lnTo>
+                  <a:pt x="99752" y="1446414"/>
+                </a:lnTo>
+                <a:lnTo>
+                  <a:pt x="149629" y="1421476"/>
+                </a:lnTo>
+                <a:lnTo>
+                  <a:pt x="199505" y="1396538"/>
+                </a:lnTo>
+                <a:lnTo>
+                  <a:pt x="249382" y="1371600"/>
+                </a:lnTo>
+                <a:lnTo>
+                  <a:pt x="299258" y="1346661"/>
+                </a:lnTo>
+                <a:lnTo>
+                  <a:pt x="349134" y="1321723"/>
+                </a:lnTo>
+                <a:lnTo>
+                  <a:pt x="399011" y="1296785"/>
+                </a:lnTo>
+                <a:lnTo>
+                  <a:pt x="448887" y="1271847"/>
+                </a:lnTo>
+                <a:lnTo>
+                  <a:pt x="498763" y="1246909"/>
+                </a:lnTo>
+                <a:lnTo>
+                  <a:pt x="548640" y="1221970"/>
+                </a:lnTo>
+                <a:lnTo>
+                  <a:pt x="598516" y="1197032"/>
+                </a:lnTo>
+                <a:lnTo>
+                  <a:pt x="648392" y="1172094"/>
+                </a:lnTo>
+                <a:lnTo>
+                  <a:pt x="698269" y="1147156"/>
+                </a:lnTo>
+                <a:lnTo>
+                  <a:pt x="748145" y="1122218"/>
+                </a:lnTo>
+                <a:lnTo>
+                  <a:pt x="798022" y="1097280"/>
+                </a:lnTo>
+                <a:lnTo>
+                  <a:pt x="847898" y="1072341"/>
+                </a:lnTo>
+                <a:lnTo>
+                  <a:pt x="897774" y="1047403"/>
+                </a:lnTo>
+                <a:lnTo>
+                  <a:pt x="947651" y="1022465"/>
+                </a:lnTo>
+                <a:lnTo>
+                  <a:pt x="997527" y="997527"/>
+                </a:lnTo>
+                <a:lnTo>
+                  <a:pt x="1047403" y="972589"/>
+                </a:lnTo>
+                <a:lnTo>
+                  <a:pt x="1097280" y="947650"/>
+                </a:lnTo>
+                <a:lnTo>
+                  <a:pt x="1147156" y="922712"/>
+                </a:lnTo>
+                <a:lnTo>
+                  <a:pt x="1197032" y="897774"/>
+                </a:lnTo>
+                <a:lnTo>
+                  <a:pt x="1246909" y="872836"/>
+                </a:lnTo>
+                <a:lnTo>
+                  <a:pt x="1296785" y="847898"/>
+                </a:lnTo>
+                <a:lnTo>
+                  <a:pt x="1346662" y="822960"/>
+                </a:lnTo>
+                <a:lnTo>
+                  <a:pt x="1396538" y="798021"/>
+                </a:lnTo>
+                <a:lnTo>
+                  <a:pt x="1446414" y="773083"/>
+                </a:lnTo>
+                <a:lnTo>
+                  <a:pt x="1496291" y="748145"/>
+                </a:lnTo>
+                <a:lnTo>
+                  <a:pt x="1546167" y="723207"/>
+                </a:lnTo>
+                <a:lnTo>
+                  <a:pt x="1596043" y="698269"/>
+                </a:lnTo>
+                <a:lnTo>
+                  <a:pt x="1645920" y="673330"/>
+                </a:lnTo>
+                <a:lnTo>
+                  <a:pt x="1695796" y="648392"/>
+                </a:lnTo>
+                <a:lnTo>
+                  <a:pt x="1745672" y="623454"/>
+                </a:lnTo>
+                <a:lnTo>
+                  <a:pt x="1795549" y="598516"/>
+                </a:lnTo>
+                <a:lnTo>
+                  <a:pt x="1845425" y="573578"/>
+                </a:lnTo>
+                <a:lnTo>
+                  <a:pt x="1895302" y="548640"/>
+                </a:lnTo>
+                <a:lnTo>
+                  <a:pt x="1945178" y="523701"/>
+                </a:lnTo>
+                <a:lnTo>
+                  <a:pt x="1995054" y="498763"/>
+                </a:lnTo>
+                <a:lnTo>
+                  <a:pt x="2044931" y="473825"/>
+                </a:lnTo>
+                <a:lnTo>
+                  <a:pt x="2094807" y="448887"/>
+                </a:lnTo>
+                <a:lnTo>
+                  <a:pt x="2144683" y="423949"/>
+                </a:lnTo>
+                <a:lnTo>
+                  <a:pt x="2194560" y="399010"/>
+                </a:lnTo>
+                <a:lnTo>
+                  <a:pt x="2244436" y="374072"/>
+                </a:lnTo>
+                <a:lnTo>
+                  <a:pt x="2294312" y="349134"/>
+                </a:lnTo>
+                <a:lnTo>
+                  <a:pt x="2344189" y="324196"/>
+                </a:lnTo>
+                <a:lnTo>
+                  <a:pt x="2394065" y="299258"/>
+                </a:lnTo>
+                <a:lnTo>
+                  <a:pt x="2443942" y="274320"/>
+                </a:lnTo>
+                <a:lnTo>
+                  <a:pt x="2493818" y="249381"/>
+                </a:lnTo>
+                <a:lnTo>
+                  <a:pt x="2543694" y="224443"/>
+                </a:lnTo>
+                <a:lnTo>
+                  <a:pt x="2593571" y="199505"/>
+                </a:lnTo>
+                <a:lnTo>
+                  <a:pt x="2643447" y="174567"/>
+                </a:lnTo>
+                <a:lnTo>
+                  <a:pt x="2693323" y="149629"/>
+                </a:lnTo>
+                <a:lnTo>
+                  <a:pt x="2743200" y="124690"/>
+                </a:lnTo>
+                <a:lnTo>
+                  <a:pt x="2793076" y="99752"/>
+                </a:lnTo>
+                <a:lnTo>
+                  <a:pt x="2842952" y="74814"/>
+                </a:lnTo>
+                <a:lnTo>
+                  <a:pt x="2892829" y="49876"/>
+                </a:lnTo>
+                <a:lnTo>
+                  <a:pt x="2942705" y="24938"/>
+                </a:lnTo>
+                <a:lnTo>
+                  <a:pt x="2992582" y="0"/>
                 </a:lnTo>
               </a:path>
             </a:pathLst>
           </a:custGeom>
           <a:noFill/>
-          <a:ln w="20320">
+          <a:ln w="38100">
             <a:solidFill>
-              <a:srgbClr val="FFFFFF"/>
+              <a:srgbClr val="8EDBD4"/>
+            </a:solidFill>
+          </a:ln>
+          <a:effectLst/>
+        </p:spPr>
+        <p:txBody>
+          <a:bodyPr rtlCol="0" anchor="ctr"/>
+          <a:lstStyle/>
+          <a:p>
+            <a:pPr algn="ctr"/>
+          </a:p>
+        </p:txBody>
+      </p:sp>
+      <p:cxnSp>
+        <p:nvCxnSpPr>
+          <p:cNvPr id="37" name="C1-E30 line 35" descr="sci-ppt:o035"/>
+          <p:cNvCxnSpPr/>
+          <p:nvPr/>
+        </p:nvCxnSpPr>
+        <p:spPr>
+          <a:xfrm>
+            <a:off x="6858000" y="3063240"/>
+            <a:ext cx="4937760" cy="0"/>
+          </a:xfrm>
+          <a:prstGeom prst="line">
+            <a:avLst/>
+          </a:prstGeom>
+          <a:ln w="16510">
+            <a:solidFill>
+              <a:srgbClr val="F2B880"/>
             </a:solidFill>
             <a:prstDash val="dash"/>
           </a:ln>
           <a:effectLst/>
         </p:spPr>
-        <p:txBody>
-          <a:bodyPr rtlCol="0" anchor="ctr"/>
-          <a:lstStyle/>
-          <a:p>
-            <a:pPr algn="ctr"/>
-          </a:p>
-        </p:txBody>
-      </p:sp>
-      <p:sp>
-        <p:nvSpPr>
-          <p:cNvPr id="35" name="C1-E30 text 33" descr="sci-ppt:o033"/>
+      </p:cxnSp>
+      <p:sp>
+        <p:nvSpPr>
+          <p:cNvPr id="38" name="C1-E30 text 36" descr="sci-ppt:o036"/>
           <p:cNvSpPr txBox="1"/>
           <p:nvPr/>
         </p:nvSpPr>
         <p:spPr>
           <a:xfrm>
-            <a:off x="7095744" y="1407261"/>
-            <a:ext cx="4754880" cy="216153"/>
+            <a:off x="7220984" y="2788920"/>
+            <a:ext cx="1097280" cy="231648"/>
           </a:xfrm>
           <a:prstGeom prst="rect">
             <a:avLst/>
@@ -4946,59 +5217,147 @@
               </a:spcAft>
             </a:pPr>
             <a:r>
-              <a:rPr sz="1100" b="0" i="0">
+              <a:rPr sz="1200" b="0" i="0">
+                <a:solidFill>
+                  <a:srgbClr val="F2B880"/>
+                </a:solidFill>
+                <a:latin typeface="Arial"/>
+              </a:rPr>
+              <a:t>𝒞ₑ = 1</a:t>
+            </a:r>
+          </a:p>
+        </p:txBody>
+      </p:sp>
+      <p:sp>
+        <p:nvSpPr>
+          <p:cNvPr id="39" name="C1-E30 text 37" descr="sci-ppt:o037"/>
+          <p:cNvSpPr txBox="1"/>
+          <p:nvPr/>
+        </p:nvSpPr>
+        <p:spPr>
+          <a:xfrm>
+            <a:off x="9072543" y="1901104"/>
+            <a:ext cx="1645920" cy="231648"/>
+          </a:xfrm>
+          <a:prstGeom prst="rect">
+            <a:avLst/>
+          </a:prstGeom>
+          <a:noFill/>
+          <a:effectLst/>
+        </p:spPr>
+        <p:txBody>
+          <a:bodyPr wrap="none" lIns="18288" rIns="18288" tIns="18288" bIns="18288" anchor="t">
+            <a:spAutoFit/>
+          </a:bodyPr>
+          <a:lstStyle/>
+          <a:p>
+            <a:pPr algn="l">
+              <a:spcAft>
+                <a:spcPts val="0"/>
+              </a:spcAft>
+            </a:pPr>
+            <a:r>
+              <a:rPr sz="1200" b="0" i="0">
+                <a:solidFill>
+                  <a:srgbClr val="F28BA0"/>
+                </a:solidFill>
+                <a:latin typeface="Arial"/>
+              </a:rPr>
+              <a:t>τₑ = 0.1 µs</a:t>
+            </a:r>
+          </a:p>
+        </p:txBody>
+      </p:sp>
+      <p:sp>
+        <p:nvSpPr>
+          <p:cNvPr id="40" name="C1-E30 text 38" descr="sci-ppt:o038"/>
+          <p:cNvSpPr txBox="1"/>
+          <p:nvPr/>
+        </p:nvSpPr>
+        <p:spPr>
+          <a:xfrm>
+            <a:off x="10353317" y="3402108"/>
+            <a:ext cx="1645920" cy="231648"/>
+          </a:xfrm>
+          <a:prstGeom prst="rect">
+            <a:avLst/>
+          </a:prstGeom>
+          <a:noFill/>
+          <a:effectLst/>
+        </p:spPr>
+        <p:txBody>
+          <a:bodyPr wrap="none" lIns="18288" rIns="18288" tIns="18288" bIns="18288" anchor="t">
+            <a:spAutoFit/>
+          </a:bodyPr>
+          <a:lstStyle/>
+          <a:p>
+            <a:pPr algn="l">
+              <a:spcAft>
+                <a:spcPts val="0"/>
+              </a:spcAft>
+            </a:pPr>
+            <a:r>
+              <a:rPr sz="1200" b="0" i="0">
+                <a:solidFill>
+                  <a:srgbClr val="8EDBD4"/>
+                </a:solidFill>
+                <a:latin typeface="Arial"/>
+              </a:rPr>
+              <a:t>τₑ = 10 µs</a:t>
+            </a:r>
+          </a:p>
+        </p:txBody>
+      </p:sp>
+      <p:sp>
+        <p:nvSpPr>
+          <p:cNvPr id="41" name="C1-E30 text 39" descr="sci-ppt:o039"/>
+          <p:cNvSpPr txBox="1"/>
+          <p:nvPr/>
+        </p:nvSpPr>
+        <p:spPr>
+          <a:xfrm>
+            <a:off x="6858000" y="5212080"/>
+            <a:ext cx="4937760" cy="239395"/>
+          </a:xfrm>
+          <a:prstGeom prst="rect">
+            <a:avLst/>
+          </a:prstGeom>
+          <a:noFill/>
+          <a:effectLst/>
+        </p:spPr>
+        <p:txBody>
+          <a:bodyPr wrap="none" lIns="18288" rIns="18288" tIns="18288" bIns="18288" anchor="t">
+            <a:spAutoFit/>
+          </a:bodyPr>
+          <a:lstStyle/>
+          <a:p>
+            <a:pPr algn="l">
+              <a:spcAft>
+                <a:spcPts val="0"/>
+              </a:spcAft>
+            </a:pPr>
+            <a:r>
+              <a:rPr sz="1250" b="1" i="0">
                 <a:solidFill>
                   <a:srgbClr val="E7F0F3"/>
                 </a:solidFill>
                 <a:latin typeface="Arial"/>
               </a:rPr>
-              <a:t>solid: left side, dashed: right side; relative gap 1e-05</a:t>
-            </a:r>
-          </a:p>
-        </p:txBody>
-      </p:sp>
-      <p:sp>
-        <p:nvSpPr>
-          <p:cNvPr id="36" name="C1-E30 round_rect 34" descr="sci-ppt:o034"/>
-          <p:cNvSpPr/>
-          <p:nvPr/>
-        </p:nvSpPr>
-        <p:spPr>
-          <a:xfrm>
-            <a:off x="365760" y="914400"/>
-            <a:ext cx="5669280" cy="4937760"/>
-          </a:xfrm>
-          <a:prstGeom prst="roundRect">
-            <a:avLst/>
-          </a:prstGeom>
-          <a:solidFill>
-            <a:srgbClr val="213E4B"/>
-          </a:solidFill>
-          <a:ln w="20320">
-            <a:solidFill>
-              <a:srgbClr val="8EDBD4"/>
-            </a:solidFill>
-          </a:ln>
-          <a:effectLst/>
-        </p:spPr>
-        <p:txBody>
-          <a:bodyPr rtlCol="0" anchor="ctr"/>
-          <a:lstStyle/>
-          <a:p>
-            <a:pPr algn="ctr"/>
-          </a:p>
-        </p:txBody>
-      </p:sp>
-      <p:sp>
-        <p:nvSpPr>
-          <p:cNvPr id="37" name="C1-E30 text 35" descr="sci-ppt:o035"/>
+              <a:t>M_w = |Ṙ|/c  and  𝒞ₑ = Lₑ/(cτₑ)  test different things.</a:t>
+            </a:r>
+          </a:p>
+        </p:txBody>
+      </p:sp>
+      <p:sp>
+        <p:nvSpPr>
+          <p:cNvPr id="42" name="C1-E30 text 40" descr="sci-ppt:o040"/>
           <p:cNvSpPr txBox="1"/>
           <p:nvPr/>
         </p:nvSpPr>
         <p:spPr>
           <a:xfrm>
-            <a:off x="475488" y="969264"/>
-            <a:ext cx="5449824" cy="254889"/>
+            <a:off x="457200" y="5669280"/>
+            <a:ext cx="11338560" cy="247142"/>
           </a:xfrm>
           <a:prstGeom prst="rect">
             <a:avLst/>
@@ -5018,524 +5377,20 @@
               </a:spcAft>
             </a:pPr>
             <a:r>
-              <a:rPr sz="1350" b="1" i="0">
-                <a:solidFill>
-                  <a:srgbClr val="8EDBD4"/>
-                </a:solidFill>
-                <a:latin typeface="Arial"/>
-              </a:rPr>
-              <a:t>The general closure contains the sphere</a:t>
-            </a:r>
-          </a:p>
-        </p:txBody>
-      </p:sp>
-      <p:sp>
-        <p:nvSpPr>
-          <p:cNvPr id="38" name="C1-E30 text 36" descr="sci-ppt:o036"/>
-          <p:cNvSpPr txBox="1"/>
-          <p:nvPr/>
-        </p:nvSpPr>
-        <p:spPr>
-          <a:xfrm>
-            <a:off x="548640" y="1371600"/>
-            <a:ext cx="5303520" cy="239395"/>
-          </a:xfrm>
-          <a:prstGeom prst="rect">
-            <a:avLst/>
-          </a:prstGeom>
-          <a:noFill/>
-          <a:effectLst/>
-        </p:spPr>
-        <p:txBody>
-          <a:bodyPr wrap="none" lIns="18288" rIns="18288" tIns="18288" bIns="18288" anchor="t">
-            <a:spAutoFit/>
-          </a:bodyPr>
-          <a:lstStyle/>
-          <a:p>
-            <a:pPr algn="l">
-              <a:spcAft>
-                <a:spcPts val="0"/>
-              </a:spcAft>
-            </a:pPr>
-            <a:r>
-              <a:rPr sz="1250" b="1" i="0">
-                <a:solidFill>
-                  <a:srgbClr val="8EDBD4"/>
-                </a:solidFill>
-                <a:latin typeface="Arial"/>
-              </a:rPr>
-              <a:t>General closure, Eq. C1-E29</a:t>
-            </a:r>
-          </a:p>
-        </p:txBody>
-      </p:sp>
-      <p:sp>
-        <p:nvSpPr>
-          <p:cNvPr id="39" name="C1-E30 text 37" descr="sci-ppt:o037"/>
-          <p:cNvSpPr txBox="1"/>
-          <p:nvPr/>
-        </p:nvSpPr>
-        <p:spPr>
-          <a:xfrm>
-            <a:off x="777240" y="1664208"/>
-            <a:ext cx="5120640" cy="239395"/>
-          </a:xfrm>
-          <a:prstGeom prst="rect">
-            <a:avLst/>
-          </a:prstGeom>
-          <a:noFill/>
-          <a:effectLst/>
-        </p:spPr>
-        <p:txBody>
-          <a:bodyPr wrap="none" lIns="18288" rIns="18288" tIns="18288" bIns="18288" anchor="t">
-            <a:spAutoFit/>
-          </a:bodyPr>
-          <a:lstStyle/>
-          <a:p>
-            <a:pPr algn="l">
-              <a:spcAft>
-                <a:spcPts val="0"/>
-              </a:spcAft>
-            </a:pPr>
-            <a:r>
-              <a:rPr sz="1250" b="0" i="0">
-                <a:solidFill>
-                  <a:srgbClr val="E7F0F3"/>
-                </a:solidFill>
-                <a:latin typeface="Arial"/>
-              </a:rPr>
-              <a:t>D φ/Dt = ½|u|² + (p∞ − p_b − σκ)/ρ</a:t>
-            </a:r>
-          </a:p>
-        </p:txBody>
-      </p:sp>
-      <p:cxnSp>
-        <p:nvCxnSpPr>
-          <p:cNvPr id="40" name="C1-E30 arrow 38" descr="sci-ppt:o038"/>
-          <p:cNvCxnSpPr/>
-          <p:nvPr/>
-        </p:nvCxnSpPr>
-        <p:spPr>
-          <a:xfrm>
-            <a:off x="3108960" y="1976755"/>
-            <a:ext cx="0" cy="182880"/>
-          </a:xfrm>
-          <a:prstGeom prst="line">
-            <a:avLst/>
-          </a:prstGeom>
-          <a:ln w="25400">
-            <a:solidFill>
-              <a:srgbClr val="B4C7D2"/>
-            </a:solidFill>
-            <a:headEnd type="none" w="med" len="med"/>
-            <a:tailEnd type="triangle" w="med" len="med"/>
-          </a:ln>
-          <a:effectLst/>
-        </p:spPr>
-      </p:cxnSp>
-      <p:sp>
-        <p:nvSpPr>
-          <p:cNvPr id="41" name="C1-E30 text 39" descr="sci-ppt:o039"/>
-          <p:cNvSpPr txBox="1"/>
-          <p:nvPr/>
-        </p:nvSpPr>
-        <p:spPr>
-          <a:xfrm>
-            <a:off x="548640" y="2214499"/>
-            <a:ext cx="5303520" cy="239395"/>
-          </a:xfrm>
-          <a:prstGeom prst="rect">
-            <a:avLst/>
-          </a:prstGeom>
-          <a:noFill/>
-          <a:effectLst/>
-        </p:spPr>
-        <p:txBody>
-          <a:bodyPr wrap="none" lIns="18288" rIns="18288" tIns="18288" bIns="18288" anchor="t">
-            <a:spAutoFit/>
-          </a:bodyPr>
-          <a:lstStyle/>
-          <a:p>
-            <a:pPr algn="l">
-              <a:spcAft>
-                <a:spcPts val="0"/>
-              </a:spcAft>
-            </a:pPr>
-            <a:r>
-              <a:rPr sz="1250" b="1" i="0">
+              <a:rPr sz="1300" b="0" i="0">
                 <a:solidFill>
                   <a:srgbClr val="F2B880"/>
                 </a:solidFill>
                 <a:latin typeface="Arial"/>
               </a:rPr>
-              <a:t>Insert the sphere</a:t>
-            </a:r>
-          </a:p>
-        </p:txBody>
-      </p:sp>
-      <p:sp>
-        <p:nvSpPr>
-          <p:cNvPr id="42" name="C1-E30 text 40" descr="sci-ppt:o040"/>
-          <p:cNvSpPr txBox="1"/>
-          <p:nvPr/>
-        </p:nvSpPr>
-        <p:spPr>
-          <a:xfrm>
-            <a:off x="777240" y="2507107"/>
-            <a:ext cx="5120640" cy="239395"/>
-          </a:xfrm>
-          <a:prstGeom prst="rect">
-            <a:avLst/>
-          </a:prstGeom>
-          <a:noFill/>
-          <a:effectLst/>
-        </p:spPr>
-        <p:txBody>
-          <a:bodyPr wrap="none" lIns="18288" rIns="18288" tIns="18288" bIns="18288" anchor="t">
-            <a:spAutoFit/>
-          </a:bodyPr>
-          <a:lstStyle/>
-          <a:p>
-            <a:pPr algn="l">
-              <a:spcAft>
-                <a:spcPts val="0"/>
-              </a:spcAft>
-            </a:pPr>
-            <a:r>
-              <a:rPr sz="1250" b="0" i="0">
-                <a:solidFill>
-                  <a:srgbClr val="E7F0F3"/>
-                </a:solidFill>
-                <a:latin typeface="Arial"/>
-              </a:rPr>
-              <a:t>φ_Γ = −RṘ,   κ = −2/R</a:t>
-            </a:r>
-          </a:p>
-        </p:txBody>
-      </p:sp>
-      <p:cxnSp>
-        <p:nvCxnSpPr>
-          <p:cNvPr id="43" name="C1-E30 arrow 41" descr="sci-ppt:o041"/>
-          <p:cNvCxnSpPr/>
-          <p:nvPr/>
-        </p:nvCxnSpPr>
-        <p:spPr>
-          <a:xfrm>
-            <a:off x="3108960" y="2819654"/>
-            <a:ext cx="0" cy="182880"/>
-          </a:xfrm>
-          <a:prstGeom prst="line">
-            <a:avLst/>
-          </a:prstGeom>
-          <a:ln w="25400">
-            <a:solidFill>
-              <a:srgbClr val="B4C7D2"/>
-            </a:solidFill>
-            <a:headEnd type="none" w="med" len="med"/>
-            <a:tailEnd type="triangle" w="med" len="med"/>
-          </a:ln>
-          <a:effectLst/>
-        </p:spPr>
-      </p:cxnSp>
-      <p:sp>
-        <p:nvSpPr>
-          <p:cNvPr id="44" name="C1-E30 text 42" descr="sci-ppt:o042"/>
-          <p:cNvSpPr txBox="1"/>
-          <p:nvPr/>
-        </p:nvSpPr>
-        <p:spPr>
-          <a:xfrm>
-            <a:off x="548640" y="3057398"/>
-            <a:ext cx="5303520" cy="239395"/>
-          </a:xfrm>
-          <a:prstGeom prst="rect">
-            <a:avLst/>
-          </a:prstGeom>
-          <a:noFill/>
-          <a:effectLst/>
-        </p:spPr>
-        <p:txBody>
-          <a:bodyPr wrap="none" lIns="18288" rIns="18288" tIns="18288" bIns="18288" anchor="t">
-            <a:spAutoFit/>
-          </a:bodyPr>
-          <a:lstStyle/>
-          <a:p>
-            <a:pPr algn="l">
-              <a:spcAft>
-                <a:spcPts val="0"/>
-              </a:spcAft>
-            </a:pPr>
-            <a:r>
-              <a:rPr sz="1250" b="1" i="0">
-                <a:solidFill>
-                  <a:srgbClr val="7FC8F8"/>
-                </a:solidFill>
-                <a:latin typeface="Arial"/>
-              </a:rPr>
-              <a:t>Differentiate along the wall</a:t>
-            </a:r>
-          </a:p>
-        </p:txBody>
-      </p:sp>
-      <p:sp>
-        <p:nvSpPr>
-          <p:cNvPr id="45" name="C1-E30 text 43" descr="sci-ppt:o043"/>
-          <p:cNvSpPr txBox="1"/>
-          <p:nvPr/>
-        </p:nvSpPr>
-        <p:spPr>
-          <a:xfrm>
-            <a:off x="777240" y="3350006"/>
-            <a:ext cx="5120640" cy="239395"/>
-          </a:xfrm>
-          <a:prstGeom prst="rect">
-            <a:avLst/>
-          </a:prstGeom>
-          <a:noFill/>
-          <a:effectLst/>
-        </p:spPr>
-        <p:txBody>
-          <a:bodyPr wrap="none" lIns="18288" rIns="18288" tIns="18288" bIns="18288" anchor="t">
-            <a:spAutoFit/>
-          </a:bodyPr>
-          <a:lstStyle/>
-          <a:p>
-            <a:pPr algn="l">
-              <a:spcAft>
-                <a:spcPts val="0"/>
-              </a:spcAft>
-            </a:pPr>
-            <a:r>
-              <a:rPr sz="1250" b="0" i="0">
-                <a:solidFill>
-                  <a:srgbClr val="E7F0F3"/>
-                </a:solidFill>
-                <a:latin typeface="Arial"/>
-              </a:rPr>
-              <a:t>−Ṙ² − RR̈ = (p∞ − p_b + 2σ/R)/ρ + ½Ṙ²</a:t>
-            </a:r>
-          </a:p>
-        </p:txBody>
-      </p:sp>
-      <p:cxnSp>
-        <p:nvCxnSpPr>
-          <p:cNvPr id="46" name="C1-E30 arrow 44" descr="sci-ppt:o044"/>
-          <p:cNvCxnSpPr/>
-          <p:nvPr/>
-        </p:nvCxnSpPr>
-        <p:spPr>
-          <a:xfrm>
-            <a:off x="3108960" y="3662552"/>
-            <a:ext cx="0" cy="182880"/>
-          </a:xfrm>
-          <a:prstGeom prst="line">
-            <a:avLst/>
-          </a:prstGeom>
-          <a:ln w="25400">
-            <a:solidFill>
-              <a:srgbClr val="B4C7D2"/>
-            </a:solidFill>
-            <a:headEnd type="none" w="med" len="med"/>
-            <a:tailEnd type="triangle" w="med" len="med"/>
-          </a:ln>
-          <a:effectLst/>
-        </p:spPr>
-      </p:cxnSp>
-      <p:sp>
-        <p:nvSpPr>
-          <p:cNvPr id="47" name="C1-E30 text 45" descr="sci-ppt:o045"/>
-          <p:cNvSpPr txBox="1"/>
-          <p:nvPr/>
-        </p:nvSpPr>
-        <p:spPr>
-          <a:xfrm>
-            <a:off x="548640" y="3900296"/>
-            <a:ext cx="5303520" cy="239395"/>
-          </a:xfrm>
-          <a:prstGeom prst="rect">
-            <a:avLst/>
-          </a:prstGeom>
-          <a:noFill/>
-          <a:effectLst/>
-        </p:spPr>
-        <p:txBody>
-          <a:bodyPr wrap="none" lIns="18288" rIns="18288" tIns="18288" bIns="18288" anchor="t">
-            <a:spAutoFit/>
-          </a:bodyPr>
-          <a:lstStyle/>
-          <a:p>
-            <a:pPr algn="l">
-              <a:spcAft>
-                <a:spcPts val="0"/>
-              </a:spcAft>
-            </a:pPr>
-            <a:r>
-              <a:rPr sz="1250" b="1" i="0">
-                <a:solidFill>
-                  <a:srgbClr val="F28BA0"/>
-                </a:solidFill>
-                <a:latin typeface="Arial"/>
-              </a:rPr>
-              <a:t>Rearrange</a:t>
-            </a:r>
-          </a:p>
-        </p:txBody>
-      </p:sp>
-      <p:sp>
-        <p:nvSpPr>
-          <p:cNvPr id="48" name="C1-E30 text 46" descr="sci-ppt:o046"/>
-          <p:cNvSpPr txBox="1"/>
-          <p:nvPr/>
-        </p:nvSpPr>
-        <p:spPr>
-          <a:xfrm>
-            <a:off x="777240" y="4192904"/>
-            <a:ext cx="5120640" cy="239395"/>
-          </a:xfrm>
-          <a:prstGeom prst="rect">
-            <a:avLst/>
-          </a:prstGeom>
-          <a:noFill/>
-          <a:effectLst/>
-        </p:spPr>
-        <p:txBody>
-          <a:bodyPr wrap="none" lIns="18288" rIns="18288" tIns="18288" bIns="18288" anchor="t">
-            <a:spAutoFit/>
-          </a:bodyPr>
-          <a:lstStyle/>
-          <a:p>
-            <a:pPr algn="l">
-              <a:spcAft>
-                <a:spcPts val="0"/>
-              </a:spcAft>
-            </a:pPr>
-            <a:r>
-              <a:rPr sz="1250" b="0" i="0">
-                <a:solidFill>
-                  <a:srgbClr val="E7F0F3"/>
-                </a:solidFill>
-                <a:latin typeface="Arial"/>
-              </a:rPr>
-              <a:t>ρ(RR̈ + 3Ṙ²/2) = p_b − p∞ − 2σ/R</a:t>
-            </a:r>
-          </a:p>
-        </p:txBody>
-      </p:sp>
-      <p:sp>
-        <p:nvSpPr>
-          <p:cNvPr id="49" name="C1-E30 text 47" descr="sci-ppt:o047"/>
-          <p:cNvSpPr txBox="1"/>
-          <p:nvPr/>
-        </p:nvSpPr>
-        <p:spPr>
-          <a:xfrm>
-            <a:off x="548640" y="5074920"/>
-            <a:ext cx="5303520" cy="417576"/>
-          </a:xfrm>
-          <a:prstGeom prst="rect">
-            <a:avLst/>
-          </a:prstGeom>
-          <a:noFill/>
-          <a:effectLst/>
-        </p:spPr>
-        <p:txBody>
-          <a:bodyPr wrap="none" lIns="18288" rIns="18288" tIns="18288" bIns="18288" anchor="t">
-            <a:spAutoFit/>
-          </a:bodyPr>
-          <a:lstStyle/>
-          <a:p>
-            <a:pPr algn="l">
-              <a:spcAft>
-                <a:spcPts val="0"/>
-              </a:spcAft>
-            </a:pPr>
-            <a:r>
-              <a:rPr sz="1200" b="0" i="0">
-                <a:solidFill>
-                  <a:srgbClr val="B4C7D2"/>
-                </a:solidFill>
-                <a:latin typeface="Arial"/>
-              </a:rPr>
-              <a:t>This is the Rayleigh–Plesset equation without viscosity: the</a:t>
-            </a:r>
-          </a:p>
-          <a:p>
-            <a:pPr algn="l">
-              <a:spcAft>
-                <a:spcPts val="0"/>
-              </a:spcAft>
-            </a:pPr>
-            <a:r>
-              <a:rPr sz="1200" b="0" i="0">
-                <a:solidFill>
-                  <a:srgbClr val="B4C7D2"/>
-                </a:solidFill>
-                <a:latin typeface="Arial"/>
-              </a:rPr>
-              <a:t>spatial theory returns the spherical model in its own limit.</a:t>
-            </a:r>
-          </a:p>
-        </p:txBody>
-      </p:sp>
-      <p:sp>
-        <p:nvSpPr>
-          <p:cNvPr id="50" name="C1-E30 text 48" descr="sci-ppt:o048"/>
-          <p:cNvSpPr txBox="1"/>
-          <p:nvPr/>
-        </p:nvSpPr>
-        <p:spPr>
-          <a:xfrm>
-            <a:off x="6858000" y="5669280"/>
-            <a:ext cx="4937760" cy="433070"/>
-          </a:xfrm>
-          <a:prstGeom prst="rect">
-            <a:avLst/>
-          </a:prstGeom>
-          <a:noFill/>
-          <a:effectLst/>
-        </p:spPr>
-        <p:txBody>
-          <a:bodyPr wrap="none" lIns="18288" rIns="18288" tIns="18288" bIns="18288" anchor="t">
-            <a:spAutoFit/>
-          </a:bodyPr>
-          <a:lstStyle/>
-          <a:p>
-            <a:pPr algn="l">
-              <a:spcAft>
-                <a:spcPts val="0"/>
-              </a:spcAft>
-            </a:pPr>
-            <a:r>
-              <a:rPr sz="1250" b="0" i="0">
-                <a:solidFill>
-                  <a:srgbClr val="E7F0F3"/>
-                </a:solidFill>
-                <a:latin typeface="Arial"/>
-              </a:rPr>
-              <a:t>Check: R(t) from the solution, R̈ by finite differences.</a:t>
-            </a:r>
-          </a:p>
-          <a:p>
-            <a:pPr algn="l">
-              <a:spcAft>
-                <a:spcPts val="0"/>
-              </a:spcAft>
-            </a:pPr>
-            <a:r>
-              <a:rPr sz="1250" b="0" i="0">
-                <a:solidFill>
-                  <a:srgbClr val="E7F0F3"/>
-                </a:solidFill>
-                <a:latin typeface="Arial"/>
-              </a:rPr>
-              <a:t>The two sides coincide, so the algebra above is exact.</a:t>
-            </a:r>
-          </a:p>
-        </p:txBody>
-      </p:sp>
-      <p:sp>
-        <p:nvSpPr>
-          <p:cNvPr id="51" name="C1-E30 text 49" descr="sci-ppt:o049"/>
+              <a:t>A pulse can need compressibility even when the wall is slow: 𝒞ₑ ≳ 1 means pressure cannot equalise during the rise.</a:t>
+            </a:r>
+          </a:p>
+        </p:txBody>
+      </p:sp>
+      <p:sp>
+        <p:nvSpPr>
+          <p:cNvPr id="43" name="C1-E30 text 41" descr="sci-ppt:o041"/>
           <p:cNvSpPr txBox="1"/>
           <p:nvPr/>
         </p:nvSpPr>
@@ -5568,7 +5423,7 @@
                 </a:solidFill>
                 <a:latin typeface="Arial"/>
               </a:rPr>
-              <a:t>Inviscid Rayleigh–Plesset run: R₀ = 5 µm, p_g0 = 1 MPa, γ = 1.4, σ = 0.072 N/m.</a:t>
+              <a:t>c = 1500 m/s; curves from the definition 𝒞ₑ = Lₑ/(c τₑ) of Eq. C1-E30.</a:t>
             </a:r>
           </a:p>
         </p:txBody>
